--- a/Intiligent AI-Based Travel & Tourism Planner.pptx
+++ b/Intiligent AI-Based Travel & Tourism Planner.pptx
@@ -1,11 +1,11 @@
 
 <file path=ppt/presentation.xml><?xml version="1.0" encoding="utf-8"?>
-<p:presentation xmlns:a="http://schemas.openxmlformats.org/drawingml/2006/main" xmlns:r="http://schemas.openxmlformats.org/officeDocument/2006/relationships" xmlns:p="http://schemas.openxmlformats.org/presentationml/2006/main" saveSubsetFonts="1">
+<p:presentation xmlns:a="http://schemas.openxmlformats.org/drawingml/2006/main" xmlns:r="http://schemas.openxmlformats.org/officeDocument/2006/relationships" xmlns:p="http://schemas.openxmlformats.org/presentationml/2006/main">
   <p:sldMasterIdLst>
     <p:sldMasterId id="2147483648" r:id="rId1"/>
   </p:sldMasterIdLst>
   <p:notesMasterIdLst>
-    <p:notesMasterId r:id="rId15"/>
+    <p:notesMasterId r:id="rId17"/>
   </p:notesMasterIdLst>
   <p:sldIdLst>
     <p:sldId id="256" r:id="rId2"/>
@@ -16,11 +16,13 @@
     <p:sldId id="262" r:id="rId7"/>
     <p:sldId id="265" r:id="rId8"/>
     <p:sldId id="261" r:id="rId9"/>
-    <p:sldId id="267" r:id="rId10"/>
-    <p:sldId id="268" r:id="rId11"/>
-    <p:sldId id="259" r:id="rId12"/>
-    <p:sldId id="269" r:id="rId13"/>
-    <p:sldId id="258" r:id="rId14"/>
+    <p:sldId id="271" r:id="rId10"/>
+    <p:sldId id="270" r:id="rId11"/>
+    <p:sldId id="267" r:id="rId12"/>
+    <p:sldId id="268" r:id="rId13"/>
+    <p:sldId id="259" r:id="rId14"/>
+    <p:sldId id="269" r:id="rId15"/>
+    <p:sldId id="258" r:id="rId16"/>
   </p:sldIdLst>
   <p:sldSz cx="12192000" cy="6858000"/>
   <p:notesSz cx="6858000" cy="9144000"/>
@@ -127,460 +129,6 @@
 </p:presentation>
 </file>
 
-<file path=ppt/changesInfos/changesInfo1.xml><?xml version="1.0" encoding="utf-8"?>
-<pc:chgInfo xmlns:a="http://schemas.openxmlformats.org/drawingml/2006/main" xmlns:r="http://schemas.openxmlformats.org/officeDocument/2006/relationships" xmlns:ac="http://schemas.microsoft.com/office/drawing/2013/main/command" xmlns:pc="http://schemas.microsoft.com/office/powerpoint/2013/main/command">
-  <pc:docChgLst>
-    <pc:chgData name="Tejas Reddy Kota" userId="1fe5c418-db81-4c6b-9075-ce61746418cf" providerId="ADAL" clId="{63652300-937E-406B-A894-AEEF8BDB9ABB}"/>
-    <pc:docChg chg="undo custSel addSld delSld modSld">
-      <pc:chgData name="Tejas Reddy Kota" userId="1fe5c418-db81-4c6b-9075-ce61746418cf" providerId="ADAL" clId="{63652300-937E-406B-A894-AEEF8BDB9ABB}" dt="2025-09-10T04:40:54.698" v="474" actId="1440"/>
-      <pc:docMkLst>
-        <pc:docMk/>
-      </pc:docMkLst>
-      <pc:sldChg chg="addSp modSp mod modTransition">
-        <pc:chgData name="Tejas Reddy Kota" userId="1fe5c418-db81-4c6b-9075-ce61746418cf" providerId="ADAL" clId="{63652300-937E-406B-A894-AEEF8BDB9ABB}" dt="2025-09-10T04:37:35.244" v="454"/>
-        <pc:sldMkLst>
-          <pc:docMk/>
-          <pc:sldMk cId="2256709242" sldId="256"/>
-        </pc:sldMkLst>
-        <pc:spChg chg="add mod">
-          <ac:chgData name="Tejas Reddy Kota" userId="1fe5c418-db81-4c6b-9075-ce61746418cf" providerId="ADAL" clId="{63652300-937E-406B-A894-AEEF8BDB9ABB}" dt="2025-09-10T03:49:07.261" v="230" actId="1076"/>
-          <ac:spMkLst>
-            <pc:docMk/>
-            <pc:sldMk cId="2256709242" sldId="256"/>
-            <ac:spMk id="2" creationId="{48D31E33-A3D1-B100-F80C-B7F90AFC459D}"/>
-          </ac:spMkLst>
-        </pc:spChg>
-      </pc:sldChg>
-      <pc:sldChg chg="addSp delSp modSp mod modTransition">
-        <pc:chgData name="Tejas Reddy Kota" userId="1fe5c418-db81-4c6b-9075-ce61746418cf" providerId="ADAL" clId="{63652300-937E-406B-A894-AEEF8BDB9ABB}" dt="2025-09-10T04:37:50.762" v="457"/>
-        <pc:sldMkLst>
-          <pc:docMk/>
-          <pc:sldMk cId="3368749316" sldId="257"/>
-        </pc:sldMkLst>
-        <pc:spChg chg="del mod">
-          <ac:chgData name="Tejas Reddy Kota" userId="1fe5c418-db81-4c6b-9075-ce61746418cf" providerId="ADAL" clId="{63652300-937E-406B-A894-AEEF8BDB9ABB}" dt="2025-09-10T04:04:36.228" v="234"/>
-          <ac:spMkLst>
-            <pc:docMk/>
-            <pc:sldMk cId="3368749316" sldId="257"/>
-            <ac:spMk id="5" creationId="{26D21DE2-BDF3-03DC-30B8-1512F61CD010}"/>
-          </ac:spMkLst>
-        </pc:spChg>
-        <pc:graphicFrameChg chg="add mod">
-          <ac:chgData name="Tejas Reddy Kota" userId="1fe5c418-db81-4c6b-9075-ce61746418cf" providerId="ADAL" clId="{63652300-937E-406B-A894-AEEF8BDB9ABB}" dt="2025-09-10T04:04:28.433" v="231"/>
-          <ac:graphicFrameMkLst>
-            <pc:docMk/>
-            <pc:sldMk cId="3368749316" sldId="257"/>
-            <ac:graphicFrameMk id="2" creationId="{FD658905-15A1-D173-0950-2ACBF0EFBAA9}"/>
-          </ac:graphicFrameMkLst>
-        </pc:graphicFrameChg>
-        <pc:graphicFrameChg chg="add mod modGraphic">
-          <ac:chgData name="Tejas Reddy Kota" userId="1fe5c418-db81-4c6b-9075-ce61746418cf" providerId="ADAL" clId="{63652300-937E-406B-A894-AEEF8BDB9ABB}" dt="2025-09-10T04:05:44.840" v="244" actId="14100"/>
-          <ac:graphicFrameMkLst>
-            <pc:docMk/>
-            <pc:sldMk cId="3368749316" sldId="257"/>
-            <ac:graphicFrameMk id="4" creationId="{A3F36CAE-0816-1C0F-F184-1FB697D57C8E}"/>
-          </ac:graphicFrameMkLst>
-        </pc:graphicFrameChg>
-      </pc:sldChg>
-      <pc:sldChg chg="modSp mod modTransition">
-        <pc:chgData name="Tejas Reddy Kota" userId="1fe5c418-db81-4c6b-9075-ce61746418cf" providerId="ADAL" clId="{63652300-937E-406B-A894-AEEF8BDB9ABB}" dt="2025-09-10T04:38:58.571" v="471"/>
-        <pc:sldMkLst>
-          <pc:docMk/>
-          <pc:sldMk cId="2999482184" sldId="258"/>
-        </pc:sldMkLst>
-        <pc:spChg chg="mod">
-          <ac:chgData name="Tejas Reddy Kota" userId="1fe5c418-db81-4c6b-9075-ce61746418cf" providerId="ADAL" clId="{63652300-937E-406B-A894-AEEF8BDB9ABB}" dt="2025-09-10T03:38:40.727" v="108" actId="1076"/>
-          <ac:spMkLst>
-            <pc:docMk/>
-            <pc:sldMk cId="2999482184" sldId="258"/>
-            <ac:spMk id="4" creationId="{F1688259-6D80-C4E7-7800-399FF0886C91}"/>
-          </ac:spMkLst>
-        </pc:spChg>
-      </pc:sldChg>
-      <pc:sldChg chg="addSp modSp mod modTransition modAnim">
-        <pc:chgData name="Tejas Reddy Kota" userId="1fe5c418-db81-4c6b-9075-ce61746418cf" providerId="ADAL" clId="{63652300-937E-406B-A894-AEEF8BDB9ABB}" dt="2025-09-10T04:38:41.692" v="468"/>
-        <pc:sldMkLst>
-          <pc:docMk/>
-          <pc:sldMk cId="3018656531" sldId="259"/>
-        </pc:sldMkLst>
-        <pc:spChg chg="add mod">
-          <ac:chgData name="Tejas Reddy Kota" userId="1fe5c418-db81-4c6b-9075-ce61746418cf" providerId="ADAL" clId="{63652300-937E-406B-A894-AEEF8BDB9ABB}" dt="2025-09-10T04:16:59.113" v="345" actId="688"/>
-          <ac:spMkLst>
-            <pc:docMk/>
-            <pc:sldMk cId="3018656531" sldId="259"/>
-            <ac:spMk id="12" creationId="{0E95A215-E21F-9162-FB59-18F8EF0E7A1F}"/>
-          </ac:spMkLst>
-        </pc:spChg>
-        <pc:spChg chg="mod">
-          <ac:chgData name="Tejas Reddy Kota" userId="1fe5c418-db81-4c6b-9075-ce61746418cf" providerId="ADAL" clId="{63652300-937E-406B-A894-AEEF8BDB9ABB}" dt="2025-09-10T04:09:55.869" v="258" actId="20577"/>
-          <ac:spMkLst>
-            <pc:docMk/>
-            <pc:sldMk cId="3018656531" sldId="259"/>
-            <ac:spMk id="13" creationId="{E33DB1AA-A2DE-4F06-2CE2-0043DF3BA52F}"/>
-          </ac:spMkLst>
-        </pc:spChg>
-        <pc:spChg chg="add mod">
-          <ac:chgData name="Tejas Reddy Kota" userId="1fe5c418-db81-4c6b-9075-ce61746418cf" providerId="ADAL" clId="{63652300-937E-406B-A894-AEEF8BDB9ABB}" dt="2025-09-10T04:16:49.908" v="344" actId="688"/>
-          <ac:spMkLst>
-            <pc:docMk/>
-            <pc:sldMk cId="3018656531" sldId="259"/>
-            <ac:spMk id="14" creationId="{66AE3CCC-3F38-C458-5060-27C0194C4E5D}"/>
-          </ac:spMkLst>
-        </pc:spChg>
-        <pc:spChg chg="add mod">
-          <ac:chgData name="Tejas Reddy Kota" userId="1fe5c418-db81-4c6b-9075-ce61746418cf" providerId="ADAL" clId="{63652300-937E-406B-A894-AEEF8BDB9ABB}" dt="2025-09-10T04:16:35.990" v="341" actId="688"/>
-          <ac:spMkLst>
-            <pc:docMk/>
-            <pc:sldMk cId="3018656531" sldId="259"/>
-            <ac:spMk id="16" creationId="{3DB4340B-EFBA-6A68-11FC-A300CE5AB63C}"/>
-          </ac:spMkLst>
-        </pc:spChg>
-        <pc:spChg chg="add mod">
-          <ac:chgData name="Tejas Reddy Kota" userId="1fe5c418-db81-4c6b-9075-ce61746418cf" providerId="ADAL" clId="{63652300-937E-406B-A894-AEEF8BDB9ABB}" dt="2025-09-10T04:15:47.026" v="331" actId="1076"/>
-          <ac:spMkLst>
-            <pc:docMk/>
-            <pc:sldMk cId="3018656531" sldId="259"/>
-            <ac:spMk id="17" creationId="{B09BF3EE-E351-207A-F983-43148C2EEEE5}"/>
-          </ac:spMkLst>
-        </pc:spChg>
-        <pc:spChg chg="add mod">
-          <ac:chgData name="Tejas Reddy Kota" userId="1fe5c418-db81-4c6b-9075-ce61746418cf" providerId="ADAL" clId="{63652300-937E-406B-A894-AEEF8BDB9ABB}" dt="2025-09-10T04:16:25.218" v="340" actId="1076"/>
-          <ac:spMkLst>
-            <pc:docMk/>
-            <pc:sldMk cId="3018656531" sldId="259"/>
-            <ac:spMk id="18" creationId="{BA2918A4-FB08-AA8A-D20A-693E64815F14}"/>
-          </ac:spMkLst>
-        </pc:spChg>
-        <pc:grpChg chg="mod">
-          <ac:chgData name="Tejas Reddy Kota" userId="1fe5c418-db81-4c6b-9075-ce61746418cf" providerId="ADAL" clId="{63652300-937E-406B-A894-AEEF8BDB9ABB}" dt="2025-09-10T04:15:31.005" v="328" actId="1076"/>
-          <ac:grpSpMkLst>
-            <pc:docMk/>
-            <pc:sldMk cId="3018656531" sldId="259"/>
-            <ac:grpSpMk id="57" creationId="{B8D3825E-5970-7586-D169-878B8B1E9337}"/>
-          </ac:grpSpMkLst>
-        </pc:grpChg>
-        <pc:grpChg chg="mod">
-          <ac:chgData name="Tejas Reddy Kota" userId="1fe5c418-db81-4c6b-9075-ce61746418cf" providerId="ADAL" clId="{63652300-937E-406B-A894-AEEF8BDB9ABB}" dt="2025-09-10T04:14:42.026" v="317" actId="1076"/>
-          <ac:grpSpMkLst>
-            <pc:docMk/>
-            <pc:sldMk cId="3018656531" sldId="259"/>
-            <ac:grpSpMk id="60" creationId="{A29CD33C-9C40-C210-295F-0604F8C284B8}"/>
-          </ac:grpSpMkLst>
-        </pc:grpChg>
-      </pc:sldChg>
-      <pc:sldChg chg="addSp delSp modSp mod modTransition">
-        <pc:chgData name="Tejas Reddy Kota" userId="1fe5c418-db81-4c6b-9075-ce61746418cf" providerId="ADAL" clId="{63652300-937E-406B-A894-AEEF8BDB9ABB}" dt="2025-09-10T04:37:54.044" v="458"/>
-        <pc:sldMkLst>
-          <pc:docMk/>
-          <pc:sldMk cId="2853014144" sldId="260"/>
-        </pc:sldMkLst>
-        <pc:spChg chg="mod">
-          <ac:chgData name="Tejas Reddy Kota" userId="1fe5c418-db81-4c6b-9075-ce61746418cf" providerId="ADAL" clId="{63652300-937E-406B-A894-AEEF8BDB9ABB}" dt="2025-09-10T04:08:14.303" v="248" actId="1076"/>
-          <ac:spMkLst>
-            <pc:docMk/>
-            <pc:sldMk cId="2853014144" sldId="260"/>
-            <ac:spMk id="2" creationId="{50283D58-1E2A-3563-27FE-6C4DD9860B24}"/>
-          </ac:spMkLst>
-        </pc:spChg>
-        <pc:spChg chg="add del mod">
-          <ac:chgData name="Tejas Reddy Kota" userId="1fe5c418-db81-4c6b-9075-ce61746418cf" providerId="ADAL" clId="{63652300-937E-406B-A894-AEEF8BDB9ABB}" dt="2025-09-10T04:08:01.642" v="247" actId="21"/>
-          <ac:spMkLst>
-            <pc:docMk/>
-            <pc:sldMk cId="2853014144" sldId="260"/>
-            <ac:spMk id="4" creationId="{CC54102B-EA31-EA46-E573-9C49AB4A7A53}"/>
-          </ac:spMkLst>
-        </pc:spChg>
-        <pc:picChg chg="add mod">
-          <ac:chgData name="Tejas Reddy Kota" userId="1fe5c418-db81-4c6b-9075-ce61746418cf" providerId="ADAL" clId="{63652300-937E-406B-A894-AEEF8BDB9ABB}" dt="2025-09-10T04:31:03.071" v="397" actId="1076"/>
-          <ac:picMkLst>
-            <pc:docMk/>
-            <pc:sldMk cId="2853014144" sldId="260"/>
-            <ac:picMk id="2050" creationId="{D76218D5-B462-EB5B-E8C8-ACDE9DEA5A9C}"/>
-          </ac:picMkLst>
-        </pc:picChg>
-      </pc:sldChg>
-      <pc:sldChg chg="modSp mod modTransition">
-        <pc:chgData name="Tejas Reddy Kota" userId="1fe5c418-db81-4c6b-9075-ce61746418cf" providerId="ADAL" clId="{63652300-937E-406B-A894-AEEF8BDB9ABB}" dt="2025-09-10T04:38:28.133" v="467"/>
-        <pc:sldMkLst>
-          <pc:docMk/>
-          <pc:sldMk cId="688460911" sldId="261"/>
-        </pc:sldMkLst>
-        <pc:spChg chg="mod">
-          <ac:chgData name="Tejas Reddy Kota" userId="1fe5c418-db81-4c6b-9075-ce61746418cf" providerId="ADAL" clId="{63652300-937E-406B-A894-AEEF8BDB9ABB}" dt="2025-09-10T04:23:26.580" v="368" actId="404"/>
-          <ac:spMkLst>
-            <pc:docMk/>
-            <pc:sldMk cId="688460911" sldId="261"/>
-            <ac:spMk id="24" creationId="{424DC5ED-E3E1-5D2F-5A65-894D55EE8B60}"/>
-          </ac:spMkLst>
-        </pc:spChg>
-      </pc:sldChg>
-      <pc:sldChg chg="modTransition">
-        <pc:chgData name="Tejas Reddy Kota" userId="1fe5c418-db81-4c6b-9075-ce61746418cf" providerId="ADAL" clId="{63652300-937E-406B-A894-AEEF8BDB9ABB}" dt="2025-09-10T04:38:20.812" v="465"/>
-        <pc:sldMkLst>
-          <pc:docMk/>
-          <pc:sldMk cId="1648760023" sldId="262"/>
-        </pc:sldMkLst>
-      </pc:sldChg>
-      <pc:sldChg chg="modSp mod modTransition">
-        <pc:chgData name="Tejas Reddy Kota" userId="1fe5c418-db81-4c6b-9075-ce61746418cf" providerId="ADAL" clId="{63652300-937E-406B-A894-AEEF8BDB9ABB}" dt="2025-09-10T04:37:42.896" v="455"/>
-        <pc:sldMkLst>
-          <pc:docMk/>
-          <pc:sldMk cId="2640661969" sldId="263"/>
-        </pc:sldMkLst>
-        <pc:spChg chg="mod">
-          <ac:chgData name="Tejas Reddy Kota" userId="1fe5c418-db81-4c6b-9075-ce61746418cf" providerId="ADAL" clId="{63652300-937E-406B-A894-AEEF8BDB9ABB}" dt="2025-09-10T04:18:50.308" v="358" actId="20577"/>
-          <ac:spMkLst>
-            <pc:docMk/>
-            <pc:sldMk cId="2640661969" sldId="263"/>
-            <ac:spMk id="2" creationId="{B980F0F6-8883-69EE-5065-C0FCB7A1EBC0}"/>
-          </ac:spMkLst>
-        </pc:spChg>
-      </pc:sldChg>
-      <pc:sldChg chg="modTransition">
-        <pc:chgData name="Tejas Reddy Kota" userId="1fe5c418-db81-4c6b-9075-ce61746418cf" providerId="ADAL" clId="{63652300-937E-406B-A894-AEEF8BDB9ABB}" dt="2025-09-10T04:38:25.064" v="466"/>
-        <pc:sldMkLst>
-          <pc:docMk/>
-          <pc:sldMk cId="1009010750" sldId="265"/>
-        </pc:sldMkLst>
-      </pc:sldChg>
-      <pc:sldChg chg="addSp modSp mod modTransition">
-        <pc:chgData name="Tejas Reddy Kota" userId="1fe5c418-db81-4c6b-9075-ce61746418cf" providerId="ADAL" clId="{63652300-937E-406B-A894-AEEF8BDB9ABB}" dt="2025-09-10T04:37:46.163" v="456"/>
-        <pc:sldMkLst>
-          <pc:docMk/>
-          <pc:sldMk cId="2512971562" sldId="266"/>
-        </pc:sldMkLst>
-        <pc:spChg chg="mod">
-          <ac:chgData name="Tejas Reddy Kota" userId="1fe5c418-db81-4c6b-9075-ce61746418cf" providerId="ADAL" clId="{63652300-937E-406B-A894-AEEF8BDB9ABB}" dt="2025-09-10T04:20:22.601" v="364" actId="1076"/>
-          <ac:spMkLst>
-            <pc:docMk/>
-            <pc:sldMk cId="2512971562" sldId="266"/>
-            <ac:spMk id="2" creationId="{1945641E-5B00-E08F-3574-C3F7DABD96C5}"/>
-          </ac:spMkLst>
-        </pc:spChg>
-        <pc:spChg chg="mod">
-          <ac:chgData name="Tejas Reddy Kota" userId="1fe5c418-db81-4c6b-9075-ce61746418cf" providerId="ADAL" clId="{63652300-937E-406B-A894-AEEF8BDB9ABB}" dt="2025-09-10T04:20:28.645" v="365" actId="1076"/>
-          <ac:spMkLst>
-            <pc:docMk/>
-            <pc:sldMk cId="2512971562" sldId="266"/>
-            <ac:spMk id="3" creationId="{38F6722D-6BBC-51BB-37F6-0BBA26F3C9DB}"/>
-          </ac:spMkLst>
-        </pc:spChg>
-        <pc:picChg chg="add mod">
-          <ac:chgData name="Tejas Reddy Kota" userId="1fe5c418-db81-4c6b-9075-ce61746418cf" providerId="ADAL" clId="{63652300-937E-406B-A894-AEEF8BDB9ABB}" dt="2025-09-10T04:20:32.389" v="366" actId="1076"/>
-          <ac:picMkLst>
-            <pc:docMk/>
-            <pc:sldMk cId="2512971562" sldId="266"/>
-            <ac:picMk id="3074" creationId="{61816417-537D-A3EF-C39A-9CB43BF7A05F}"/>
-          </ac:picMkLst>
-        </pc:picChg>
-      </pc:sldChg>
-      <pc:sldChg chg="addSp delSp modSp new mod modTransition">
-        <pc:chgData name="Tejas Reddy Kota" userId="1fe5c418-db81-4c6b-9075-ce61746418cf" providerId="ADAL" clId="{63652300-937E-406B-A894-AEEF8BDB9ABB}" dt="2025-09-10T04:37:28.745" v="453"/>
-        <pc:sldMkLst>
-          <pc:docMk/>
-          <pc:sldMk cId="595700187" sldId="267"/>
-        </pc:sldMkLst>
-        <pc:spChg chg="mod">
-          <ac:chgData name="Tejas Reddy Kota" userId="1fe5c418-db81-4c6b-9075-ce61746418cf" providerId="ADAL" clId="{63652300-937E-406B-A894-AEEF8BDB9ABB}" dt="2025-09-09T11:13:19.836" v="49" actId="14100"/>
-          <ac:spMkLst>
-            <pc:docMk/>
-            <pc:sldMk cId="595700187" sldId="267"/>
-            <ac:spMk id="2" creationId="{69B65925-97BA-7ADC-D3CF-0EF71362CC99}"/>
-          </ac:spMkLst>
-        </pc:spChg>
-        <pc:spChg chg="del mod">
-          <ac:chgData name="Tejas Reddy Kota" userId="1fe5c418-db81-4c6b-9075-ce61746418cf" providerId="ADAL" clId="{63652300-937E-406B-A894-AEEF8BDB9ABB}" dt="2025-09-09T11:09:17.868" v="26" actId="931"/>
-          <ac:spMkLst>
-            <pc:docMk/>
-            <pc:sldMk cId="595700187" sldId="267"/>
-            <ac:spMk id="3" creationId="{AEB70CB4-3DD2-1C00-CFE2-31E13B735509}"/>
-          </ac:spMkLst>
-        </pc:spChg>
-        <pc:spChg chg="add mod">
-          <ac:chgData name="Tejas Reddy Kota" userId="1fe5c418-db81-4c6b-9075-ce61746418cf" providerId="ADAL" clId="{63652300-937E-406B-A894-AEEF8BDB9ABB}" dt="2025-09-09T11:15:28.503" v="61" actId="1076"/>
-          <ac:spMkLst>
-            <pc:docMk/>
-            <pc:sldMk cId="595700187" sldId="267"/>
-            <ac:spMk id="8" creationId="{C590E896-98A3-DCDF-98E9-C246AD886770}"/>
-          </ac:spMkLst>
-        </pc:spChg>
-        <pc:spChg chg="add mod">
-          <ac:chgData name="Tejas Reddy Kota" userId="1fe5c418-db81-4c6b-9075-ce61746418cf" providerId="ADAL" clId="{63652300-937E-406B-A894-AEEF8BDB9ABB}" dt="2025-09-09T11:15:17.696" v="59" actId="1076"/>
-          <ac:spMkLst>
-            <pc:docMk/>
-            <pc:sldMk cId="595700187" sldId="267"/>
-            <ac:spMk id="9" creationId="{FEDB43D6-1C99-741E-0D0C-27E046AADF93}"/>
-          </ac:spMkLst>
-        </pc:spChg>
-        <pc:picChg chg="add mod">
-          <ac:chgData name="Tejas Reddy Kota" userId="1fe5c418-db81-4c6b-9075-ce61746418cf" providerId="ADAL" clId="{63652300-937E-406B-A894-AEEF8BDB9ABB}" dt="2025-09-09T11:13:25.490" v="50" actId="1076"/>
-          <ac:picMkLst>
-            <pc:docMk/>
-            <pc:sldMk cId="595700187" sldId="267"/>
-            <ac:picMk id="5" creationId="{7F9A5614-7D60-CAEF-4B21-70253FA4F005}"/>
-          </ac:picMkLst>
-        </pc:picChg>
-        <pc:picChg chg="add mod">
-          <ac:chgData name="Tejas Reddy Kota" userId="1fe5c418-db81-4c6b-9075-ce61746418cf" providerId="ADAL" clId="{63652300-937E-406B-A894-AEEF8BDB9ABB}" dt="2025-09-09T11:13:28.918" v="51" actId="1076"/>
-          <ac:picMkLst>
-            <pc:docMk/>
-            <pc:sldMk cId="595700187" sldId="267"/>
-            <ac:picMk id="7" creationId="{16D73BAC-F9EF-D807-5502-048B4E99F2C1}"/>
-          </ac:picMkLst>
-        </pc:picChg>
-      </pc:sldChg>
-      <pc:sldChg chg="new del">
-        <pc:chgData name="Tejas Reddy Kota" userId="1fe5c418-db81-4c6b-9075-ce61746418cf" providerId="ADAL" clId="{63652300-937E-406B-A894-AEEF8BDB9ABB}" dt="2025-09-09T11:06:02.899" v="1" actId="2696"/>
-        <pc:sldMkLst>
-          <pc:docMk/>
-          <pc:sldMk cId="3914213177" sldId="267"/>
-        </pc:sldMkLst>
-      </pc:sldChg>
-      <pc:sldChg chg="addSp delSp modSp new mod modTransition modAnim">
-        <pc:chgData name="Tejas Reddy Kota" userId="1fe5c418-db81-4c6b-9075-ce61746418cf" providerId="ADAL" clId="{63652300-937E-406B-A894-AEEF8BDB9ABB}" dt="2025-09-10T04:37:18.641" v="452"/>
-        <pc:sldMkLst>
-          <pc:docMk/>
-          <pc:sldMk cId="1888458327" sldId="268"/>
-        </pc:sldMkLst>
-        <pc:spChg chg="mod">
-          <ac:chgData name="Tejas Reddy Kota" userId="1fe5c418-db81-4c6b-9075-ce61746418cf" providerId="ADAL" clId="{63652300-937E-406B-A894-AEEF8BDB9ABB}" dt="2025-09-09T11:16:28.395" v="73" actId="1076"/>
-          <ac:spMkLst>
-            <pc:docMk/>
-            <pc:sldMk cId="1888458327" sldId="268"/>
-            <ac:spMk id="2" creationId="{DF3B983C-A218-F116-13B6-50B6510E0BB2}"/>
-          </ac:spMkLst>
-        </pc:spChg>
-        <pc:spChg chg="mod">
-          <ac:chgData name="Tejas Reddy Kota" userId="1fe5c418-db81-4c6b-9075-ce61746418cf" providerId="ADAL" clId="{63652300-937E-406B-A894-AEEF8BDB9ABB}" dt="2025-09-10T04:09:13.758" v="251" actId="14100"/>
-          <ac:spMkLst>
-            <pc:docMk/>
-            <pc:sldMk cId="1888458327" sldId="268"/>
-            <ac:spMk id="3" creationId="{4C7A5670-39A9-04DA-8F90-5028DF7C31A5}"/>
-          </ac:spMkLst>
-        </pc:spChg>
-        <pc:spChg chg="add">
-          <ac:chgData name="Tejas Reddy Kota" userId="1fe5c418-db81-4c6b-9075-ce61746418cf" providerId="ADAL" clId="{63652300-937E-406B-A894-AEEF8BDB9ABB}" dt="2025-09-09T11:38:45.554" v="82"/>
-          <ac:spMkLst>
-            <pc:docMk/>
-            <pc:sldMk cId="1888458327" sldId="268"/>
-            <ac:spMk id="4" creationId="{85F45EA9-F4AE-A1D7-58D1-EA204EEBF564}"/>
-          </ac:spMkLst>
-        </pc:spChg>
-        <pc:spChg chg="add del mod">
-          <ac:chgData name="Tejas Reddy Kota" userId="1fe5c418-db81-4c6b-9075-ce61746418cf" providerId="ADAL" clId="{63652300-937E-406B-A894-AEEF8BDB9ABB}" dt="2025-09-09T11:42:57.817" v="105" actId="22"/>
-          <ac:spMkLst>
-            <pc:docMk/>
-            <pc:sldMk cId="1888458327" sldId="268"/>
-            <ac:spMk id="6" creationId="{7D1027CB-4444-23FC-BFFA-45BC51EF845F}"/>
-          </ac:spMkLst>
-        </pc:spChg>
-        <pc:picChg chg="add mod">
-          <ac:chgData name="Tejas Reddy Kota" userId="1fe5c418-db81-4c6b-9075-ce61746418cf" providerId="ADAL" clId="{63652300-937E-406B-A894-AEEF8BDB9ABB}" dt="2025-09-10T04:09:31.366" v="253" actId="1076"/>
-          <ac:picMkLst>
-            <pc:docMk/>
-            <pc:sldMk cId="1888458327" sldId="268"/>
-            <ac:picMk id="2050" creationId="{B7A480FD-0A7F-D43C-848D-E2D8D0E25FE4}"/>
-          </ac:picMkLst>
-        </pc:picChg>
-      </pc:sldChg>
-      <pc:sldChg chg="addSp delSp modSp new mod modTransition modAnim">
-        <pc:chgData name="Tejas Reddy Kota" userId="1fe5c418-db81-4c6b-9075-ce61746418cf" providerId="ADAL" clId="{63652300-937E-406B-A894-AEEF8BDB9ABB}" dt="2025-09-10T04:40:54.698" v="474" actId="1440"/>
-        <pc:sldMkLst>
-          <pc:docMk/>
-          <pc:sldMk cId="2891210225" sldId="269"/>
-        </pc:sldMkLst>
-        <pc:spChg chg="mod">
-          <ac:chgData name="Tejas Reddy Kota" userId="1fe5c418-db81-4c6b-9075-ce61746418cf" providerId="ADAL" clId="{63652300-937E-406B-A894-AEEF8BDB9ABB}" dt="2025-09-10T04:40:10.873" v="473" actId="113"/>
-          <ac:spMkLst>
-            <pc:docMk/>
-            <pc:sldMk cId="2891210225" sldId="269"/>
-            <ac:spMk id="2" creationId="{522688AF-9356-5657-1630-F68A715FDC20}"/>
-          </ac:spMkLst>
-        </pc:spChg>
-        <pc:spChg chg="del">
-          <ac:chgData name="Tejas Reddy Kota" userId="1fe5c418-db81-4c6b-9075-ce61746418cf" providerId="ADAL" clId="{63652300-937E-406B-A894-AEEF8BDB9ABB}" dt="2025-09-10T04:27:25.894" v="370"/>
-          <ac:spMkLst>
-            <pc:docMk/>
-            <pc:sldMk cId="2891210225" sldId="269"/>
-            <ac:spMk id="3" creationId="{AF3A7BC7-6EE7-8082-D3BA-11AA50568FDC}"/>
-          </ac:spMkLst>
-        </pc:spChg>
-        <pc:spChg chg="add mod">
-          <ac:chgData name="Tejas Reddy Kota" userId="1fe5c418-db81-4c6b-9075-ce61746418cf" providerId="ADAL" clId="{63652300-937E-406B-A894-AEEF8BDB9ABB}" dt="2025-09-10T04:31:54.091" v="402" actId="1076"/>
-          <ac:spMkLst>
-            <pc:docMk/>
-            <pc:sldMk cId="2891210225" sldId="269"/>
-            <ac:spMk id="4" creationId="{9A0B6F87-61CF-AF2D-F38F-03D2FCCFDD58}"/>
-          </ac:spMkLst>
-        </pc:spChg>
-        <pc:picChg chg="add mod">
-          <ac:chgData name="Tejas Reddy Kota" userId="1fe5c418-db81-4c6b-9075-ce61746418cf" providerId="ADAL" clId="{63652300-937E-406B-A894-AEEF8BDB9ABB}" dt="2025-09-10T04:40:54.698" v="474" actId="1440"/>
-          <ac:picMkLst>
-            <pc:docMk/>
-            <pc:sldMk cId="2891210225" sldId="269"/>
-            <ac:picMk id="1027" creationId="{AACFB852-FBB8-3687-F65D-591B84AD4726}"/>
-          </ac:picMkLst>
-        </pc:picChg>
-      </pc:sldChg>
-    </pc:docChg>
-  </pc:docChgLst>
-  <pc:docChgLst>
-    <pc:chgData name="Tejas Reddy Kota" userId="1fe5c418-db81-4c6b-9075-ce61746418cf" providerId="ADAL" clId="{A86023F3-5733-4D32-8243-25E2B7C85C7A}"/>
-    <pc:docChg chg="modSld">
-      <pc:chgData name="Tejas Reddy Kota" userId="1fe5c418-db81-4c6b-9075-ce61746418cf" providerId="ADAL" clId="{A86023F3-5733-4D32-8243-25E2B7C85C7A}" dt="2025-09-08T05:33:26.822" v="2" actId="5793"/>
-      <pc:docMkLst>
-        <pc:docMk/>
-      </pc:docMkLst>
-      <pc:sldChg chg="modSp mod">
-        <pc:chgData name="Tejas Reddy Kota" userId="1fe5c418-db81-4c6b-9075-ce61746418cf" providerId="ADAL" clId="{A86023F3-5733-4D32-8243-25E2B7C85C7A}" dt="2025-09-08T05:01:49.715" v="0" actId="1076"/>
-        <pc:sldMkLst>
-          <pc:docMk/>
-          <pc:sldMk cId="1648760023" sldId="262"/>
-        </pc:sldMkLst>
-        <pc:spChg chg="mod">
-          <ac:chgData name="Tejas Reddy Kota" userId="1fe5c418-db81-4c6b-9075-ce61746418cf" providerId="ADAL" clId="{A86023F3-5733-4D32-8243-25E2B7C85C7A}" dt="2025-09-08T05:01:49.715" v="0" actId="1076"/>
-          <ac:spMkLst>
-            <pc:docMk/>
-            <pc:sldMk cId="1648760023" sldId="262"/>
-            <ac:spMk id="5" creationId="{74CEEE52-5885-5956-66A1-3438CD49DCE9}"/>
-          </ac:spMkLst>
-        </pc:spChg>
-      </pc:sldChg>
-      <pc:sldChg chg="modSp mod">
-        <pc:chgData name="Tejas Reddy Kota" userId="1fe5c418-db81-4c6b-9075-ce61746418cf" providerId="ADAL" clId="{A86023F3-5733-4D32-8243-25E2B7C85C7A}" dt="2025-09-08T05:30:31.968" v="1" actId="1076"/>
-        <pc:sldMkLst>
-          <pc:docMk/>
-          <pc:sldMk cId="1009010750" sldId="265"/>
-        </pc:sldMkLst>
-        <pc:spChg chg="mod">
-          <ac:chgData name="Tejas Reddy Kota" userId="1fe5c418-db81-4c6b-9075-ce61746418cf" providerId="ADAL" clId="{A86023F3-5733-4D32-8243-25E2B7C85C7A}" dt="2025-09-08T05:30:31.968" v="1" actId="1076"/>
-          <ac:spMkLst>
-            <pc:docMk/>
-            <pc:sldMk cId="1009010750" sldId="265"/>
-            <ac:spMk id="8" creationId="{BB093629-D47A-7CB9-6C09-21BA28FC3426}"/>
-          </ac:spMkLst>
-        </pc:spChg>
-      </pc:sldChg>
-      <pc:sldChg chg="modSp mod">
-        <pc:chgData name="Tejas Reddy Kota" userId="1fe5c418-db81-4c6b-9075-ce61746418cf" providerId="ADAL" clId="{A86023F3-5733-4D32-8243-25E2B7C85C7A}" dt="2025-09-08T05:33:26.822" v="2" actId="5793"/>
-        <pc:sldMkLst>
-          <pc:docMk/>
-          <pc:sldMk cId="2512971562" sldId="266"/>
-        </pc:sldMkLst>
-        <pc:spChg chg="mod">
-          <ac:chgData name="Tejas Reddy Kota" userId="1fe5c418-db81-4c6b-9075-ce61746418cf" providerId="ADAL" clId="{A86023F3-5733-4D32-8243-25E2B7C85C7A}" dt="2025-09-08T05:33:26.822" v="2" actId="5793"/>
-          <ac:spMkLst>
-            <pc:docMk/>
-            <pc:sldMk cId="2512971562" sldId="266"/>
-            <ac:spMk id="3" creationId="{38F6722D-6BBC-51BB-37F6-0BBA26F3C9DB}"/>
-          </ac:spMkLst>
-        </pc:spChg>
-      </pc:sldChg>
-    </pc:docChg>
-  </pc:docChgLst>
-</pc:chgInfo>
-</file>
-
 <file path=ppt/notesMasters/notesMaster1.xml><?xml version="1.0" encoding="utf-8"?>
 <p:notesMaster xmlns:a="http://schemas.openxmlformats.org/drawingml/2006/main" xmlns:r="http://schemas.openxmlformats.org/officeDocument/2006/relationships" xmlns:p="http://schemas.openxmlformats.org/presentationml/2006/main">
   <p:cSld>
@@ -663,7 +211,7 @@
           <a:p>
             <a:fld id="{BD8DE5F0-F600-46C3-AE4D-5148C69FFBAD}" type="datetimeFigureOut">
               <a:rPr lang="en-US" smtClean="0"/>
-              <a:t>9/10/2025</a:t>
+              <a:t>9/18/2025</a:t>
             </a:fld>
             <a:endParaRPr lang="en-US"/>
           </a:p>
@@ -828,11 +376,6 @@
         </p:txBody>
       </p:sp>
     </p:spTree>
-    <p:extLst>
-      <p:ext uri="{BB962C8B-B14F-4D97-AF65-F5344CB8AC3E}">
-        <p14:creationId xmlns:p14="http://schemas.microsoft.com/office/powerpoint/2010/main" val="794207885"/>
-      </p:ext>
-    </p:extLst>
   </p:cSld>
   <p:clrMap bg1="lt1" tx1="dk1" bg2="lt2" tx2="dk2" accent1="accent1" accent2="accent2" accent3="accent3" accent4="accent4" accent5="accent5" accent6="accent6" hlink="hlink" folHlink="folHlink"/>
   <p:notesStyle>
@@ -1002,11 +545,6 @@
         </p:txBody>
       </p:sp>
     </p:spTree>
-    <p:extLst>
-      <p:ext uri="{BB962C8B-B14F-4D97-AF65-F5344CB8AC3E}">
-        <p14:creationId xmlns:p14="http://schemas.microsoft.com/office/powerpoint/2010/main" val="3688801677"/>
-      </p:ext>
-    </p:extLst>
   </p:cSld>
   <p:clrMapOvr>
     <a:masterClrMapping/>
@@ -1086,11 +624,6 @@
         </p:txBody>
       </p:sp>
     </p:spTree>
-    <p:extLst>
-      <p:ext uri="{BB962C8B-B14F-4D97-AF65-F5344CB8AC3E}">
-        <p14:creationId xmlns:p14="http://schemas.microsoft.com/office/powerpoint/2010/main" val="1620486215"/>
-      </p:ext>
-    </p:extLst>
   </p:cSld>
   <p:clrMapOvr>
     <a:masterClrMapping/>
@@ -1103,13 +636,7 @@
   <p:cSld>
     <p:spTree>
       <p:nvGrpSpPr>
-        <p:cNvPr id="1" name="">
-          <a:extLst>
-            <a:ext uri="{FF2B5EF4-FFF2-40B4-BE49-F238E27FC236}">
-              <a16:creationId xmlns:a16="http://schemas.microsoft.com/office/drawing/2014/main" id="{E979DE9B-9A6B-E56B-3A2E-48544F06BDC6}"/>
-            </a:ext>
-          </a:extLst>
-        </p:cNvPr>
+        <p:cNvPr id="1" name=""/>
         <p:cNvGrpSpPr/>
         <p:nvPr/>
       </p:nvGrpSpPr>
@@ -1123,13 +650,7 @@
       </p:grpSpPr>
       <p:sp>
         <p:nvSpPr>
-          <p:cNvPr id="2" name="Slide Image Placeholder 1">
-            <a:extLst>
-              <a:ext uri="{FF2B5EF4-FFF2-40B4-BE49-F238E27FC236}">
-                <a16:creationId xmlns:a16="http://schemas.microsoft.com/office/drawing/2014/main" id="{08B8E850-7BF3-F953-0587-699BF69EE673}"/>
-              </a:ext>
-            </a:extLst>
-          </p:cNvPr>
+          <p:cNvPr id="2" name="Slide Image Placeholder 1"/>
           <p:cNvSpPr>
             <a:spLocks noGrp="1" noRot="1" noChangeAspect="1"/>
           </p:cNvSpPr>
@@ -1141,13 +662,7 @@
       </p:sp>
       <p:sp>
         <p:nvSpPr>
-          <p:cNvPr id="3" name="Notes Placeholder 2">
-            <a:extLst>
-              <a:ext uri="{FF2B5EF4-FFF2-40B4-BE49-F238E27FC236}">
-                <a16:creationId xmlns:a16="http://schemas.microsoft.com/office/drawing/2014/main" id="{9031E806-44D7-F165-8A01-EBB92CDA887A}"/>
-              </a:ext>
-            </a:extLst>
-          </p:cNvPr>
+          <p:cNvPr id="3" name="Notes Placeholder 2"/>
           <p:cNvSpPr>
             <a:spLocks noGrp="1"/>
           </p:cNvSpPr>
@@ -1166,13 +681,7 @@
       </p:sp>
       <p:sp>
         <p:nvSpPr>
-          <p:cNvPr id="4" name="Slide Number Placeholder 3">
-            <a:extLst>
-              <a:ext uri="{FF2B5EF4-FFF2-40B4-BE49-F238E27FC236}">
-                <a16:creationId xmlns:a16="http://schemas.microsoft.com/office/drawing/2014/main" id="{F7782158-080C-8795-393F-0DC573462855}"/>
-              </a:ext>
-            </a:extLst>
-          </p:cNvPr>
+          <p:cNvPr id="4" name="Slide Number Placeholder 3"/>
           <p:cNvSpPr>
             <a:spLocks noGrp="1"/>
           </p:cNvSpPr>
@@ -1194,11 +703,6 @@
         </p:txBody>
       </p:sp>
     </p:spTree>
-    <p:extLst>
-      <p:ext uri="{BB962C8B-B14F-4D97-AF65-F5344CB8AC3E}">
-        <p14:creationId xmlns:p14="http://schemas.microsoft.com/office/powerpoint/2010/main" val="3630079587"/>
-      </p:ext>
-    </p:extLst>
   </p:cSld>
   <p:clrMapOvr>
     <a:masterClrMapping/>
@@ -1271,18 +775,13 @@
           <a:p>
             <a:fld id="{410EF6FF-9132-45E0-97B0-6601D5F6581F}" type="slidenum">
               <a:rPr lang="en-US" smtClean="0"/>
-              <a:t>11</a:t>
+              <a:t>13</a:t>
             </a:fld>
             <a:endParaRPr lang="en-US"/>
           </a:p>
         </p:txBody>
       </p:sp>
     </p:spTree>
-    <p:extLst>
-      <p:ext uri="{BB962C8B-B14F-4D97-AF65-F5344CB8AC3E}">
-        <p14:creationId xmlns:p14="http://schemas.microsoft.com/office/powerpoint/2010/main" val="2217890524"/>
-      </p:ext>
-    </p:extLst>
   </p:cSld>
   <p:clrMapOvr>
     <a:masterClrMapping/>
@@ -1309,13 +808,7 @@
       </p:grpSpPr>
       <p:sp>
         <p:nvSpPr>
-          <p:cNvPr id="2" name="Title 1">
-            <a:extLst>
-              <a:ext uri="{FF2B5EF4-FFF2-40B4-BE49-F238E27FC236}">
-                <a16:creationId xmlns:a16="http://schemas.microsoft.com/office/drawing/2014/main" id="{F3EDE9D4-CBBD-39CF-AB04-BF492945BE64}"/>
-              </a:ext>
-            </a:extLst>
-          </p:cNvPr>
+          <p:cNvPr id="2" name="Title 1"/>
           <p:cNvSpPr>
             <a:spLocks noGrp="1"/>
           </p:cNvSpPr>
@@ -1346,13 +839,7 @@
       </p:sp>
       <p:sp>
         <p:nvSpPr>
-          <p:cNvPr id="3" name="Subtitle 2">
-            <a:extLst>
-              <a:ext uri="{FF2B5EF4-FFF2-40B4-BE49-F238E27FC236}">
-                <a16:creationId xmlns:a16="http://schemas.microsoft.com/office/drawing/2014/main" id="{79C9F787-A6F0-B4AA-E084-B6E6A2965A50}"/>
-              </a:ext>
-            </a:extLst>
-          </p:cNvPr>
+          <p:cNvPr id="3" name="Subtitle 2"/>
           <p:cNvSpPr>
             <a:spLocks noGrp="1"/>
           </p:cNvSpPr>
@@ -1416,13 +903,7 @@
       </p:sp>
       <p:sp>
         <p:nvSpPr>
-          <p:cNvPr id="4" name="Date Placeholder 3">
-            <a:extLst>
-              <a:ext uri="{FF2B5EF4-FFF2-40B4-BE49-F238E27FC236}">
-                <a16:creationId xmlns:a16="http://schemas.microsoft.com/office/drawing/2014/main" id="{DF597AC2-B99D-4E92-643D-E755FB13459C}"/>
-              </a:ext>
-            </a:extLst>
-          </p:cNvPr>
+          <p:cNvPr id="4" name="Date Placeholder 3"/>
           <p:cNvSpPr>
             <a:spLocks noGrp="1"/>
           </p:cNvSpPr>
@@ -1437,7 +918,7 @@
           <a:p>
             <a:fld id="{8CFBE4D0-E68C-4FB2-8B3A-AA41DAF039F9}" type="datetimeFigureOut">
               <a:rPr lang="en-US" smtClean="0"/>
-              <a:t>9/10/2025</a:t>
+              <a:t>9/18/2025</a:t>
             </a:fld>
             <a:endParaRPr lang="en-US"/>
           </a:p>
@@ -1445,13 +926,7 @@
       </p:sp>
       <p:sp>
         <p:nvSpPr>
-          <p:cNvPr id="5" name="Footer Placeholder 4">
-            <a:extLst>
-              <a:ext uri="{FF2B5EF4-FFF2-40B4-BE49-F238E27FC236}">
-                <a16:creationId xmlns:a16="http://schemas.microsoft.com/office/drawing/2014/main" id="{50E3E8F1-0B97-8411-9791-E2816322DDE4}"/>
-              </a:ext>
-            </a:extLst>
-          </p:cNvPr>
+          <p:cNvPr id="5" name="Footer Placeholder 4"/>
           <p:cNvSpPr>
             <a:spLocks noGrp="1"/>
           </p:cNvSpPr>
@@ -1470,13 +945,7 @@
       </p:sp>
       <p:sp>
         <p:nvSpPr>
-          <p:cNvPr id="6" name="Slide Number Placeholder 5">
-            <a:extLst>
-              <a:ext uri="{FF2B5EF4-FFF2-40B4-BE49-F238E27FC236}">
-                <a16:creationId xmlns:a16="http://schemas.microsoft.com/office/drawing/2014/main" id="{CFEAFF63-8290-6775-8277-205603A4EB61}"/>
-              </a:ext>
-            </a:extLst>
-          </p:cNvPr>
+          <p:cNvPr id="6" name="Slide Number Placeholder 5"/>
           <p:cNvSpPr>
             <a:spLocks noGrp="1"/>
           </p:cNvSpPr>
@@ -1498,11 +967,6 @@
         </p:txBody>
       </p:sp>
     </p:spTree>
-    <p:extLst>
-      <p:ext uri="{BB962C8B-B14F-4D97-AF65-F5344CB8AC3E}">
-        <p14:creationId xmlns:p14="http://schemas.microsoft.com/office/powerpoint/2010/main" val="2265183275"/>
-      </p:ext>
-    </p:extLst>
   </p:cSld>
   <p:clrMapOvr>
     <a:masterClrMapping/>
@@ -1529,13 +993,7 @@
       </p:grpSpPr>
       <p:sp>
         <p:nvSpPr>
-          <p:cNvPr id="2" name="Title 1">
-            <a:extLst>
-              <a:ext uri="{FF2B5EF4-FFF2-40B4-BE49-F238E27FC236}">
-                <a16:creationId xmlns:a16="http://schemas.microsoft.com/office/drawing/2014/main" id="{FF36DE25-DCBC-D358-9606-1AFAC0C1AA7A}"/>
-              </a:ext>
-            </a:extLst>
-          </p:cNvPr>
+          <p:cNvPr id="2" name="Title 1"/>
           <p:cNvSpPr>
             <a:spLocks noGrp="1"/>
           </p:cNvSpPr>
@@ -1557,13 +1015,7 @@
       </p:sp>
       <p:sp>
         <p:nvSpPr>
-          <p:cNvPr id="3" name="Vertical Text Placeholder 2">
-            <a:extLst>
-              <a:ext uri="{FF2B5EF4-FFF2-40B4-BE49-F238E27FC236}">
-                <a16:creationId xmlns:a16="http://schemas.microsoft.com/office/drawing/2014/main" id="{5FE9CA90-1A03-8F33-D4D4-698AE6B2B1AA}"/>
-              </a:ext>
-            </a:extLst>
-          </p:cNvPr>
+          <p:cNvPr id="3" name="Vertical Text Placeholder 2"/>
           <p:cNvSpPr>
             <a:spLocks noGrp="1"/>
           </p:cNvSpPr>
@@ -1614,13 +1066,7 @@
       </p:sp>
       <p:sp>
         <p:nvSpPr>
-          <p:cNvPr id="4" name="Date Placeholder 3">
-            <a:extLst>
-              <a:ext uri="{FF2B5EF4-FFF2-40B4-BE49-F238E27FC236}">
-                <a16:creationId xmlns:a16="http://schemas.microsoft.com/office/drawing/2014/main" id="{EE4136D4-D9FF-3984-32C8-E310533CA01C}"/>
-              </a:ext>
-            </a:extLst>
-          </p:cNvPr>
+          <p:cNvPr id="4" name="Date Placeholder 3"/>
           <p:cNvSpPr>
             <a:spLocks noGrp="1"/>
           </p:cNvSpPr>
@@ -1635,7 +1081,7 @@
           <a:p>
             <a:fld id="{8CFBE4D0-E68C-4FB2-8B3A-AA41DAF039F9}" type="datetimeFigureOut">
               <a:rPr lang="en-US" smtClean="0"/>
-              <a:t>9/10/2025</a:t>
+              <a:t>9/18/2025</a:t>
             </a:fld>
             <a:endParaRPr lang="en-US"/>
           </a:p>
@@ -1643,13 +1089,7 @@
       </p:sp>
       <p:sp>
         <p:nvSpPr>
-          <p:cNvPr id="5" name="Footer Placeholder 4">
-            <a:extLst>
-              <a:ext uri="{FF2B5EF4-FFF2-40B4-BE49-F238E27FC236}">
-                <a16:creationId xmlns:a16="http://schemas.microsoft.com/office/drawing/2014/main" id="{8EB007F2-5888-0388-EEC2-737DB1C45F9D}"/>
-              </a:ext>
-            </a:extLst>
-          </p:cNvPr>
+          <p:cNvPr id="5" name="Footer Placeholder 4"/>
           <p:cNvSpPr>
             <a:spLocks noGrp="1"/>
           </p:cNvSpPr>
@@ -1668,13 +1108,7 @@
       </p:sp>
       <p:sp>
         <p:nvSpPr>
-          <p:cNvPr id="6" name="Slide Number Placeholder 5">
-            <a:extLst>
-              <a:ext uri="{FF2B5EF4-FFF2-40B4-BE49-F238E27FC236}">
-                <a16:creationId xmlns:a16="http://schemas.microsoft.com/office/drawing/2014/main" id="{001E26C5-0E2E-A976-A6BA-B4D7B6726757}"/>
-              </a:ext>
-            </a:extLst>
-          </p:cNvPr>
+          <p:cNvPr id="6" name="Slide Number Placeholder 5"/>
           <p:cNvSpPr>
             <a:spLocks noGrp="1"/>
           </p:cNvSpPr>
@@ -1696,11 +1130,6 @@
         </p:txBody>
       </p:sp>
     </p:spTree>
-    <p:extLst>
-      <p:ext uri="{BB962C8B-B14F-4D97-AF65-F5344CB8AC3E}">
-        <p14:creationId xmlns:p14="http://schemas.microsoft.com/office/powerpoint/2010/main" val="3097459330"/>
-      </p:ext>
-    </p:extLst>
   </p:cSld>
   <p:clrMapOvr>
     <a:masterClrMapping/>
@@ -1727,13 +1156,7 @@
       </p:grpSpPr>
       <p:sp>
         <p:nvSpPr>
-          <p:cNvPr id="2" name="Vertical Title 1">
-            <a:extLst>
-              <a:ext uri="{FF2B5EF4-FFF2-40B4-BE49-F238E27FC236}">
-                <a16:creationId xmlns:a16="http://schemas.microsoft.com/office/drawing/2014/main" id="{A8E24D53-CB44-64E5-F537-B0AC6B350FB9}"/>
-              </a:ext>
-            </a:extLst>
-          </p:cNvPr>
+          <p:cNvPr id="2" name="Vertical Title 1"/>
           <p:cNvSpPr>
             <a:spLocks noGrp="1"/>
           </p:cNvSpPr>
@@ -1760,13 +1183,7 @@
       </p:sp>
       <p:sp>
         <p:nvSpPr>
-          <p:cNvPr id="3" name="Vertical Text Placeholder 2">
-            <a:extLst>
-              <a:ext uri="{FF2B5EF4-FFF2-40B4-BE49-F238E27FC236}">
-                <a16:creationId xmlns:a16="http://schemas.microsoft.com/office/drawing/2014/main" id="{4E269E02-5B4E-B2E2-BF0E-FFAB403EC192}"/>
-              </a:ext>
-            </a:extLst>
-          </p:cNvPr>
+          <p:cNvPr id="3" name="Vertical Text Placeholder 2"/>
           <p:cNvSpPr>
             <a:spLocks noGrp="1"/>
           </p:cNvSpPr>
@@ -1822,13 +1239,7 @@
       </p:sp>
       <p:sp>
         <p:nvSpPr>
-          <p:cNvPr id="4" name="Date Placeholder 3">
-            <a:extLst>
-              <a:ext uri="{FF2B5EF4-FFF2-40B4-BE49-F238E27FC236}">
-                <a16:creationId xmlns:a16="http://schemas.microsoft.com/office/drawing/2014/main" id="{80EF28F0-7539-0FB2-62D6-933FEFE284A5}"/>
-              </a:ext>
-            </a:extLst>
-          </p:cNvPr>
+          <p:cNvPr id="4" name="Date Placeholder 3"/>
           <p:cNvSpPr>
             <a:spLocks noGrp="1"/>
           </p:cNvSpPr>
@@ -1843,7 +1254,7 @@
           <a:p>
             <a:fld id="{8CFBE4D0-E68C-4FB2-8B3A-AA41DAF039F9}" type="datetimeFigureOut">
               <a:rPr lang="en-US" smtClean="0"/>
-              <a:t>9/10/2025</a:t>
+              <a:t>9/18/2025</a:t>
             </a:fld>
             <a:endParaRPr lang="en-US"/>
           </a:p>
@@ -1851,13 +1262,7 @@
       </p:sp>
       <p:sp>
         <p:nvSpPr>
-          <p:cNvPr id="5" name="Footer Placeholder 4">
-            <a:extLst>
-              <a:ext uri="{FF2B5EF4-FFF2-40B4-BE49-F238E27FC236}">
-                <a16:creationId xmlns:a16="http://schemas.microsoft.com/office/drawing/2014/main" id="{A3A0D598-96DB-8BDF-7A86-05A1D81CF0C2}"/>
-              </a:ext>
-            </a:extLst>
-          </p:cNvPr>
+          <p:cNvPr id="5" name="Footer Placeholder 4"/>
           <p:cNvSpPr>
             <a:spLocks noGrp="1"/>
           </p:cNvSpPr>
@@ -1876,13 +1281,7 @@
       </p:sp>
       <p:sp>
         <p:nvSpPr>
-          <p:cNvPr id="6" name="Slide Number Placeholder 5">
-            <a:extLst>
-              <a:ext uri="{FF2B5EF4-FFF2-40B4-BE49-F238E27FC236}">
-                <a16:creationId xmlns:a16="http://schemas.microsoft.com/office/drawing/2014/main" id="{41EC07A8-426C-583A-2AB9-069E9B29C80B}"/>
-              </a:ext>
-            </a:extLst>
-          </p:cNvPr>
+          <p:cNvPr id="6" name="Slide Number Placeholder 5"/>
           <p:cNvSpPr>
             <a:spLocks noGrp="1"/>
           </p:cNvSpPr>
@@ -1904,11 +1303,6 @@
         </p:txBody>
       </p:sp>
     </p:spTree>
-    <p:extLst>
-      <p:ext uri="{BB962C8B-B14F-4D97-AF65-F5344CB8AC3E}">
-        <p14:creationId xmlns:p14="http://schemas.microsoft.com/office/powerpoint/2010/main" val="2750939971"/>
-      </p:ext>
-    </p:extLst>
   </p:cSld>
   <p:clrMapOvr>
     <a:masterClrMapping/>
@@ -1935,13 +1329,7 @@
       </p:grpSpPr>
       <p:sp>
         <p:nvSpPr>
-          <p:cNvPr id="2" name="Title 1">
-            <a:extLst>
-              <a:ext uri="{FF2B5EF4-FFF2-40B4-BE49-F238E27FC236}">
-                <a16:creationId xmlns:a16="http://schemas.microsoft.com/office/drawing/2014/main" id="{1431706E-CA7F-38DC-3ABC-4F852DF7F758}"/>
-              </a:ext>
-            </a:extLst>
-          </p:cNvPr>
+          <p:cNvPr id="2" name="Title 1"/>
           <p:cNvSpPr>
             <a:spLocks noGrp="1"/>
           </p:cNvSpPr>
@@ -1963,13 +1351,7 @@
       </p:sp>
       <p:sp>
         <p:nvSpPr>
-          <p:cNvPr id="3" name="Content Placeholder 2">
-            <a:extLst>
-              <a:ext uri="{FF2B5EF4-FFF2-40B4-BE49-F238E27FC236}">
-                <a16:creationId xmlns:a16="http://schemas.microsoft.com/office/drawing/2014/main" id="{9162F1B5-7512-79D3-6D27-ACE3DE8EBA57}"/>
-              </a:ext>
-            </a:extLst>
-          </p:cNvPr>
+          <p:cNvPr id="3" name="Content Placeholder 2"/>
           <p:cNvSpPr>
             <a:spLocks noGrp="1"/>
           </p:cNvSpPr>
@@ -2020,13 +1402,7 @@
       </p:sp>
       <p:sp>
         <p:nvSpPr>
-          <p:cNvPr id="4" name="Date Placeholder 3">
-            <a:extLst>
-              <a:ext uri="{FF2B5EF4-FFF2-40B4-BE49-F238E27FC236}">
-                <a16:creationId xmlns:a16="http://schemas.microsoft.com/office/drawing/2014/main" id="{EAECBC36-52A8-E007-5F87-D62CEE285475}"/>
-              </a:ext>
-            </a:extLst>
-          </p:cNvPr>
+          <p:cNvPr id="4" name="Date Placeholder 3"/>
           <p:cNvSpPr>
             <a:spLocks noGrp="1"/>
           </p:cNvSpPr>
@@ -2041,7 +1417,7 @@
           <a:p>
             <a:fld id="{8CFBE4D0-E68C-4FB2-8B3A-AA41DAF039F9}" type="datetimeFigureOut">
               <a:rPr lang="en-US" smtClean="0"/>
-              <a:t>9/10/2025</a:t>
+              <a:t>9/18/2025</a:t>
             </a:fld>
             <a:endParaRPr lang="en-US"/>
           </a:p>
@@ -2049,13 +1425,7 @@
       </p:sp>
       <p:sp>
         <p:nvSpPr>
-          <p:cNvPr id="5" name="Footer Placeholder 4">
-            <a:extLst>
-              <a:ext uri="{FF2B5EF4-FFF2-40B4-BE49-F238E27FC236}">
-                <a16:creationId xmlns:a16="http://schemas.microsoft.com/office/drawing/2014/main" id="{0843E764-0E8F-32F3-959D-0F804A37A01A}"/>
-              </a:ext>
-            </a:extLst>
-          </p:cNvPr>
+          <p:cNvPr id="5" name="Footer Placeholder 4"/>
           <p:cNvSpPr>
             <a:spLocks noGrp="1"/>
           </p:cNvSpPr>
@@ -2074,13 +1444,7 @@
       </p:sp>
       <p:sp>
         <p:nvSpPr>
-          <p:cNvPr id="6" name="Slide Number Placeholder 5">
-            <a:extLst>
-              <a:ext uri="{FF2B5EF4-FFF2-40B4-BE49-F238E27FC236}">
-                <a16:creationId xmlns:a16="http://schemas.microsoft.com/office/drawing/2014/main" id="{BE9B5893-D3ED-A111-1DE0-119AD82E1D7D}"/>
-              </a:ext>
-            </a:extLst>
-          </p:cNvPr>
+          <p:cNvPr id="6" name="Slide Number Placeholder 5"/>
           <p:cNvSpPr>
             <a:spLocks noGrp="1"/>
           </p:cNvSpPr>
@@ -2102,11 +1466,6 @@
         </p:txBody>
       </p:sp>
     </p:spTree>
-    <p:extLst>
-      <p:ext uri="{BB962C8B-B14F-4D97-AF65-F5344CB8AC3E}">
-        <p14:creationId xmlns:p14="http://schemas.microsoft.com/office/powerpoint/2010/main" val="2706830814"/>
-      </p:ext>
-    </p:extLst>
   </p:cSld>
   <p:clrMapOvr>
     <a:masterClrMapping/>
@@ -2133,13 +1492,7 @@
       </p:grpSpPr>
       <p:sp>
         <p:nvSpPr>
-          <p:cNvPr id="2" name="Title 1">
-            <a:extLst>
-              <a:ext uri="{FF2B5EF4-FFF2-40B4-BE49-F238E27FC236}">
-                <a16:creationId xmlns:a16="http://schemas.microsoft.com/office/drawing/2014/main" id="{FEA14975-5492-925A-B15F-E8CC6C3014D9}"/>
-              </a:ext>
-            </a:extLst>
-          </p:cNvPr>
+          <p:cNvPr id="2" name="Title 1"/>
           <p:cNvSpPr>
             <a:spLocks noGrp="1"/>
           </p:cNvSpPr>
@@ -2170,13 +1523,7 @@
       </p:sp>
       <p:sp>
         <p:nvSpPr>
-          <p:cNvPr id="3" name="Text Placeholder 2">
-            <a:extLst>
-              <a:ext uri="{FF2B5EF4-FFF2-40B4-BE49-F238E27FC236}">
-                <a16:creationId xmlns:a16="http://schemas.microsoft.com/office/drawing/2014/main" id="{CD45FB7A-94FF-7667-A5AE-CDBA3EED9BB8}"/>
-              </a:ext>
-            </a:extLst>
-          </p:cNvPr>
+          <p:cNvPr id="3" name="Text Placeholder 2"/>
           <p:cNvSpPr>
             <a:spLocks noGrp="1"/>
           </p:cNvSpPr>
@@ -2295,13 +1642,7 @@
       </p:sp>
       <p:sp>
         <p:nvSpPr>
-          <p:cNvPr id="4" name="Date Placeholder 3">
-            <a:extLst>
-              <a:ext uri="{FF2B5EF4-FFF2-40B4-BE49-F238E27FC236}">
-                <a16:creationId xmlns:a16="http://schemas.microsoft.com/office/drawing/2014/main" id="{B96378E6-0E53-3566-5185-3282A7ACF43B}"/>
-              </a:ext>
-            </a:extLst>
-          </p:cNvPr>
+          <p:cNvPr id="4" name="Date Placeholder 3"/>
           <p:cNvSpPr>
             <a:spLocks noGrp="1"/>
           </p:cNvSpPr>
@@ -2316,7 +1657,7 @@
           <a:p>
             <a:fld id="{8CFBE4D0-E68C-4FB2-8B3A-AA41DAF039F9}" type="datetimeFigureOut">
               <a:rPr lang="en-US" smtClean="0"/>
-              <a:t>9/10/2025</a:t>
+              <a:t>9/18/2025</a:t>
             </a:fld>
             <a:endParaRPr lang="en-US"/>
           </a:p>
@@ -2324,13 +1665,7 @@
       </p:sp>
       <p:sp>
         <p:nvSpPr>
-          <p:cNvPr id="5" name="Footer Placeholder 4">
-            <a:extLst>
-              <a:ext uri="{FF2B5EF4-FFF2-40B4-BE49-F238E27FC236}">
-                <a16:creationId xmlns:a16="http://schemas.microsoft.com/office/drawing/2014/main" id="{EC894B46-3170-CA59-EB06-0A7AC393A382}"/>
-              </a:ext>
-            </a:extLst>
-          </p:cNvPr>
+          <p:cNvPr id="5" name="Footer Placeholder 4"/>
           <p:cNvSpPr>
             <a:spLocks noGrp="1"/>
           </p:cNvSpPr>
@@ -2349,13 +1684,7 @@
       </p:sp>
       <p:sp>
         <p:nvSpPr>
-          <p:cNvPr id="6" name="Slide Number Placeholder 5">
-            <a:extLst>
-              <a:ext uri="{FF2B5EF4-FFF2-40B4-BE49-F238E27FC236}">
-                <a16:creationId xmlns:a16="http://schemas.microsoft.com/office/drawing/2014/main" id="{D20B8DCD-0235-FAC9-2827-6C5C8B105C5F}"/>
-              </a:ext>
-            </a:extLst>
-          </p:cNvPr>
+          <p:cNvPr id="6" name="Slide Number Placeholder 5"/>
           <p:cNvSpPr>
             <a:spLocks noGrp="1"/>
           </p:cNvSpPr>
@@ -2377,11 +1706,6 @@
         </p:txBody>
       </p:sp>
     </p:spTree>
-    <p:extLst>
-      <p:ext uri="{BB962C8B-B14F-4D97-AF65-F5344CB8AC3E}">
-        <p14:creationId xmlns:p14="http://schemas.microsoft.com/office/powerpoint/2010/main" val="4107641082"/>
-      </p:ext>
-    </p:extLst>
   </p:cSld>
   <p:clrMapOvr>
     <a:masterClrMapping/>
@@ -2408,13 +1732,7 @@
       </p:grpSpPr>
       <p:sp>
         <p:nvSpPr>
-          <p:cNvPr id="2" name="Title 1">
-            <a:extLst>
-              <a:ext uri="{FF2B5EF4-FFF2-40B4-BE49-F238E27FC236}">
-                <a16:creationId xmlns:a16="http://schemas.microsoft.com/office/drawing/2014/main" id="{E25B336E-6F64-9716-79F6-09C1859BCF04}"/>
-              </a:ext>
-            </a:extLst>
-          </p:cNvPr>
+          <p:cNvPr id="2" name="Title 1"/>
           <p:cNvSpPr>
             <a:spLocks noGrp="1"/>
           </p:cNvSpPr>
@@ -2436,13 +1754,7 @@
       </p:sp>
       <p:sp>
         <p:nvSpPr>
-          <p:cNvPr id="3" name="Content Placeholder 2">
-            <a:extLst>
-              <a:ext uri="{FF2B5EF4-FFF2-40B4-BE49-F238E27FC236}">
-                <a16:creationId xmlns:a16="http://schemas.microsoft.com/office/drawing/2014/main" id="{0438254C-3BFA-9701-AC0A-69FFD312B911}"/>
-              </a:ext>
-            </a:extLst>
-          </p:cNvPr>
+          <p:cNvPr id="3" name="Content Placeholder 2"/>
           <p:cNvSpPr>
             <a:spLocks noGrp="1"/>
           </p:cNvSpPr>
@@ -2498,13 +1810,7 @@
       </p:sp>
       <p:sp>
         <p:nvSpPr>
-          <p:cNvPr id="4" name="Content Placeholder 3">
-            <a:extLst>
-              <a:ext uri="{FF2B5EF4-FFF2-40B4-BE49-F238E27FC236}">
-                <a16:creationId xmlns:a16="http://schemas.microsoft.com/office/drawing/2014/main" id="{6713CF7D-60F3-4DD1-50E0-47BBB8577CA1}"/>
-              </a:ext>
-            </a:extLst>
-          </p:cNvPr>
+          <p:cNvPr id="4" name="Content Placeholder 3"/>
           <p:cNvSpPr>
             <a:spLocks noGrp="1"/>
           </p:cNvSpPr>
@@ -2560,13 +1866,7 @@
       </p:sp>
       <p:sp>
         <p:nvSpPr>
-          <p:cNvPr id="5" name="Date Placeholder 4">
-            <a:extLst>
-              <a:ext uri="{FF2B5EF4-FFF2-40B4-BE49-F238E27FC236}">
-                <a16:creationId xmlns:a16="http://schemas.microsoft.com/office/drawing/2014/main" id="{0A75E01B-DD97-C969-E069-6D67223589FF}"/>
-              </a:ext>
-            </a:extLst>
-          </p:cNvPr>
+          <p:cNvPr id="5" name="Date Placeholder 4"/>
           <p:cNvSpPr>
             <a:spLocks noGrp="1"/>
           </p:cNvSpPr>
@@ -2581,7 +1881,7 @@
           <a:p>
             <a:fld id="{8CFBE4D0-E68C-4FB2-8B3A-AA41DAF039F9}" type="datetimeFigureOut">
               <a:rPr lang="en-US" smtClean="0"/>
-              <a:t>9/10/2025</a:t>
+              <a:t>9/18/2025</a:t>
             </a:fld>
             <a:endParaRPr lang="en-US"/>
           </a:p>
@@ -2589,13 +1889,7 @@
       </p:sp>
       <p:sp>
         <p:nvSpPr>
-          <p:cNvPr id="6" name="Footer Placeholder 5">
-            <a:extLst>
-              <a:ext uri="{FF2B5EF4-FFF2-40B4-BE49-F238E27FC236}">
-                <a16:creationId xmlns:a16="http://schemas.microsoft.com/office/drawing/2014/main" id="{6095A4BF-086F-98BB-F707-75DF6DF49F6A}"/>
-              </a:ext>
-            </a:extLst>
-          </p:cNvPr>
+          <p:cNvPr id="6" name="Footer Placeholder 5"/>
           <p:cNvSpPr>
             <a:spLocks noGrp="1"/>
           </p:cNvSpPr>
@@ -2614,13 +1908,7 @@
       </p:sp>
       <p:sp>
         <p:nvSpPr>
-          <p:cNvPr id="7" name="Slide Number Placeholder 6">
-            <a:extLst>
-              <a:ext uri="{FF2B5EF4-FFF2-40B4-BE49-F238E27FC236}">
-                <a16:creationId xmlns:a16="http://schemas.microsoft.com/office/drawing/2014/main" id="{C603B833-D94C-1AC9-CFFD-831D8DA12EED}"/>
-              </a:ext>
-            </a:extLst>
-          </p:cNvPr>
+          <p:cNvPr id="7" name="Slide Number Placeholder 6"/>
           <p:cNvSpPr>
             <a:spLocks noGrp="1"/>
           </p:cNvSpPr>
@@ -2642,11 +1930,6 @@
         </p:txBody>
       </p:sp>
     </p:spTree>
-    <p:extLst>
-      <p:ext uri="{BB962C8B-B14F-4D97-AF65-F5344CB8AC3E}">
-        <p14:creationId xmlns:p14="http://schemas.microsoft.com/office/powerpoint/2010/main" val="3166536988"/>
-      </p:ext>
-    </p:extLst>
   </p:cSld>
   <p:clrMapOvr>
     <a:masterClrMapping/>
@@ -2673,13 +1956,7 @@
       </p:grpSpPr>
       <p:sp>
         <p:nvSpPr>
-          <p:cNvPr id="2" name="Title 1">
-            <a:extLst>
-              <a:ext uri="{FF2B5EF4-FFF2-40B4-BE49-F238E27FC236}">
-                <a16:creationId xmlns:a16="http://schemas.microsoft.com/office/drawing/2014/main" id="{E9319E33-AED8-B87B-9CC4-4BAB91FC33C2}"/>
-              </a:ext>
-            </a:extLst>
-          </p:cNvPr>
+          <p:cNvPr id="2" name="Title 1"/>
           <p:cNvSpPr>
             <a:spLocks noGrp="1"/>
           </p:cNvSpPr>
@@ -2706,13 +1983,7 @@
       </p:sp>
       <p:sp>
         <p:nvSpPr>
-          <p:cNvPr id="3" name="Text Placeholder 2">
-            <a:extLst>
-              <a:ext uri="{FF2B5EF4-FFF2-40B4-BE49-F238E27FC236}">
-                <a16:creationId xmlns:a16="http://schemas.microsoft.com/office/drawing/2014/main" id="{B1B38AB0-C97E-6DAB-D4F9-4E6E880A75F8}"/>
-              </a:ext>
-            </a:extLst>
-          </p:cNvPr>
+          <p:cNvPr id="3" name="Text Placeholder 2"/>
           <p:cNvSpPr>
             <a:spLocks noGrp="1"/>
           </p:cNvSpPr>
@@ -2777,13 +2048,7 @@
       </p:sp>
       <p:sp>
         <p:nvSpPr>
-          <p:cNvPr id="4" name="Content Placeholder 3">
-            <a:extLst>
-              <a:ext uri="{FF2B5EF4-FFF2-40B4-BE49-F238E27FC236}">
-                <a16:creationId xmlns:a16="http://schemas.microsoft.com/office/drawing/2014/main" id="{5E0FB543-54DF-5442-98C7-915747DAA1A4}"/>
-              </a:ext>
-            </a:extLst>
-          </p:cNvPr>
+          <p:cNvPr id="4" name="Content Placeholder 3"/>
           <p:cNvSpPr>
             <a:spLocks noGrp="1"/>
           </p:cNvSpPr>
@@ -2839,13 +2104,7 @@
       </p:sp>
       <p:sp>
         <p:nvSpPr>
-          <p:cNvPr id="5" name="Text Placeholder 4">
-            <a:extLst>
-              <a:ext uri="{FF2B5EF4-FFF2-40B4-BE49-F238E27FC236}">
-                <a16:creationId xmlns:a16="http://schemas.microsoft.com/office/drawing/2014/main" id="{46C64A0E-6894-69A9-F1E4-675924EDF40F}"/>
-              </a:ext>
-            </a:extLst>
-          </p:cNvPr>
+          <p:cNvPr id="5" name="Text Placeholder 4"/>
           <p:cNvSpPr>
             <a:spLocks noGrp="1"/>
           </p:cNvSpPr>
@@ -2910,13 +2169,7 @@
       </p:sp>
       <p:sp>
         <p:nvSpPr>
-          <p:cNvPr id="6" name="Content Placeholder 5">
-            <a:extLst>
-              <a:ext uri="{FF2B5EF4-FFF2-40B4-BE49-F238E27FC236}">
-                <a16:creationId xmlns:a16="http://schemas.microsoft.com/office/drawing/2014/main" id="{7C49B4D7-7FE4-E06D-00C8-F9CB7BAB3DA9}"/>
-              </a:ext>
-            </a:extLst>
-          </p:cNvPr>
+          <p:cNvPr id="6" name="Content Placeholder 5"/>
           <p:cNvSpPr>
             <a:spLocks noGrp="1"/>
           </p:cNvSpPr>
@@ -2972,13 +2225,7 @@
       </p:sp>
       <p:sp>
         <p:nvSpPr>
-          <p:cNvPr id="7" name="Date Placeholder 6">
-            <a:extLst>
-              <a:ext uri="{FF2B5EF4-FFF2-40B4-BE49-F238E27FC236}">
-                <a16:creationId xmlns:a16="http://schemas.microsoft.com/office/drawing/2014/main" id="{52CC1D51-1765-5933-46E9-9583E41C6F79}"/>
-              </a:ext>
-            </a:extLst>
-          </p:cNvPr>
+          <p:cNvPr id="7" name="Date Placeholder 6"/>
           <p:cNvSpPr>
             <a:spLocks noGrp="1"/>
           </p:cNvSpPr>
@@ -2993,7 +2240,7 @@
           <a:p>
             <a:fld id="{8CFBE4D0-E68C-4FB2-8B3A-AA41DAF039F9}" type="datetimeFigureOut">
               <a:rPr lang="en-US" smtClean="0"/>
-              <a:t>9/10/2025</a:t>
+              <a:t>9/18/2025</a:t>
             </a:fld>
             <a:endParaRPr lang="en-US"/>
           </a:p>
@@ -3001,13 +2248,7 @@
       </p:sp>
       <p:sp>
         <p:nvSpPr>
-          <p:cNvPr id="8" name="Footer Placeholder 7">
-            <a:extLst>
-              <a:ext uri="{FF2B5EF4-FFF2-40B4-BE49-F238E27FC236}">
-                <a16:creationId xmlns:a16="http://schemas.microsoft.com/office/drawing/2014/main" id="{99E0BF8D-CC19-4D88-8268-D162B908A287}"/>
-              </a:ext>
-            </a:extLst>
-          </p:cNvPr>
+          <p:cNvPr id="8" name="Footer Placeholder 7"/>
           <p:cNvSpPr>
             <a:spLocks noGrp="1"/>
           </p:cNvSpPr>
@@ -3026,13 +2267,7 @@
       </p:sp>
       <p:sp>
         <p:nvSpPr>
-          <p:cNvPr id="9" name="Slide Number Placeholder 8">
-            <a:extLst>
-              <a:ext uri="{FF2B5EF4-FFF2-40B4-BE49-F238E27FC236}">
-                <a16:creationId xmlns:a16="http://schemas.microsoft.com/office/drawing/2014/main" id="{7F7C37E9-D6FF-6D2E-CCCD-69876A090DC2}"/>
-              </a:ext>
-            </a:extLst>
-          </p:cNvPr>
+          <p:cNvPr id="9" name="Slide Number Placeholder 8"/>
           <p:cNvSpPr>
             <a:spLocks noGrp="1"/>
           </p:cNvSpPr>
@@ -3054,11 +2289,6 @@
         </p:txBody>
       </p:sp>
     </p:spTree>
-    <p:extLst>
-      <p:ext uri="{BB962C8B-B14F-4D97-AF65-F5344CB8AC3E}">
-        <p14:creationId xmlns:p14="http://schemas.microsoft.com/office/powerpoint/2010/main" val="2313169429"/>
-      </p:ext>
-    </p:extLst>
   </p:cSld>
   <p:clrMapOvr>
     <a:masterClrMapping/>
@@ -3085,13 +2315,7 @@
       </p:grpSpPr>
       <p:sp>
         <p:nvSpPr>
-          <p:cNvPr id="2" name="Title 1">
-            <a:extLst>
-              <a:ext uri="{FF2B5EF4-FFF2-40B4-BE49-F238E27FC236}">
-                <a16:creationId xmlns:a16="http://schemas.microsoft.com/office/drawing/2014/main" id="{C2AFB4E4-AD40-0BBB-5B83-B34C871681C8}"/>
-              </a:ext>
-            </a:extLst>
-          </p:cNvPr>
+          <p:cNvPr id="2" name="Title 1"/>
           <p:cNvSpPr>
             <a:spLocks noGrp="1"/>
           </p:cNvSpPr>
@@ -3113,13 +2337,7 @@
       </p:sp>
       <p:sp>
         <p:nvSpPr>
-          <p:cNvPr id="3" name="Date Placeholder 2">
-            <a:extLst>
-              <a:ext uri="{FF2B5EF4-FFF2-40B4-BE49-F238E27FC236}">
-                <a16:creationId xmlns:a16="http://schemas.microsoft.com/office/drawing/2014/main" id="{943383E0-E3BA-487A-F1CE-35C3E7036B59}"/>
-              </a:ext>
-            </a:extLst>
-          </p:cNvPr>
+          <p:cNvPr id="3" name="Date Placeholder 2"/>
           <p:cNvSpPr>
             <a:spLocks noGrp="1"/>
           </p:cNvSpPr>
@@ -3134,7 +2352,7 @@
           <a:p>
             <a:fld id="{8CFBE4D0-E68C-4FB2-8B3A-AA41DAF039F9}" type="datetimeFigureOut">
               <a:rPr lang="en-US" smtClean="0"/>
-              <a:t>9/10/2025</a:t>
+              <a:t>9/18/2025</a:t>
             </a:fld>
             <a:endParaRPr lang="en-US"/>
           </a:p>
@@ -3142,13 +2360,7 @@
       </p:sp>
       <p:sp>
         <p:nvSpPr>
-          <p:cNvPr id="4" name="Footer Placeholder 3">
-            <a:extLst>
-              <a:ext uri="{FF2B5EF4-FFF2-40B4-BE49-F238E27FC236}">
-                <a16:creationId xmlns:a16="http://schemas.microsoft.com/office/drawing/2014/main" id="{A3A2B5EC-367A-A661-0FF1-BABCDF90D272}"/>
-              </a:ext>
-            </a:extLst>
-          </p:cNvPr>
+          <p:cNvPr id="4" name="Footer Placeholder 3"/>
           <p:cNvSpPr>
             <a:spLocks noGrp="1"/>
           </p:cNvSpPr>
@@ -3167,13 +2379,7 @@
       </p:sp>
       <p:sp>
         <p:nvSpPr>
-          <p:cNvPr id="5" name="Slide Number Placeholder 4">
-            <a:extLst>
-              <a:ext uri="{FF2B5EF4-FFF2-40B4-BE49-F238E27FC236}">
-                <a16:creationId xmlns:a16="http://schemas.microsoft.com/office/drawing/2014/main" id="{CD9373EB-8547-A75B-B63A-8D83DF86A079}"/>
-              </a:ext>
-            </a:extLst>
-          </p:cNvPr>
+          <p:cNvPr id="5" name="Slide Number Placeholder 4"/>
           <p:cNvSpPr>
             <a:spLocks noGrp="1"/>
           </p:cNvSpPr>
@@ -3195,11 +2401,6 @@
         </p:txBody>
       </p:sp>
     </p:spTree>
-    <p:extLst>
-      <p:ext uri="{BB962C8B-B14F-4D97-AF65-F5344CB8AC3E}">
-        <p14:creationId xmlns:p14="http://schemas.microsoft.com/office/powerpoint/2010/main" val="3125008663"/>
-      </p:ext>
-    </p:extLst>
   </p:cSld>
   <p:clrMapOvr>
     <a:masterClrMapping/>
@@ -3226,13 +2427,7 @@
       </p:grpSpPr>
       <p:sp>
         <p:nvSpPr>
-          <p:cNvPr id="2" name="Date Placeholder 1">
-            <a:extLst>
-              <a:ext uri="{FF2B5EF4-FFF2-40B4-BE49-F238E27FC236}">
-                <a16:creationId xmlns:a16="http://schemas.microsoft.com/office/drawing/2014/main" id="{A825240F-9D6E-5E5B-5739-A764AAD3F773}"/>
-              </a:ext>
-            </a:extLst>
-          </p:cNvPr>
+          <p:cNvPr id="2" name="Date Placeholder 1"/>
           <p:cNvSpPr>
             <a:spLocks noGrp="1"/>
           </p:cNvSpPr>
@@ -3247,7 +2442,7 @@
           <a:p>
             <a:fld id="{8CFBE4D0-E68C-4FB2-8B3A-AA41DAF039F9}" type="datetimeFigureOut">
               <a:rPr lang="en-US" smtClean="0"/>
-              <a:t>9/10/2025</a:t>
+              <a:t>9/18/2025</a:t>
             </a:fld>
             <a:endParaRPr lang="en-US"/>
           </a:p>
@@ -3255,13 +2450,7 @@
       </p:sp>
       <p:sp>
         <p:nvSpPr>
-          <p:cNvPr id="3" name="Footer Placeholder 2">
-            <a:extLst>
-              <a:ext uri="{FF2B5EF4-FFF2-40B4-BE49-F238E27FC236}">
-                <a16:creationId xmlns:a16="http://schemas.microsoft.com/office/drawing/2014/main" id="{1B15E38A-2B47-3BE4-FDBB-F1DA85C4CFAC}"/>
-              </a:ext>
-            </a:extLst>
-          </p:cNvPr>
+          <p:cNvPr id="3" name="Footer Placeholder 2"/>
           <p:cNvSpPr>
             <a:spLocks noGrp="1"/>
           </p:cNvSpPr>
@@ -3280,13 +2469,7 @@
       </p:sp>
       <p:sp>
         <p:nvSpPr>
-          <p:cNvPr id="4" name="Slide Number Placeholder 3">
-            <a:extLst>
-              <a:ext uri="{FF2B5EF4-FFF2-40B4-BE49-F238E27FC236}">
-                <a16:creationId xmlns:a16="http://schemas.microsoft.com/office/drawing/2014/main" id="{E273BECA-2872-CB7C-70B9-C193C728128F}"/>
-              </a:ext>
-            </a:extLst>
-          </p:cNvPr>
+          <p:cNvPr id="4" name="Slide Number Placeholder 3"/>
           <p:cNvSpPr>
             <a:spLocks noGrp="1"/>
           </p:cNvSpPr>
@@ -3308,11 +2491,6 @@
         </p:txBody>
       </p:sp>
     </p:spTree>
-    <p:extLst>
-      <p:ext uri="{BB962C8B-B14F-4D97-AF65-F5344CB8AC3E}">
-        <p14:creationId xmlns:p14="http://schemas.microsoft.com/office/powerpoint/2010/main" val="2095997982"/>
-      </p:ext>
-    </p:extLst>
   </p:cSld>
   <p:clrMapOvr>
     <a:masterClrMapping/>
@@ -3339,13 +2517,7 @@
       </p:grpSpPr>
       <p:sp>
         <p:nvSpPr>
-          <p:cNvPr id="2" name="Title 1">
-            <a:extLst>
-              <a:ext uri="{FF2B5EF4-FFF2-40B4-BE49-F238E27FC236}">
-                <a16:creationId xmlns:a16="http://schemas.microsoft.com/office/drawing/2014/main" id="{3FAB55EF-3FB5-CEEA-B5B9-DF825D069BCF}"/>
-              </a:ext>
-            </a:extLst>
-          </p:cNvPr>
+          <p:cNvPr id="2" name="Title 1"/>
           <p:cNvSpPr>
             <a:spLocks noGrp="1"/>
           </p:cNvSpPr>
@@ -3376,13 +2548,7 @@
       </p:sp>
       <p:sp>
         <p:nvSpPr>
-          <p:cNvPr id="3" name="Content Placeholder 2">
-            <a:extLst>
-              <a:ext uri="{FF2B5EF4-FFF2-40B4-BE49-F238E27FC236}">
-                <a16:creationId xmlns:a16="http://schemas.microsoft.com/office/drawing/2014/main" id="{0053C253-96E3-ADD3-298D-DC078E1CFAFC}"/>
-              </a:ext>
-            </a:extLst>
-          </p:cNvPr>
+          <p:cNvPr id="3" name="Content Placeholder 2"/>
           <p:cNvSpPr>
             <a:spLocks noGrp="1"/>
           </p:cNvSpPr>
@@ -3466,13 +2632,7 @@
       </p:sp>
       <p:sp>
         <p:nvSpPr>
-          <p:cNvPr id="4" name="Text Placeholder 3">
-            <a:extLst>
-              <a:ext uri="{FF2B5EF4-FFF2-40B4-BE49-F238E27FC236}">
-                <a16:creationId xmlns:a16="http://schemas.microsoft.com/office/drawing/2014/main" id="{59379389-2AC9-39C4-5C51-4372015E3A9B}"/>
-              </a:ext>
-            </a:extLst>
-          </p:cNvPr>
+          <p:cNvPr id="4" name="Text Placeholder 3"/>
           <p:cNvSpPr>
             <a:spLocks noGrp="1"/>
           </p:cNvSpPr>
@@ -3537,13 +2697,7 @@
       </p:sp>
       <p:sp>
         <p:nvSpPr>
-          <p:cNvPr id="5" name="Date Placeholder 4">
-            <a:extLst>
-              <a:ext uri="{FF2B5EF4-FFF2-40B4-BE49-F238E27FC236}">
-                <a16:creationId xmlns:a16="http://schemas.microsoft.com/office/drawing/2014/main" id="{9B87FBA9-D34A-DF22-4030-7CC81ACCF968}"/>
-              </a:ext>
-            </a:extLst>
-          </p:cNvPr>
+          <p:cNvPr id="5" name="Date Placeholder 4"/>
           <p:cNvSpPr>
             <a:spLocks noGrp="1"/>
           </p:cNvSpPr>
@@ -3558,7 +2712,7 @@
           <a:p>
             <a:fld id="{8CFBE4D0-E68C-4FB2-8B3A-AA41DAF039F9}" type="datetimeFigureOut">
               <a:rPr lang="en-US" smtClean="0"/>
-              <a:t>9/10/2025</a:t>
+              <a:t>9/18/2025</a:t>
             </a:fld>
             <a:endParaRPr lang="en-US"/>
           </a:p>
@@ -3566,13 +2720,7 @@
       </p:sp>
       <p:sp>
         <p:nvSpPr>
-          <p:cNvPr id="6" name="Footer Placeholder 5">
-            <a:extLst>
-              <a:ext uri="{FF2B5EF4-FFF2-40B4-BE49-F238E27FC236}">
-                <a16:creationId xmlns:a16="http://schemas.microsoft.com/office/drawing/2014/main" id="{5572565A-DCE6-BEB8-C0B4-AB737C219BD1}"/>
-              </a:ext>
-            </a:extLst>
-          </p:cNvPr>
+          <p:cNvPr id="6" name="Footer Placeholder 5"/>
           <p:cNvSpPr>
             <a:spLocks noGrp="1"/>
           </p:cNvSpPr>
@@ -3591,13 +2739,7 @@
       </p:sp>
       <p:sp>
         <p:nvSpPr>
-          <p:cNvPr id="7" name="Slide Number Placeholder 6">
-            <a:extLst>
-              <a:ext uri="{FF2B5EF4-FFF2-40B4-BE49-F238E27FC236}">
-                <a16:creationId xmlns:a16="http://schemas.microsoft.com/office/drawing/2014/main" id="{CB68F334-691D-4D47-5697-B841F7F0083C}"/>
-              </a:ext>
-            </a:extLst>
-          </p:cNvPr>
+          <p:cNvPr id="7" name="Slide Number Placeholder 6"/>
           <p:cNvSpPr>
             <a:spLocks noGrp="1"/>
           </p:cNvSpPr>
@@ -3619,11 +2761,6 @@
         </p:txBody>
       </p:sp>
     </p:spTree>
-    <p:extLst>
-      <p:ext uri="{BB962C8B-B14F-4D97-AF65-F5344CB8AC3E}">
-        <p14:creationId xmlns:p14="http://schemas.microsoft.com/office/powerpoint/2010/main" val="1119004446"/>
-      </p:ext>
-    </p:extLst>
   </p:cSld>
   <p:clrMapOvr>
     <a:masterClrMapping/>
@@ -3650,13 +2787,7 @@
       </p:grpSpPr>
       <p:sp>
         <p:nvSpPr>
-          <p:cNvPr id="2" name="Title 1">
-            <a:extLst>
-              <a:ext uri="{FF2B5EF4-FFF2-40B4-BE49-F238E27FC236}">
-                <a16:creationId xmlns:a16="http://schemas.microsoft.com/office/drawing/2014/main" id="{317AB2BD-9587-900E-7B78-C09E1220AFD9}"/>
-              </a:ext>
-            </a:extLst>
-          </p:cNvPr>
+          <p:cNvPr id="2" name="Title 1"/>
           <p:cNvSpPr>
             <a:spLocks noGrp="1"/>
           </p:cNvSpPr>
@@ -3687,13 +2818,7 @@
       </p:sp>
       <p:sp>
         <p:nvSpPr>
-          <p:cNvPr id="3" name="Picture Placeholder 2">
-            <a:extLst>
-              <a:ext uri="{FF2B5EF4-FFF2-40B4-BE49-F238E27FC236}">
-                <a16:creationId xmlns:a16="http://schemas.microsoft.com/office/drawing/2014/main" id="{A994C592-D295-8F91-555F-5104C216DE30}"/>
-              </a:ext>
-            </a:extLst>
-          </p:cNvPr>
+          <p:cNvPr id="3" name="Picture Placeholder 2"/>
           <p:cNvSpPr>
             <a:spLocks noGrp="1"/>
           </p:cNvSpPr>
@@ -3754,13 +2879,7 @@
       </p:sp>
       <p:sp>
         <p:nvSpPr>
-          <p:cNvPr id="4" name="Text Placeholder 3">
-            <a:extLst>
-              <a:ext uri="{FF2B5EF4-FFF2-40B4-BE49-F238E27FC236}">
-                <a16:creationId xmlns:a16="http://schemas.microsoft.com/office/drawing/2014/main" id="{7200948D-CF7C-759D-183B-4A97A197F463}"/>
-              </a:ext>
-            </a:extLst>
-          </p:cNvPr>
+          <p:cNvPr id="4" name="Text Placeholder 3"/>
           <p:cNvSpPr>
             <a:spLocks noGrp="1"/>
           </p:cNvSpPr>
@@ -3825,13 +2944,7 @@
       </p:sp>
       <p:sp>
         <p:nvSpPr>
-          <p:cNvPr id="5" name="Date Placeholder 4">
-            <a:extLst>
-              <a:ext uri="{FF2B5EF4-FFF2-40B4-BE49-F238E27FC236}">
-                <a16:creationId xmlns:a16="http://schemas.microsoft.com/office/drawing/2014/main" id="{A6E657F6-AD68-A51D-F55B-E1258283EEAF}"/>
-              </a:ext>
-            </a:extLst>
-          </p:cNvPr>
+          <p:cNvPr id="5" name="Date Placeholder 4"/>
           <p:cNvSpPr>
             <a:spLocks noGrp="1"/>
           </p:cNvSpPr>
@@ -3846,7 +2959,7 @@
           <a:p>
             <a:fld id="{8CFBE4D0-E68C-4FB2-8B3A-AA41DAF039F9}" type="datetimeFigureOut">
               <a:rPr lang="en-US" smtClean="0"/>
-              <a:t>9/10/2025</a:t>
+              <a:t>9/18/2025</a:t>
             </a:fld>
             <a:endParaRPr lang="en-US"/>
           </a:p>
@@ -3854,13 +2967,7 @@
       </p:sp>
       <p:sp>
         <p:nvSpPr>
-          <p:cNvPr id="6" name="Footer Placeholder 5">
-            <a:extLst>
-              <a:ext uri="{FF2B5EF4-FFF2-40B4-BE49-F238E27FC236}">
-                <a16:creationId xmlns:a16="http://schemas.microsoft.com/office/drawing/2014/main" id="{875BE1E4-7D6D-F6F3-7A20-AD503FA27539}"/>
-              </a:ext>
-            </a:extLst>
-          </p:cNvPr>
+          <p:cNvPr id="6" name="Footer Placeholder 5"/>
           <p:cNvSpPr>
             <a:spLocks noGrp="1"/>
           </p:cNvSpPr>
@@ -3879,13 +2986,7 @@
       </p:sp>
       <p:sp>
         <p:nvSpPr>
-          <p:cNvPr id="7" name="Slide Number Placeholder 6">
-            <a:extLst>
-              <a:ext uri="{FF2B5EF4-FFF2-40B4-BE49-F238E27FC236}">
-                <a16:creationId xmlns:a16="http://schemas.microsoft.com/office/drawing/2014/main" id="{1CA550FD-9475-C54F-A97D-75D4461306DA}"/>
-              </a:ext>
-            </a:extLst>
-          </p:cNvPr>
+          <p:cNvPr id="7" name="Slide Number Placeholder 6"/>
           <p:cNvSpPr>
             <a:spLocks noGrp="1"/>
           </p:cNvSpPr>
@@ -3907,11 +3008,6 @@
         </p:txBody>
       </p:sp>
     </p:spTree>
-    <p:extLst>
-      <p:ext uri="{BB962C8B-B14F-4D97-AF65-F5344CB8AC3E}">
-        <p14:creationId xmlns:p14="http://schemas.microsoft.com/office/powerpoint/2010/main" val="2548440090"/>
-      </p:ext>
-    </p:extLst>
   </p:cSld>
   <p:clrMapOvr>
     <a:masterClrMapping/>
@@ -3943,13 +3039,7 @@
       </p:grpSpPr>
       <p:sp>
         <p:nvSpPr>
-          <p:cNvPr id="2" name="Title Placeholder 1">
-            <a:extLst>
-              <a:ext uri="{FF2B5EF4-FFF2-40B4-BE49-F238E27FC236}">
-                <a16:creationId xmlns:a16="http://schemas.microsoft.com/office/drawing/2014/main" id="{B4FA0F04-FAD4-97D9-A6C1-4A94253481B2}"/>
-              </a:ext>
-            </a:extLst>
-          </p:cNvPr>
+          <p:cNvPr id="2" name="Title Placeholder 1"/>
           <p:cNvSpPr>
             <a:spLocks noGrp="1"/>
           </p:cNvSpPr>
@@ -3981,13 +3071,7 @@
       </p:sp>
       <p:sp>
         <p:nvSpPr>
-          <p:cNvPr id="3" name="Text Placeholder 2">
-            <a:extLst>
-              <a:ext uri="{FF2B5EF4-FFF2-40B4-BE49-F238E27FC236}">
-                <a16:creationId xmlns:a16="http://schemas.microsoft.com/office/drawing/2014/main" id="{A434B0C2-37FD-4F81-D9FA-1A82879BFCC7}"/>
-              </a:ext>
-            </a:extLst>
-          </p:cNvPr>
+          <p:cNvPr id="3" name="Text Placeholder 2"/>
           <p:cNvSpPr>
             <a:spLocks noGrp="1"/>
           </p:cNvSpPr>
@@ -4048,13 +3132,7 @@
       </p:sp>
       <p:sp>
         <p:nvSpPr>
-          <p:cNvPr id="4" name="Date Placeholder 3">
-            <a:extLst>
-              <a:ext uri="{FF2B5EF4-FFF2-40B4-BE49-F238E27FC236}">
-                <a16:creationId xmlns:a16="http://schemas.microsoft.com/office/drawing/2014/main" id="{EBCB38CD-676D-868D-91EF-E89C850F79E1}"/>
-              </a:ext>
-            </a:extLst>
-          </p:cNvPr>
+          <p:cNvPr id="4" name="Date Placeholder 3"/>
           <p:cNvSpPr>
             <a:spLocks noGrp="1"/>
           </p:cNvSpPr>
@@ -4087,7 +3165,7 @@
           <a:p>
             <a:fld id="{8CFBE4D0-E68C-4FB2-8B3A-AA41DAF039F9}" type="datetimeFigureOut">
               <a:rPr lang="en-US" smtClean="0"/>
-              <a:t>9/10/2025</a:t>
+              <a:t>9/18/2025</a:t>
             </a:fld>
             <a:endParaRPr lang="en-US"/>
           </a:p>
@@ -4095,13 +3173,7 @@
       </p:sp>
       <p:sp>
         <p:nvSpPr>
-          <p:cNvPr id="5" name="Footer Placeholder 4">
-            <a:extLst>
-              <a:ext uri="{FF2B5EF4-FFF2-40B4-BE49-F238E27FC236}">
-                <a16:creationId xmlns:a16="http://schemas.microsoft.com/office/drawing/2014/main" id="{AA571AA0-E6E0-8ED1-29A0-12D5FC02FF15}"/>
-              </a:ext>
-            </a:extLst>
-          </p:cNvPr>
+          <p:cNvPr id="5" name="Footer Placeholder 4"/>
           <p:cNvSpPr>
             <a:spLocks noGrp="1"/>
           </p:cNvSpPr>
@@ -4138,13 +3210,7 @@
       </p:sp>
       <p:sp>
         <p:nvSpPr>
-          <p:cNvPr id="6" name="Slide Number Placeholder 5">
-            <a:extLst>
-              <a:ext uri="{FF2B5EF4-FFF2-40B4-BE49-F238E27FC236}">
-                <a16:creationId xmlns:a16="http://schemas.microsoft.com/office/drawing/2014/main" id="{AC99B170-770F-E884-8E03-34B29117A041}"/>
-              </a:ext>
-            </a:extLst>
-          </p:cNvPr>
+          <p:cNvPr id="6" name="Slide Number Placeholder 5"/>
           <p:cNvSpPr>
             <a:spLocks noGrp="1"/>
           </p:cNvSpPr>
@@ -4184,11 +3250,6 @@
         </p:txBody>
       </p:sp>
     </p:spTree>
-    <p:extLst>
-      <p:ext uri="{BB962C8B-B14F-4D97-AF65-F5344CB8AC3E}">
-        <p14:creationId xmlns:p14="http://schemas.microsoft.com/office/powerpoint/2010/main" val="1895986241"/>
-      </p:ext>
-    </p:extLst>
   </p:cSld>
   <p:clrMap bg1="lt1" tx1="dk1" bg2="lt2" tx2="dk2" accent1="accent1" accent2="accent2" accent3="accent3" accent4="accent4" accent5="accent5" accent6="accent6" hlink="hlink" folHlink="folHlink"/>
   <p:sldLayoutIdLst>
@@ -4506,13 +3567,7 @@
       </p:grpSpPr>
       <p:sp>
         <p:nvSpPr>
-          <p:cNvPr id="8" name="Rectangle 7">
-            <a:extLst>
-              <a:ext uri="{FF2B5EF4-FFF2-40B4-BE49-F238E27FC236}">
-                <a16:creationId xmlns:a16="http://schemas.microsoft.com/office/drawing/2014/main" id="{2C3A5304-1DD4-1448-EB8F-F50DA11AEA9F}"/>
-              </a:ext>
-            </a:extLst>
-          </p:cNvPr>
+          <p:cNvPr id="8" name="Rectangle 7"/>
           <p:cNvSpPr/>
           <p:nvPr/>
         </p:nvSpPr>
@@ -4558,13 +3613,7 @@
       </p:sp>
       <p:sp>
         <p:nvSpPr>
-          <p:cNvPr id="9" name="Oval 8">
-            <a:extLst>
-              <a:ext uri="{FF2B5EF4-FFF2-40B4-BE49-F238E27FC236}">
-                <a16:creationId xmlns:a16="http://schemas.microsoft.com/office/drawing/2014/main" id="{02494D9B-A64C-5821-35E0-80140852AFAD}"/>
-              </a:ext>
-            </a:extLst>
-          </p:cNvPr>
+          <p:cNvPr id="9" name="Oval 8"/>
           <p:cNvSpPr/>
           <p:nvPr/>
         </p:nvSpPr>
@@ -4610,13 +3659,7 @@
       </p:sp>
       <p:grpSp>
         <p:nvGrpSpPr>
-          <p:cNvPr id="20" name="Group 19">
-            <a:extLst>
-              <a:ext uri="{FF2B5EF4-FFF2-40B4-BE49-F238E27FC236}">
-                <a16:creationId xmlns:a16="http://schemas.microsoft.com/office/drawing/2014/main" id="{2E0B9D15-33D0-DD82-F9B9-A62E397585AB}"/>
-              </a:ext>
-            </a:extLst>
-          </p:cNvPr>
+          <p:cNvPr id="20" name="Group 19"/>
           <p:cNvGrpSpPr/>
           <p:nvPr/>
         </p:nvGrpSpPr>
@@ -4630,13 +3673,7 @@
         </p:grpSpPr>
         <p:sp>
           <p:nvSpPr>
-            <p:cNvPr id="12" name="Oval 11">
-              <a:extLst>
-                <a:ext uri="{FF2B5EF4-FFF2-40B4-BE49-F238E27FC236}">
-                  <a16:creationId xmlns:a16="http://schemas.microsoft.com/office/drawing/2014/main" id="{EE8F1EA6-1449-2D14-64DF-6AE6F61827F1}"/>
-                </a:ext>
-              </a:extLst>
-            </p:cNvPr>
+            <p:cNvPr id="12" name="Oval 11"/>
             <p:cNvSpPr/>
             <p:nvPr/>
           </p:nvSpPr>
@@ -4658,42 +3695,42 @@
                 <a:gd name="connsiteY3" fmla="*/ 4040982 h 4040981"/>
                 <a:gd name="connsiteX4" fmla="*/ 0 w 4040981"/>
                 <a:gd name="connsiteY4" fmla="*/ 2020491 h 4040981"/>
-                <a:gd name="connsiteX0" fmla="*/ 2020491 w 4040982"/>
-                <a:gd name="connsiteY0" fmla="*/ 0 h 4040982"/>
-                <a:gd name="connsiteX1" fmla="*/ 4040982 w 4040982"/>
-                <a:gd name="connsiteY1" fmla="*/ 2020491 h 4040982"/>
-                <a:gd name="connsiteX2" fmla="*/ 2020491 w 4040982"/>
-                <a:gd name="connsiteY2" fmla="*/ 4040982 h 4040982"/>
-                <a:gd name="connsiteX3" fmla="*/ 0 w 4040982"/>
-                <a:gd name="connsiteY3" fmla="*/ 2020491 h 4040982"/>
-                <a:gd name="connsiteX4" fmla="*/ 2111931 w 4040982"/>
-                <a:gd name="connsiteY4" fmla="*/ 91440 h 4040982"/>
-                <a:gd name="connsiteX0" fmla="*/ 2020491 w 4040982"/>
-                <a:gd name="connsiteY0" fmla="*/ 0 h 4040982"/>
-                <a:gd name="connsiteX1" fmla="*/ 4040982 w 4040982"/>
-                <a:gd name="connsiteY1" fmla="*/ 2020491 h 4040982"/>
-                <a:gd name="connsiteX2" fmla="*/ 2020491 w 4040982"/>
-                <a:gd name="connsiteY2" fmla="*/ 4040982 h 4040982"/>
-                <a:gd name="connsiteX3" fmla="*/ 0 w 4040982"/>
-                <a:gd name="connsiteY3" fmla="*/ 2020491 h 4040982"/>
-                <a:gd name="connsiteX0" fmla="*/ 4040982 w 4040982"/>
-                <a:gd name="connsiteY0" fmla="*/ 0 h 2020491"/>
-                <a:gd name="connsiteX1" fmla="*/ 2020491 w 4040982"/>
-                <a:gd name="connsiteY1" fmla="*/ 2020491 h 2020491"/>
-                <a:gd name="connsiteX2" fmla="*/ 0 w 4040982"/>
-                <a:gd name="connsiteY2" fmla="*/ 0 h 2020491"/>
-                <a:gd name="connsiteX0" fmla="*/ 2020491 w 2020491"/>
-                <a:gd name="connsiteY0" fmla="*/ 0 h 2020491"/>
-                <a:gd name="connsiteX1" fmla="*/ 0 w 2020491"/>
-                <a:gd name="connsiteY1" fmla="*/ 2020491 h 2020491"/>
+                <a:gd name="connsiteX0-1" fmla="*/ 2020491 w 4040982"/>
+                <a:gd name="connsiteY0-2" fmla="*/ 0 h 4040982"/>
+                <a:gd name="connsiteX1-3" fmla="*/ 4040982 w 4040982"/>
+                <a:gd name="connsiteY1-4" fmla="*/ 2020491 h 4040982"/>
+                <a:gd name="connsiteX2-5" fmla="*/ 2020491 w 4040982"/>
+                <a:gd name="connsiteY2-6" fmla="*/ 4040982 h 4040982"/>
+                <a:gd name="connsiteX3-7" fmla="*/ 0 w 4040982"/>
+                <a:gd name="connsiteY3-8" fmla="*/ 2020491 h 4040982"/>
+                <a:gd name="connsiteX4-9" fmla="*/ 2111931 w 4040982"/>
+                <a:gd name="connsiteY4-10" fmla="*/ 91440 h 4040982"/>
+                <a:gd name="connsiteX0-11" fmla="*/ 2020491 w 4040982"/>
+                <a:gd name="connsiteY0-12" fmla="*/ 0 h 4040982"/>
+                <a:gd name="connsiteX1-13" fmla="*/ 4040982 w 4040982"/>
+                <a:gd name="connsiteY1-14" fmla="*/ 2020491 h 4040982"/>
+                <a:gd name="connsiteX2-15" fmla="*/ 2020491 w 4040982"/>
+                <a:gd name="connsiteY2-16" fmla="*/ 4040982 h 4040982"/>
+                <a:gd name="connsiteX3-17" fmla="*/ 0 w 4040982"/>
+                <a:gd name="connsiteY3-18" fmla="*/ 2020491 h 4040982"/>
+                <a:gd name="connsiteX0-19" fmla="*/ 4040982 w 4040982"/>
+                <a:gd name="connsiteY0-20" fmla="*/ 0 h 2020491"/>
+                <a:gd name="connsiteX1-21" fmla="*/ 2020491 w 4040982"/>
+                <a:gd name="connsiteY1-22" fmla="*/ 2020491 h 2020491"/>
+                <a:gd name="connsiteX2-23" fmla="*/ 0 w 4040982"/>
+                <a:gd name="connsiteY2-24" fmla="*/ 0 h 2020491"/>
+                <a:gd name="connsiteX0-25" fmla="*/ 2020491 w 2020491"/>
+                <a:gd name="connsiteY0-26" fmla="*/ 0 h 2020491"/>
+                <a:gd name="connsiteX1-27" fmla="*/ 0 w 2020491"/>
+                <a:gd name="connsiteY1-28" fmla="*/ 2020491 h 2020491"/>
               </a:gdLst>
               <a:ahLst/>
               <a:cxnLst>
                 <a:cxn ang="0">
-                  <a:pos x="connsiteX0" y="connsiteY0"/>
+                  <a:pos x="connsiteX0-1" y="connsiteY0-2"/>
                 </a:cxn>
                 <a:cxn ang="0">
-                  <a:pos x="connsiteX1" y="connsiteY1"/>
+                  <a:pos x="connsiteX1-3" y="connsiteY1-4"/>
                 </a:cxn>
               </a:cxnLst>
               <a:rect l="l" t="t" r="r" b="b"/>
@@ -4752,13 +3789,7 @@
         </p:sp>
         <p:sp>
           <p:nvSpPr>
-            <p:cNvPr id="13" name="Oval 12">
-              <a:extLst>
-                <a:ext uri="{FF2B5EF4-FFF2-40B4-BE49-F238E27FC236}">
-                  <a16:creationId xmlns:a16="http://schemas.microsoft.com/office/drawing/2014/main" id="{16BA0D63-1A8C-FA71-AF34-8D981C9DA020}"/>
-                </a:ext>
-              </a:extLst>
-            </p:cNvPr>
+            <p:cNvPr id="13" name="Oval 12"/>
             <p:cNvSpPr/>
             <p:nvPr/>
           </p:nvSpPr>
@@ -4780,42 +3811,42 @@
                 <a:gd name="connsiteY3" fmla="*/ 4040982 h 4040981"/>
                 <a:gd name="connsiteX4" fmla="*/ 0 w 4040981"/>
                 <a:gd name="connsiteY4" fmla="*/ 2020491 h 4040981"/>
-                <a:gd name="connsiteX0" fmla="*/ 0 w 4040982"/>
-                <a:gd name="connsiteY0" fmla="*/ 2020491 h 4040982"/>
-                <a:gd name="connsiteX1" fmla="*/ 2020491 w 4040982"/>
-                <a:gd name="connsiteY1" fmla="*/ 0 h 4040982"/>
-                <a:gd name="connsiteX2" fmla="*/ 4040982 w 4040982"/>
-                <a:gd name="connsiteY2" fmla="*/ 2020491 h 4040982"/>
-                <a:gd name="connsiteX3" fmla="*/ 2020491 w 4040982"/>
-                <a:gd name="connsiteY3" fmla="*/ 4040982 h 4040982"/>
-                <a:gd name="connsiteX4" fmla="*/ 91440 w 4040982"/>
-                <a:gd name="connsiteY4" fmla="*/ 2111931 h 4040982"/>
-                <a:gd name="connsiteX0" fmla="*/ 1935425 w 3955916"/>
-                <a:gd name="connsiteY0" fmla="*/ 0 h 4040982"/>
-                <a:gd name="connsiteX1" fmla="*/ 3955916 w 3955916"/>
-                <a:gd name="connsiteY1" fmla="*/ 2020491 h 4040982"/>
-                <a:gd name="connsiteX2" fmla="*/ 1935425 w 3955916"/>
-                <a:gd name="connsiteY2" fmla="*/ 4040982 h 4040982"/>
-                <a:gd name="connsiteX3" fmla="*/ 6374 w 3955916"/>
-                <a:gd name="connsiteY3" fmla="*/ 2111931 h 4040982"/>
-                <a:gd name="connsiteX0" fmla="*/ 0 w 2020491"/>
-                <a:gd name="connsiteY0" fmla="*/ 0 h 4040982"/>
-                <a:gd name="connsiteX1" fmla="*/ 2020491 w 2020491"/>
-                <a:gd name="connsiteY1" fmla="*/ 2020491 h 4040982"/>
-                <a:gd name="connsiteX2" fmla="*/ 0 w 2020491"/>
-                <a:gd name="connsiteY2" fmla="*/ 4040982 h 4040982"/>
-                <a:gd name="connsiteX0" fmla="*/ 0 w 2020491"/>
-                <a:gd name="connsiteY0" fmla="*/ 0 h 2020491"/>
-                <a:gd name="connsiteX1" fmla="*/ 2020491 w 2020491"/>
-                <a:gd name="connsiteY1" fmla="*/ 2020491 h 2020491"/>
+                <a:gd name="connsiteX0-1" fmla="*/ 0 w 4040982"/>
+                <a:gd name="connsiteY0-2" fmla="*/ 2020491 h 4040982"/>
+                <a:gd name="connsiteX1-3" fmla="*/ 2020491 w 4040982"/>
+                <a:gd name="connsiteY1-4" fmla="*/ 0 h 4040982"/>
+                <a:gd name="connsiteX2-5" fmla="*/ 4040982 w 4040982"/>
+                <a:gd name="connsiteY2-6" fmla="*/ 2020491 h 4040982"/>
+                <a:gd name="connsiteX3-7" fmla="*/ 2020491 w 4040982"/>
+                <a:gd name="connsiteY3-8" fmla="*/ 4040982 h 4040982"/>
+                <a:gd name="connsiteX4-9" fmla="*/ 91440 w 4040982"/>
+                <a:gd name="connsiteY4-10" fmla="*/ 2111931 h 4040982"/>
+                <a:gd name="connsiteX0-11" fmla="*/ 1935425 w 3955916"/>
+                <a:gd name="connsiteY0-12" fmla="*/ 0 h 4040982"/>
+                <a:gd name="connsiteX1-13" fmla="*/ 3955916 w 3955916"/>
+                <a:gd name="connsiteY1-14" fmla="*/ 2020491 h 4040982"/>
+                <a:gd name="connsiteX2-15" fmla="*/ 1935425 w 3955916"/>
+                <a:gd name="connsiteY2-16" fmla="*/ 4040982 h 4040982"/>
+                <a:gd name="connsiteX3-17" fmla="*/ 6374 w 3955916"/>
+                <a:gd name="connsiteY3-18" fmla="*/ 2111931 h 4040982"/>
+                <a:gd name="connsiteX0-19" fmla="*/ 0 w 2020491"/>
+                <a:gd name="connsiteY0-20" fmla="*/ 0 h 4040982"/>
+                <a:gd name="connsiteX1-21" fmla="*/ 2020491 w 2020491"/>
+                <a:gd name="connsiteY1-22" fmla="*/ 2020491 h 4040982"/>
+                <a:gd name="connsiteX2-23" fmla="*/ 0 w 2020491"/>
+                <a:gd name="connsiteY2-24" fmla="*/ 4040982 h 4040982"/>
+                <a:gd name="connsiteX0-25" fmla="*/ 0 w 2020491"/>
+                <a:gd name="connsiteY0-26" fmla="*/ 0 h 2020491"/>
+                <a:gd name="connsiteX1-27" fmla="*/ 2020491 w 2020491"/>
+                <a:gd name="connsiteY1-28" fmla="*/ 2020491 h 2020491"/>
               </a:gdLst>
               <a:ahLst/>
               <a:cxnLst>
                 <a:cxn ang="0">
-                  <a:pos x="connsiteX0" y="connsiteY0"/>
+                  <a:pos x="connsiteX0-1" y="connsiteY0-2"/>
                 </a:cxn>
                 <a:cxn ang="0">
-                  <a:pos x="connsiteX1" y="connsiteY1"/>
+                  <a:pos x="connsiteX1-3" y="connsiteY1-4"/>
                 </a:cxn>
               </a:cxnLst>
               <a:rect l="l" t="t" r="r" b="b"/>
@@ -4875,13 +3906,7 @@
       </p:grpSp>
       <p:sp>
         <p:nvSpPr>
-          <p:cNvPr id="16" name="TextBox 15">
-            <a:extLst>
-              <a:ext uri="{FF2B5EF4-FFF2-40B4-BE49-F238E27FC236}">
-                <a16:creationId xmlns:a16="http://schemas.microsoft.com/office/drawing/2014/main" id="{1A1895CA-783E-4D67-0B80-4F581E510DFC}"/>
-              </a:ext>
-            </a:extLst>
-          </p:cNvPr>
+          <p:cNvPr id="16" name="TextBox 15"/>
           <p:cNvSpPr txBox="1"/>
           <p:nvPr/>
         </p:nvSpPr>
@@ -4932,13 +3957,7 @@
       </p:sp>
       <p:sp>
         <p:nvSpPr>
-          <p:cNvPr id="17" name="Flowchart: Connector 16">
-            <a:extLst>
-              <a:ext uri="{FF2B5EF4-FFF2-40B4-BE49-F238E27FC236}">
-                <a16:creationId xmlns:a16="http://schemas.microsoft.com/office/drawing/2014/main" id="{4C91A7A9-76C6-5C2E-478B-78958A205DC7}"/>
-              </a:ext>
-            </a:extLst>
-          </p:cNvPr>
+          <p:cNvPr id="17" name="Flowchart: Connector 16"/>
           <p:cNvSpPr/>
           <p:nvPr/>
         </p:nvSpPr>
@@ -4984,13 +4003,7 @@
       </p:sp>
       <p:sp>
         <p:nvSpPr>
-          <p:cNvPr id="18" name="Flowchart: Connector 17">
-            <a:extLst>
-              <a:ext uri="{FF2B5EF4-FFF2-40B4-BE49-F238E27FC236}">
-                <a16:creationId xmlns:a16="http://schemas.microsoft.com/office/drawing/2014/main" id="{6C79B913-9121-C0E3-775A-7CF709668169}"/>
-              </a:ext>
-            </a:extLst>
-          </p:cNvPr>
+          <p:cNvPr id="18" name="Flowchart: Connector 17"/>
           <p:cNvSpPr/>
           <p:nvPr/>
         </p:nvSpPr>
@@ -5036,13 +4049,7 @@
       </p:sp>
       <p:sp>
         <p:nvSpPr>
-          <p:cNvPr id="19" name="Flowchart: Connector 18">
-            <a:extLst>
-              <a:ext uri="{FF2B5EF4-FFF2-40B4-BE49-F238E27FC236}">
-                <a16:creationId xmlns:a16="http://schemas.microsoft.com/office/drawing/2014/main" id="{7D55A065-5D8F-699B-CAD5-956600A06FD1}"/>
-              </a:ext>
-            </a:extLst>
-          </p:cNvPr>
+          <p:cNvPr id="19" name="Flowchart: Connector 18"/>
           <p:cNvSpPr/>
           <p:nvPr/>
         </p:nvSpPr>
@@ -5088,20 +4095,14 @@
       </p:sp>
       <p:pic>
         <p:nvPicPr>
-          <p:cNvPr id="28" name="Picture 27">
-            <a:extLst>
-              <a:ext uri="{FF2B5EF4-FFF2-40B4-BE49-F238E27FC236}">
-                <a16:creationId xmlns:a16="http://schemas.microsoft.com/office/drawing/2014/main" id="{7F52F024-178F-4960-6EC5-A5B6B07D9C62}"/>
-              </a:ext>
-            </a:extLst>
-          </p:cNvPr>
+          <p:cNvPr id="28" name="Picture 27"/>
           <p:cNvPicPr>
             <a:picLocks noChangeAspect="1"/>
           </p:cNvPicPr>
           <p:nvPr/>
         </p:nvPicPr>
         <p:blipFill>
-          <a:blip r:embed="rId2">
+          <a:blip r:embed="rId2" cstate="print">
             <a:extLst>
               <a:ext uri="{28A0092B-C50C-407E-A947-70E740481C1C}">
                 <a14:useLocalDpi xmlns:a14="http://schemas.microsoft.com/office/drawing/2010/main" val="0"/>
@@ -5124,13 +4125,7 @@
       </p:pic>
       <p:pic>
         <p:nvPicPr>
-          <p:cNvPr id="25" name="Picture 24">
-            <a:extLst>
-              <a:ext uri="{FF2B5EF4-FFF2-40B4-BE49-F238E27FC236}">
-                <a16:creationId xmlns:a16="http://schemas.microsoft.com/office/drawing/2014/main" id="{7B2BF6A3-A964-4163-1AA1-B00E1946239D}"/>
-              </a:ext>
-            </a:extLst>
-          </p:cNvPr>
+          <p:cNvPr id="25" name="Picture 24"/>
           <p:cNvPicPr>
             <a:picLocks noChangeAspect="1"/>
           </p:cNvPicPr>
@@ -5160,13 +4155,7 @@
       </p:pic>
       <p:sp>
         <p:nvSpPr>
-          <p:cNvPr id="26" name="TextBox 25">
-            <a:extLst>
-              <a:ext uri="{FF2B5EF4-FFF2-40B4-BE49-F238E27FC236}">
-                <a16:creationId xmlns:a16="http://schemas.microsoft.com/office/drawing/2014/main" id="{4A457D6E-0C73-6663-B6BB-A9B200825F99}"/>
-              </a:ext>
-            </a:extLst>
-          </p:cNvPr>
+          <p:cNvPr id="26" name="TextBox 25"/>
           <p:cNvSpPr txBox="1"/>
           <p:nvPr/>
         </p:nvSpPr>
@@ -5196,13 +4185,7 @@
       </p:sp>
       <p:sp>
         <p:nvSpPr>
-          <p:cNvPr id="2" name="TextBox 1">
-            <a:extLst>
-              <a:ext uri="{FF2B5EF4-FFF2-40B4-BE49-F238E27FC236}">
-                <a16:creationId xmlns:a16="http://schemas.microsoft.com/office/drawing/2014/main" id="{48D31E33-A3D1-B100-F80C-B7F90AFC459D}"/>
-              </a:ext>
-            </a:extLst>
-          </p:cNvPr>
+          <p:cNvPr id="2" name="TextBox 1"/>
           <p:cNvSpPr txBox="1"/>
           <p:nvPr/>
         </p:nvSpPr>
@@ -5245,11 +4228,6 @@
         </p:txBody>
       </p:sp>
     </p:spTree>
-    <p:extLst>
-      <p:ext uri="{BB962C8B-B14F-4D97-AF65-F5344CB8AC3E}">
-        <p14:creationId xmlns:p14="http://schemas.microsoft.com/office/powerpoint/2010/main" val="2256709242"/>
-      </p:ext>
-    </p:extLst>
   </p:cSld>
   <p:clrMapOvr>
     <a:masterClrMapping/>
@@ -5279,13 +4257,1194 @@
       </p:grpSpPr>
       <p:sp>
         <p:nvSpPr>
-          <p:cNvPr id="2" name="Title 1">
+          <p:cNvPr id="2" name="Title 1"/>
+          <p:cNvSpPr>
+            <a:spLocks noGrp="1"/>
+          </p:cNvSpPr>
+          <p:nvPr>
+            <p:ph type="title"/>
+          </p:nvPr>
+        </p:nvSpPr>
+        <p:spPr>
+          <a:xfrm>
+            <a:off x="838200" y="365126"/>
+            <a:ext cx="10515600" cy="588068"/>
+          </a:xfrm>
+        </p:spPr>
+        <p:txBody>
+          <a:bodyPr>
+            <a:noAutofit/>
+          </a:bodyPr>
+          <a:lstStyle/>
+          <a:p>
+            <a:pPr algn="ctr"/>
+            <a:r>
+              <a:rPr lang="en-IN" b="1" dirty="0"/>
+              <a:t>Tourism </a:t>
+            </a:r>
+            <a:r>
+              <a:rPr lang="en-IN" b="1" dirty="0" err="1"/>
+              <a:t>Palces</a:t>
+            </a:r>
+            <a:r>
+              <a:rPr lang="en-IN" b="1" dirty="0"/>
+              <a:t> To Be Search </a:t>
+            </a:r>
+          </a:p>
+        </p:txBody>
+      </p:sp>
+      <p:graphicFrame>
+        <p:nvGraphicFramePr>
+          <p:cNvPr id="5" name="Content Placeholder 4"/>
+          <p:cNvGraphicFramePr>
+            <a:graphicFrameLocks noGrp="1"/>
+          </p:cNvGraphicFramePr>
+          <p:nvPr>
+            <p:ph idx="1"/>
+          </p:nvPr>
+        </p:nvGraphicFramePr>
+        <p:xfrm>
+          <a:off x="838200" y="1825624"/>
+          <a:ext cx="10515600" cy="2981052"/>
+        </p:xfrm>
+        <a:graphic>
+          <a:graphicData uri="http://schemas.openxmlformats.org/drawingml/2006/table">
+            <a:tbl>
+              <a:tblPr firstRow="1" bandRow="1">
+                <a:tableStyleId>{5C22544A-7EE6-4342-B048-85BDC9FD1C3A}</a:tableStyleId>
+              </a:tblPr>
+              <a:tblGrid>
+                <a:gridCol w="3505200">
+                  <a:extLst>
+                    <a:ext uri="{9D8B030D-6E8A-4147-A177-3AD203B41FA5}">
+                      <a16:colId xmlns:a16="http://schemas.microsoft.com/office/drawing/2014/main" val="20000"/>
+                    </a:ext>
+                  </a:extLst>
+                </a:gridCol>
+                <a:gridCol w="3505200">
+                  <a:extLst>
+                    <a:ext uri="{9D8B030D-6E8A-4147-A177-3AD203B41FA5}">
+                      <a16:colId xmlns:a16="http://schemas.microsoft.com/office/drawing/2014/main" val="20001"/>
+                    </a:ext>
+                  </a:extLst>
+                </a:gridCol>
+                <a:gridCol w="3505200">
+                  <a:extLst>
+                    <a:ext uri="{9D8B030D-6E8A-4147-A177-3AD203B41FA5}">
+                      <a16:colId xmlns:a16="http://schemas.microsoft.com/office/drawing/2014/main" val="20002"/>
+                    </a:ext>
+                  </a:extLst>
+                </a:gridCol>
+              </a:tblGrid>
+              <a:tr h="374922">
+                <a:tc>
+                  <a:txBody>
+                    <a:bodyPr/>
+                    <a:lstStyle/>
+                    <a:p>
+                      <a:r>
+                        <a:rPr lang="en-IN" dirty="0"/>
+                        <a:t>INDIAN CITIES</a:t>
+                      </a:r>
+                    </a:p>
+                  </a:txBody>
+                  <a:tcPr/>
+                </a:tc>
+                <a:tc>
+                  <a:txBody>
+                    <a:bodyPr/>
+                    <a:lstStyle/>
+                    <a:p>
+                      <a:r>
+                        <a:rPr lang="en-IN" dirty="0"/>
+                        <a:t>INDIA STATES</a:t>
+                      </a:r>
+                    </a:p>
+                  </a:txBody>
+                  <a:tcPr/>
+                </a:tc>
+                <a:tc>
+                  <a:txBody>
+                    <a:bodyPr/>
+                    <a:lstStyle/>
+                    <a:p>
+                      <a:r>
+                        <a:rPr lang="en-IN" dirty="0"/>
+                        <a:t>WORLD TOURISM</a:t>
+                      </a:r>
+                    </a:p>
+                  </a:txBody>
+                  <a:tcPr/>
+                </a:tc>
+                <a:extLst>
+                  <a:ext uri="{0D108BD9-81ED-4DB2-BD59-A6C34878D82A}">
+                    <a16:rowId xmlns:a16="http://schemas.microsoft.com/office/drawing/2014/main" val="10000"/>
+                  </a:ext>
+                </a:extLst>
+              </a:tr>
+              <a:tr h="374922">
+                <a:tc>
+                  <a:txBody>
+                    <a:bodyPr/>
+                    <a:lstStyle/>
+                    <a:p>
+                      <a:r>
+                        <a:rPr lang="en-IN" dirty="0"/>
+                        <a:t>Delhi</a:t>
+                      </a:r>
+                    </a:p>
+                  </a:txBody>
+                  <a:tcPr/>
+                </a:tc>
+                <a:tc>
+                  <a:txBody>
+                    <a:bodyPr/>
+                    <a:lstStyle/>
+                    <a:p>
+                      <a:r>
+                        <a:rPr lang="en-IN" dirty="0"/>
+                        <a:t>Rajasthan</a:t>
+                      </a:r>
+                    </a:p>
+                  </a:txBody>
+                  <a:tcPr/>
+                </a:tc>
+                <a:tc>
+                  <a:txBody>
+                    <a:bodyPr/>
+                    <a:lstStyle/>
+                    <a:p>
+                      <a:r>
+                        <a:rPr lang="en-IN" dirty="0"/>
+                        <a:t>Paris</a:t>
+                      </a:r>
+                    </a:p>
+                  </a:txBody>
+                  <a:tcPr/>
+                </a:tc>
+                <a:extLst>
+                  <a:ext uri="{0D108BD9-81ED-4DB2-BD59-A6C34878D82A}">
+                    <a16:rowId xmlns:a16="http://schemas.microsoft.com/office/drawing/2014/main" val="10001"/>
+                  </a:ext>
+                </a:extLst>
+              </a:tr>
+              <a:tr h="374922">
+                <a:tc>
+                  <a:txBody>
+                    <a:bodyPr/>
+                    <a:lstStyle/>
+                    <a:p>
+                      <a:r>
+                        <a:rPr lang="en-IN" dirty="0"/>
+                        <a:t>Mumbai</a:t>
+                      </a:r>
+                    </a:p>
+                  </a:txBody>
+                  <a:tcPr/>
+                </a:tc>
+                <a:tc>
+                  <a:txBody>
+                    <a:bodyPr/>
+                    <a:lstStyle/>
+                    <a:p>
+                      <a:r>
+                        <a:rPr lang="en-IN" dirty="0"/>
+                        <a:t>Kerala</a:t>
+                      </a:r>
+                    </a:p>
+                  </a:txBody>
+                  <a:tcPr/>
+                </a:tc>
+                <a:tc>
+                  <a:txBody>
+                    <a:bodyPr/>
+                    <a:lstStyle/>
+                    <a:p>
+                      <a:r>
+                        <a:rPr lang="en-IN" dirty="0"/>
+                        <a:t>New York</a:t>
+                      </a:r>
+                    </a:p>
+                  </a:txBody>
+                  <a:tcPr/>
+                </a:tc>
+                <a:extLst>
+                  <a:ext uri="{0D108BD9-81ED-4DB2-BD59-A6C34878D82A}">
+                    <a16:rowId xmlns:a16="http://schemas.microsoft.com/office/drawing/2014/main" val="10002"/>
+                  </a:ext>
+                </a:extLst>
+              </a:tr>
+              <a:tr h="374922">
+                <a:tc>
+                  <a:txBody>
+                    <a:bodyPr/>
+                    <a:lstStyle/>
+                    <a:p>
+                      <a:r>
+                        <a:rPr lang="en-IN" dirty="0"/>
+                        <a:t>Chennai</a:t>
+                      </a:r>
+                    </a:p>
+                  </a:txBody>
+                  <a:tcPr/>
+                </a:tc>
+                <a:tc>
+                  <a:txBody>
+                    <a:bodyPr/>
+                    <a:lstStyle/>
+                    <a:p>
+                      <a:r>
+                        <a:rPr lang="en-IN" dirty="0"/>
+                        <a:t>Goa</a:t>
+                      </a:r>
+                    </a:p>
+                  </a:txBody>
+                  <a:tcPr/>
+                </a:tc>
+                <a:tc>
+                  <a:txBody>
+                    <a:bodyPr/>
+                    <a:lstStyle/>
+                    <a:p>
+                      <a:r>
+                        <a:rPr lang="en-IN" dirty="0"/>
+                        <a:t>London</a:t>
+                      </a:r>
+                    </a:p>
+                  </a:txBody>
+                  <a:tcPr/>
+                </a:tc>
+                <a:extLst>
+                  <a:ext uri="{0D108BD9-81ED-4DB2-BD59-A6C34878D82A}">
+                    <a16:rowId xmlns:a16="http://schemas.microsoft.com/office/drawing/2014/main" val="10003"/>
+                  </a:ext>
+                </a:extLst>
+              </a:tr>
+              <a:tr h="374922">
+                <a:tc>
+                  <a:txBody>
+                    <a:bodyPr/>
+                    <a:lstStyle/>
+                    <a:p>
+                      <a:r>
+                        <a:rPr lang="en-IN" dirty="0"/>
+                        <a:t>Kolkata</a:t>
+                      </a:r>
+                    </a:p>
+                  </a:txBody>
+                  <a:tcPr/>
+                </a:tc>
+                <a:tc>
+                  <a:txBody>
+                    <a:bodyPr/>
+                    <a:lstStyle/>
+                    <a:p>
+                      <a:r>
+                        <a:rPr lang="en-IN" dirty="0"/>
+                        <a:t>Uttarakhand</a:t>
+                      </a:r>
+                    </a:p>
+                  </a:txBody>
+                  <a:tcPr/>
+                </a:tc>
+                <a:tc>
+                  <a:txBody>
+                    <a:bodyPr/>
+                    <a:lstStyle/>
+                    <a:p>
+                      <a:r>
+                        <a:rPr lang="en-IN" dirty="0"/>
+                        <a:t>Dubai</a:t>
+                      </a:r>
+                    </a:p>
+                  </a:txBody>
+                  <a:tcPr/>
+                </a:tc>
+                <a:extLst>
+                  <a:ext uri="{0D108BD9-81ED-4DB2-BD59-A6C34878D82A}">
+                    <a16:rowId xmlns:a16="http://schemas.microsoft.com/office/drawing/2014/main" val="10004"/>
+                  </a:ext>
+                </a:extLst>
+              </a:tr>
+              <a:tr h="374922">
+                <a:tc>
+                  <a:txBody>
+                    <a:bodyPr/>
+                    <a:lstStyle/>
+                    <a:p>
+                      <a:r>
+                        <a:rPr lang="en-IN" dirty="0"/>
+                        <a:t>Hyderabad</a:t>
+                      </a:r>
+                    </a:p>
+                  </a:txBody>
+                  <a:tcPr/>
+                </a:tc>
+                <a:tc>
+                  <a:txBody>
+                    <a:bodyPr/>
+                    <a:lstStyle/>
+                    <a:p>
+                      <a:r>
+                        <a:rPr lang="en-IN" dirty="0"/>
+                        <a:t>Tamil Nadu</a:t>
+                      </a:r>
+                    </a:p>
+                  </a:txBody>
+                  <a:tcPr/>
+                </a:tc>
+                <a:tc>
+                  <a:txBody>
+                    <a:bodyPr/>
+                    <a:lstStyle/>
+                    <a:p>
+                      <a:r>
+                        <a:rPr lang="en-IN" dirty="0"/>
+                        <a:t>Rome</a:t>
+                      </a:r>
+                    </a:p>
+                  </a:txBody>
+                  <a:tcPr/>
+                </a:tc>
+                <a:extLst>
+                  <a:ext uri="{0D108BD9-81ED-4DB2-BD59-A6C34878D82A}">
+                    <a16:rowId xmlns:a16="http://schemas.microsoft.com/office/drawing/2014/main" val="10005"/>
+                  </a:ext>
+                </a:extLst>
+              </a:tr>
+              <a:tr h="187461">
+                <a:tc>
+                  <a:txBody>
+                    <a:bodyPr/>
+                    <a:lstStyle/>
+                    <a:p>
+                      <a:r>
+                        <a:rPr lang="en-IN" dirty="0"/>
+                        <a:t>Bengaluru</a:t>
+                      </a:r>
+                    </a:p>
+                  </a:txBody>
+                  <a:tcPr/>
+                </a:tc>
+                <a:tc>
+                  <a:txBody>
+                    <a:bodyPr/>
+                    <a:lstStyle/>
+                    <a:p>
+                      <a:r>
+                        <a:rPr lang="en-IN" dirty="0"/>
+                        <a:t>Karnataka</a:t>
+                      </a:r>
+                    </a:p>
+                  </a:txBody>
+                  <a:tcPr/>
+                </a:tc>
+                <a:tc>
+                  <a:txBody>
+                    <a:bodyPr/>
+                    <a:lstStyle/>
+                    <a:p>
+                      <a:r>
+                        <a:rPr lang="en-IN" dirty="0"/>
+                        <a:t>Tokyo</a:t>
+                      </a:r>
+                    </a:p>
+                  </a:txBody>
+                  <a:tcPr/>
+                </a:tc>
+                <a:extLst>
+                  <a:ext uri="{0D108BD9-81ED-4DB2-BD59-A6C34878D82A}">
+                    <a16:rowId xmlns:a16="http://schemas.microsoft.com/office/drawing/2014/main" val="10006"/>
+                  </a:ext>
+                </a:extLst>
+              </a:tr>
+              <a:tr h="187461">
+                <a:tc>
+                  <a:txBody>
+                    <a:bodyPr/>
+                    <a:lstStyle/>
+                    <a:p>
+                      <a:r>
+                        <a:rPr lang="en-IN" dirty="0"/>
+                        <a:t>Lucknow</a:t>
+                      </a:r>
+                    </a:p>
+                  </a:txBody>
+                  <a:tcPr/>
+                </a:tc>
+                <a:tc>
+                  <a:txBody>
+                    <a:bodyPr/>
+                    <a:lstStyle/>
+                    <a:p>
+                      <a:r>
+                        <a:rPr lang="en-IN" dirty="0"/>
+                        <a:t>Punjab</a:t>
+                      </a:r>
+                    </a:p>
+                  </a:txBody>
+                  <a:tcPr/>
+                </a:tc>
+                <a:tc>
+                  <a:txBody>
+                    <a:bodyPr/>
+                    <a:lstStyle/>
+                    <a:p>
+                      <a:r>
+                        <a:rPr lang="en-IN" dirty="0"/>
+                        <a:t>Sydney</a:t>
+                      </a:r>
+                    </a:p>
+                  </a:txBody>
+                  <a:tcPr/>
+                </a:tc>
+                <a:extLst>
+                  <a:ext uri="{0D108BD9-81ED-4DB2-BD59-A6C34878D82A}">
+                    <a16:rowId xmlns:a16="http://schemas.microsoft.com/office/drawing/2014/main" val="10007"/>
+                  </a:ext>
+                </a:extLst>
+              </a:tr>
+            </a:tbl>
+          </a:graphicData>
+        </a:graphic>
+      </p:graphicFrame>
+      <p:sp>
+        <p:nvSpPr>
+          <p:cNvPr id="6" name="Flowchart: Connector 5"/>
+          <p:cNvSpPr/>
+          <p:nvPr/>
+        </p:nvSpPr>
+        <p:spPr>
+          <a:xfrm>
+            <a:off x="10245271" y="5588604"/>
+            <a:ext cx="431800" cy="431800"/>
+          </a:xfrm>
+          <a:prstGeom prst="flowChartConnector">
+            <a:avLst/>
+          </a:prstGeom>
+          <a:solidFill>
+            <a:srgbClr val="F39E34"/>
+          </a:solidFill>
+          <a:ln>
+            <a:noFill/>
+          </a:ln>
+        </p:spPr>
+        <p:style>
+          <a:lnRef idx="2">
+            <a:schemeClr val="accent1">
+              <a:shade val="15000"/>
+            </a:schemeClr>
+          </a:lnRef>
+          <a:fillRef idx="1">
+            <a:schemeClr val="accent1"/>
+          </a:fillRef>
+          <a:effectRef idx="0">
+            <a:schemeClr val="accent1"/>
+          </a:effectRef>
+          <a:fontRef idx="minor">
+            <a:schemeClr val="lt1"/>
+          </a:fontRef>
+        </p:style>
+        <p:txBody>
+          <a:bodyPr rtlCol="0" anchor="ctr"/>
+          <a:lstStyle>
+            <a:defPPr>
+              <a:defRPr lang="en-US"/>
+            </a:defPPr>
+            <a:lvl1pPr marL="0" algn="l" defTabSz="914400" rtl="0" eaLnBrk="1" latinLnBrk="0" hangingPunct="1">
+              <a:defRPr sz="1800" kern="1200">
+                <a:solidFill>
+                  <a:schemeClr val="lt1"/>
+                </a:solidFill>
+                <a:latin typeface="+mn-lt"/>
+                <a:ea typeface="+mn-ea"/>
+                <a:cs typeface="+mn-cs"/>
+              </a:defRPr>
+            </a:lvl1pPr>
+            <a:lvl2pPr marL="457200" algn="l" defTabSz="914400" rtl="0" eaLnBrk="1" latinLnBrk="0" hangingPunct="1">
+              <a:defRPr sz="1800" kern="1200">
+                <a:solidFill>
+                  <a:schemeClr val="lt1"/>
+                </a:solidFill>
+                <a:latin typeface="+mn-lt"/>
+                <a:ea typeface="+mn-ea"/>
+                <a:cs typeface="+mn-cs"/>
+              </a:defRPr>
+            </a:lvl2pPr>
+            <a:lvl3pPr marL="914400" algn="l" defTabSz="914400" rtl="0" eaLnBrk="1" latinLnBrk="0" hangingPunct="1">
+              <a:defRPr sz="1800" kern="1200">
+                <a:solidFill>
+                  <a:schemeClr val="lt1"/>
+                </a:solidFill>
+                <a:latin typeface="+mn-lt"/>
+                <a:ea typeface="+mn-ea"/>
+                <a:cs typeface="+mn-cs"/>
+              </a:defRPr>
+            </a:lvl3pPr>
+            <a:lvl4pPr marL="1371600" algn="l" defTabSz="914400" rtl="0" eaLnBrk="1" latinLnBrk="0" hangingPunct="1">
+              <a:defRPr sz="1800" kern="1200">
+                <a:solidFill>
+                  <a:schemeClr val="lt1"/>
+                </a:solidFill>
+                <a:latin typeface="+mn-lt"/>
+                <a:ea typeface="+mn-ea"/>
+                <a:cs typeface="+mn-cs"/>
+              </a:defRPr>
+            </a:lvl4pPr>
+            <a:lvl5pPr marL="1828800" algn="l" defTabSz="914400" rtl="0" eaLnBrk="1" latinLnBrk="0" hangingPunct="1">
+              <a:defRPr sz="1800" kern="1200">
+                <a:solidFill>
+                  <a:schemeClr val="lt1"/>
+                </a:solidFill>
+                <a:latin typeface="+mn-lt"/>
+                <a:ea typeface="+mn-ea"/>
+                <a:cs typeface="+mn-cs"/>
+              </a:defRPr>
+            </a:lvl5pPr>
+            <a:lvl6pPr marL="2286000" algn="l" defTabSz="914400" rtl="0" eaLnBrk="1" latinLnBrk="0" hangingPunct="1">
+              <a:defRPr sz="1800" kern="1200">
+                <a:solidFill>
+                  <a:schemeClr val="lt1"/>
+                </a:solidFill>
+                <a:latin typeface="+mn-lt"/>
+                <a:ea typeface="+mn-ea"/>
+                <a:cs typeface="+mn-cs"/>
+              </a:defRPr>
+            </a:lvl6pPr>
+            <a:lvl7pPr marL="2743200" algn="l" defTabSz="914400" rtl="0" eaLnBrk="1" latinLnBrk="0" hangingPunct="1">
+              <a:defRPr sz="1800" kern="1200">
+                <a:solidFill>
+                  <a:schemeClr val="lt1"/>
+                </a:solidFill>
+                <a:latin typeface="+mn-lt"/>
+                <a:ea typeface="+mn-ea"/>
+                <a:cs typeface="+mn-cs"/>
+              </a:defRPr>
+            </a:lvl7pPr>
+            <a:lvl8pPr marL="3200400" algn="l" defTabSz="914400" rtl="0" eaLnBrk="1" latinLnBrk="0" hangingPunct="1">
+              <a:defRPr sz="1800" kern="1200">
+                <a:solidFill>
+                  <a:schemeClr val="lt1"/>
+                </a:solidFill>
+                <a:latin typeface="+mn-lt"/>
+                <a:ea typeface="+mn-ea"/>
+                <a:cs typeface="+mn-cs"/>
+              </a:defRPr>
+            </a:lvl8pPr>
+            <a:lvl9pPr marL="3657600" algn="l" defTabSz="914400" rtl="0" eaLnBrk="1" latinLnBrk="0" hangingPunct="1">
+              <a:defRPr sz="1800" kern="1200">
+                <a:solidFill>
+                  <a:schemeClr val="lt1"/>
+                </a:solidFill>
+                <a:latin typeface="+mn-lt"/>
+                <a:ea typeface="+mn-ea"/>
+                <a:cs typeface="+mn-cs"/>
+              </a:defRPr>
+            </a:lvl9pPr>
+          </a:lstStyle>
+          <a:p>
+            <a:pPr algn="ctr"/>
+            <a:endParaRPr lang="en-US"/>
+          </a:p>
+        </p:txBody>
+      </p:sp>
+      <p:sp>
+        <p:nvSpPr>
+          <p:cNvPr id="7" name="Flowchart: Connector 6"/>
+          <p:cNvSpPr/>
+          <p:nvPr/>
+        </p:nvSpPr>
+        <p:spPr>
+          <a:xfrm>
+            <a:off x="8850134" y="827796"/>
+            <a:ext cx="431800" cy="431800"/>
+          </a:xfrm>
+          <a:prstGeom prst="flowChartConnector">
+            <a:avLst/>
+          </a:prstGeom>
+          <a:solidFill>
+            <a:srgbClr val="23AAAD"/>
+          </a:solidFill>
+          <a:ln>
+            <a:noFill/>
+          </a:ln>
+        </p:spPr>
+        <p:style>
+          <a:lnRef idx="2">
+            <a:schemeClr val="accent1">
+              <a:shade val="15000"/>
+            </a:schemeClr>
+          </a:lnRef>
+          <a:fillRef idx="1">
+            <a:schemeClr val="accent1"/>
+          </a:fillRef>
+          <a:effectRef idx="0">
+            <a:schemeClr val="accent1"/>
+          </a:effectRef>
+          <a:fontRef idx="minor">
+            <a:schemeClr val="lt1"/>
+          </a:fontRef>
+        </p:style>
+        <p:txBody>
+          <a:bodyPr rtlCol="0" anchor="ctr"/>
+          <a:lstStyle/>
+          <a:p>
+            <a:pPr algn="ctr"/>
+            <a:endParaRPr lang="en-US"/>
+          </a:p>
+        </p:txBody>
+      </p:sp>
+      <p:sp>
+        <p:nvSpPr>
+          <p:cNvPr id="8" name="Flowchart: Connector 7"/>
+          <p:cNvSpPr/>
+          <p:nvPr/>
+        </p:nvSpPr>
+        <p:spPr>
+          <a:xfrm>
+            <a:off x="6892178" y="5509860"/>
+            <a:ext cx="229893" cy="229893"/>
+          </a:xfrm>
+          <a:prstGeom prst="flowChartConnector">
+            <a:avLst/>
+          </a:prstGeom>
+          <a:solidFill>
+            <a:srgbClr val="23AAAD"/>
+          </a:solidFill>
+          <a:ln>
+            <a:noFill/>
+          </a:ln>
+        </p:spPr>
+        <p:style>
+          <a:lnRef idx="2">
+            <a:schemeClr val="accent1">
+              <a:shade val="15000"/>
+            </a:schemeClr>
+          </a:lnRef>
+          <a:fillRef idx="1">
+            <a:schemeClr val="accent1"/>
+          </a:fillRef>
+          <a:effectRef idx="0">
+            <a:schemeClr val="accent1"/>
+          </a:effectRef>
+          <a:fontRef idx="minor">
+            <a:schemeClr val="lt1"/>
+          </a:fontRef>
+        </p:style>
+        <p:txBody>
+          <a:bodyPr rtlCol="0" anchor="ctr"/>
+          <a:lstStyle/>
+          <a:p>
+            <a:pPr algn="ctr"/>
+            <a:endParaRPr lang="en-US"/>
+          </a:p>
+        </p:txBody>
+      </p:sp>
+      <p:sp>
+        <p:nvSpPr>
+          <p:cNvPr id="9" name="Flowchart: Connector 8"/>
+          <p:cNvSpPr/>
+          <p:nvPr/>
+        </p:nvSpPr>
+        <p:spPr>
+          <a:xfrm>
+            <a:off x="11529492" y="3314053"/>
+            <a:ext cx="229893" cy="229893"/>
+          </a:xfrm>
+          <a:prstGeom prst="flowChartConnector">
+            <a:avLst/>
+          </a:prstGeom>
+          <a:solidFill>
+            <a:srgbClr val="23AAAD"/>
+          </a:solidFill>
+          <a:ln>
+            <a:noFill/>
+          </a:ln>
+        </p:spPr>
+        <p:style>
+          <a:lnRef idx="2">
+            <a:schemeClr val="accent1">
+              <a:shade val="15000"/>
+            </a:schemeClr>
+          </a:lnRef>
+          <a:fillRef idx="1">
+            <a:schemeClr val="accent1"/>
+          </a:fillRef>
+          <a:effectRef idx="0">
+            <a:schemeClr val="accent1"/>
+          </a:effectRef>
+          <a:fontRef idx="minor">
+            <a:schemeClr val="lt1"/>
+          </a:fontRef>
+        </p:style>
+        <p:txBody>
+          <a:bodyPr rtlCol="0" anchor="ctr"/>
+          <a:lstStyle/>
+          <a:p>
+            <a:pPr algn="ctr"/>
+            <a:endParaRPr lang="en-US"/>
+          </a:p>
+        </p:txBody>
+      </p:sp>
+      <p:grpSp>
+        <p:nvGrpSpPr>
+          <p:cNvPr id="10" name="Group 9"/>
+          <p:cNvGrpSpPr/>
+          <p:nvPr/>
+        </p:nvGrpSpPr>
+        <p:grpSpPr>
+          <a:xfrm>
+            <a:off x="232872" y="6271130"/>
+            <a:ext cx="5351499" cy="609290"/>
+            <a:chOff x="618333" y="6026099"/>
+            <a:chExt cx="4886323" cy="609290"/>
+          </a:xfrm>
+        </p:grpSpPr>
+        <p:sp>
+          <p:nvSpPr>
+            <p:cNvPr id="11" name="TextBox 10"/>
+            <p:cNvSpPr txBox="1"/>
+            <p:nvPr/>
+          </p:nvSpPr>
+          <p:spPr>
+            <a:xfrm>
+              <a:off x="1123157" y="6050614"/>
+              <a:ext cx="4381499" cy="584775"/>
+            </a:xfrm>
+            <a:prstGeom prst="rect">
+              <a:avLst/>
+            </a:prstGeom>
+            <a:noFill/>
+          </p:spPr>
+          <p:txBody>
+            <a:bodyPr wrap="square" rtlCol="0">
+              <a:spAutoFit/>
+            </a:bodyPr>
+            <a:lstStyle/>
+            <a:p>
+              <a:r>
+                <a:rPr lang="en-US" sz="1600" dirty="0">
+                  <a:solidFill>
+                    <a:srgbClr val="1B134C"/>
+                  </a:solidFill>
+                  <a:latin typeface="Poppins" panose="00000500000000000000" pitchFamily="2" charset="0"/>
+                  <a:cs typeface="Poppins" panose="00000500000000000000" pitchFamily="2" charset="0"/>
+                </a:rPr>
+                <a:t>Intelligent AI-Based Travel &amp; Tourism Planner</a:t>
+              </a:r>
+            </a:p>
+          </p:txBody>
+        </p:sp>
+        <p:pic>
+          <p:nvPicPr>
+            <p:cNvPr id="12" name="Graphic 11"/>
+            <p:cNvPicPr>
+              <a:picLocks noChangeAspect="1"/>
+            </p:cNvPicPr>
+            <p:nvPr/>
+          </p:nvPicPr>
+          <p:blipFill>
+            <a:blip r:embed="rId2">
+              <a:extLst>
+                <a:ext uri="{96DAC541-7B7A-43D3-8B79-37D633B846F1}">
+                  <asvg:svgBlip xmlns:asvg="http://schemas.microsoft.com/office/drawing/2016/SVG/main" r:embed="rId3"/>
+                </a:ext>
+              </a:extLst>
+            </a:blip>
+            <a:stretch>
+              <a:fillRect/>
+            </a:stretch>
+          </p:blipFill>
+          <p:spPr>
+            <a:xfrm>
+              <a:off x="618333" y="6026099"/>
+              <a:ext cx="353218" cy="388987"/>
+            </a:xfrm>
+            <a:prstGeom prst="rect">
+              <a:avLst/>
+            </a:prstGeom>
+          </p:spPr>
+        </p:pic>
+        <p:cxnSp>
+          <p:nvCxnSpPr>
+            <p:cNvPr id="13" name="Straight Connector 12"/>
+            <p:cNvCxnSpPr/>
+            <p:nvPr/>
+          </p:nvCxnSpPr>
+          <p:spPr>
+            <a:xfrm>
+              <a:off x="1123157" y="6026099"/>
+              <a:ext cx="0" cy="388987"/>
+            </a:xfrm>
+            <a:prstGeom prst="line">
+              <a:avLst/>
+            </a:prstGeom>
+          </p:spPr>
+          <p:style>
+            <a:lnRef idx="3">
+              <a:schemeClr val="dk1"/>
+            </a:lnRef>
+            <a:fillRef idx="0">
+              <a:schemeClr val="dk1"/>
+            </a:fillRef>
+            <a:effectRef idx="2">
+              <a:schemeClr val="dk1"/>
+            </a:effectRef>
+            <a:fontRef idx="minor">
+              <a:schemeClr val="tx1"/>
+            </a:fontRef>
+          </p:style>
+        </p:cxnSp>
+      </p:grpSp>
+    </p:spTree>
+  </p:cSld>
+  <p:clrMapOvr>
+    <a:masterClrMapping/>
+  </p:clrMapOvr>
+  <p:transition spd="slow">
+    <p:push dir="u"/>
+  </p:transition>
+</p:sld>
+</file>
+
+<file path=ppt/slides/slide11.xml><?xml version="1.0" encoding="utf-8"?>
+<p:sld xmlns:a="http://schemas.openxmlformats.org/drawingml/2006/main" xmlns:r="http://schemas.openxmlformats.org/officeDocument/2006/relationships" xmlns:p="http://schemas.openxmlformats.org/presentationml/2006/main">
+  <p:cSld>
+    <p:spTree>
+      <p:nvGrpSpPr>
+        <p:cNvPr id="1" name=""/>
+        <p:cNvGrpSpPr/>
+        <p:nvPr/>
+      </p:nvGrpSpPr>
+      <p:grpSpPr>
+        <a:xfrm>
+          <a:off x="0" y="0"/>
+          <a:ext cx="0" cy="0"/>
+          <a:chOff x="0" y="0"/>
+          <a:chExt cx="0" cy="0"/>
+        </a:xfrm>
+      </p:grpSpPr>
+      <p:sp>
+        <p:nvSpPr>
+          <p:cNvPr id="2" name="Title 1"/>
+          <p:cNvSpPr>
+            <a:spLocks noGrp="1"/>
+          </p:cNvSpPr>
+          <p:nvPr>
+            <p:ph type="title"/>
+          </p:nvPr>
+        </p:nvSpPr>
+        <p:spPr>
+          <a:xfrm>
+            <a:off x="718457" y="0"/>
+            <a:ext cx="10515600" cy="1121229"/>
+          </a:xfrm>
+        </p:spPr>
+        <p:txBody>
+          <a:bodyPr/>
+          <a:lstStyle/>
+          <a:p>
+            <a:pPr algn="ctr"/>
+            <a:r>
+              <a:rPr lang="en-US" b="1" dirty="0"/>
+              <a:t>Postman API for Output</a:t>
+            </a:r>
+            <a:endParaRPr lang="en-IN" b="1" dirty="0"/>
+          </a:p>
+        </p:txBody>
+      </p:sp>
+      <p:pic>
+        <p:nvPicPr>
+          <p:cNvPr id="5" name="Content Placeholder 4"/>
+          <p:cNvPicPr>
+            <a:picLocks noGrp="1" noChangeAspect="1"/>
+          </p:cNvPicPr>
+          <p:nvPr>
+            <p:ph idx="1"/>
+          </p:nvPr>
+        </p:nvPicPr>
+        <p:blipFill>
+          <a:blip r:embed="rId2">
             <a:extLst>
-              <a:ext uri="{FF2B5EF4-FFF2-40B4-BE49-F238E27FC236}">
-                <a16:creationId xmlns:a16="http://schemas.microsoft.com/office/drawing/2014/main" id="{DF3B983C-A218-F116-13B6-50B6510E0BB2}"/>
+              <a:ext uri="{28A0092B-C50C-407E-A947-70E740481C1C}">
+                <a14:useLocalDpi xmlns:a14="http://schemas.microsoft.com/office/drawing/2010/main" val="0"/>
               </a:ext>
             </a:extLst>
-          </p:cNvPr>
+          </a:blip>
+          <a:stretch>
+            <a:fillRect/>
+          </a:stretch>
+        </p:blipFill>
+        <p:spPr>
+          <a:xfrm>
+            <a:off x="718457" y="1367745"/>
+            <a:ext cx="5377543" cy="4351337"/>
+          </a:xfrm>
+        </p:spPr>
+      </p:pic>
+      <p:pic>
+        <p:nvPicPr>
+          <p:cNvPr id="7" name="Picture 6"/>
+          <p:cNvPicPr>
+            <a:picLocks noChangeAspect="1"/>
+          </p:cNvPicPr>
+          <p:nvPr/>
+        </p:nvPicPr>
+        <p:blipFill>
+          <a:blip r:embed="rId3">
+            <a:extLst>
+              <a:ext uri="{28A0092B-C50C-407E-A947-70E740481C1C}">
+                <a14:useLocalDpi xmlns:a14="http://schemas.microsoft.com/office/drawing/2010/main" val="0"/>
+              </a:ext>
+            </a:extLst>
+          </a:blip>
+          <a:stretch>
+            <a:fillRect/>
+          </a:stretch>
+        </p:blipFill>
+        <p:spPr>
+          <a:xfrm>
+            <a:off x="6181640" y="1405551"/>
+            <a:ext cx="5052417" cy="4313531"/>
+          </a:xfrm>
+          <a:prstGeom prst="rect">
+            <a:avLst/>
+          </a:prstGeom>
+        </p:spPr>
+      </p:pic>
+      <p:sp>
+        <p:nvSpPr>
+          <p:cNvPr id="8" name="Rectangle 7"/>
+          <p:cNvSpPr/>
+          <p:nvPr/>
+        </p:nvSpPr>
+        <p:spPr>
+          <a:xfrm>
+            <a:off x="154831" y="4263402"/>
+            <a:ext cx="542925" cy="1647826"/>
+          </a:xfrm>
+          <a:prstGeom prst="rect">
+            <a:avLst/>
+          </a:prstGeom>
+          <a:solidFill>
+            <a:srgbClr val="23AAAD"/>
+          </a:solidFill>
+          <a:ln>
+            <a:noFill/>
+          </a:ln>
+        </p:spPr>
+        <p:style>
+          <a:lnRef idx="2">
+            <a:schemeClr val="accent1">
+              <a:shade val="15000"/>
+            </a:schemeClr>
+          </a:lnRef>
+          <a:fillRef idx="1">
+            <a:schemeClr val="accent1"/>
+          </a:fillRef>
+          <a:effectRef idx="0">
+            <a:schemeClr val="accent1"/>
+          </a:effectRef>
+          <a:fontRef idx="minor">
+            <a:schemeClr val="lt1"/>
+          </a:fontRef>
+        </p:style>
+        <p:txBody>
+          <a:bodyPr rtlCol="0" anchor="ctr"/>
+          <a:lstStyle/>
+          <a:p>
+            <a:pPr algn="ctr"/>
+            <a:endParaRPr lang="en-US"/>
+          </a:p>
+        </p:txBody>
+      </p:sp>
+      <p:sp>
+        <p:nvSpPr>
+          <p:cNvPr id="9" name="Rectangle 8"/>
+          <p:cNvSpPr/>
+          <p:nvPr/>
+        </p:nvSpPr>
+        <p:spPr>
+          <a:xfrm>
+            <a:off x="11234057" y="515388"/>
+            <a:ext cx="548368" cy="1719551"/>
+          </a:xfrm>
+          <a:prstGeom prst="rect">
+            <a:avLst/>
+          </a:prstGeom>
+          <a:solidFill>
+            <a:srgbClr val="F39E34"/>
+          </a:solidFill>
+          <a:ln>
+            <a:noFill/>
+          </a:ln>
+        </p:spPr>
+        <p:style>
+          <a:lnRef idx="2">
+            <a:schemeClr val="accent1">
+              <a:shade val="15000"/>
+            </a:schemeClr>
+          </a:lnRef>
+          <a:fillRef idx="1">
+            <a:schemeClr val="accent1"/>
+          </a:fillRef>
+          <a:effectRef idx="0">
+            <a:schemeClr val="accent1"/>
+          </a:effectRef>
+          <a:fontRef idx="minor">
+            <a:schemeClr val="lt1"/>
+          </a:fontRef>
+        </p:style>
+        <p:txBody>
+          <a:bodyPr rtlCol="0" anchor="ctr"/>
+          <a:lstStyle/>
+          <a:p>
+            <a:pPr algn="ctr"/>
+            <a:endParaRPr lang="en-US"/>
+          </a:p>
+        </p:txBody>
+      </p:sp>
+      <p:grpSp>
+        <p:nvGrpSpPr>
+          <p:cNvPr id="3" name="Group 2"/>
+          <p:cNvGrpSpPr/>
+          <p:nvPr/>
+        </p:nvGrpSpPr>
+        <p:grpSpPr>
+          <a:xfrm>
+            <a:off x="232872" y="6271130"/>
+            <a:ext cx="5351499" cy="609290"/>
+            <a:chOff x="618333" y="6026099"/>
+            <a:chExt cx="4886323" cy="609290"/>
+          </a:xfrm>
+        </p:grpSpPr>
+        <p:sp>
+          <p:nvSpPr>
+            <p:cNvPr id="4" name="TextBox 3"/>
+            <p:cNvSpPr txBox="1"/>
+            <p:nvPr/>
+          </p:nvSpPr>
+          <p:spPr>
+            <a:xfrm>
+              <a:off x="1123157" y="6050614"/>
+              <a:ext cx="4381499" cy="584775"/>
+            </a:xfrm>
+            <a:prstGeom prst="rect">
+              <a:avLst/>
+            </a:prstGeom>
+            <a:noFill/>
+          </p:spPr>
+          <p:txBody>
+            <a:bodyPr wrap="square" rtlCol="0">
+              <a:spAutoFit/>
+            </a:bodyPr>
+            <a:lstStyle/>
+            <a:p>
+              <a:r>
+                <a:rPr lang="en-US" sz="1600" dirty="0">
+                  <a:solidFill>
+                    <a:srgbClr val="1B134C"/>
+                  </a:solidFill>
+                  <a:latin typeface="Poppins" panose="00000500000000000000" pitchFamily="2" charset="0"/>
+                  <a:cs typeface="Poppins" panose="00000500000000000000" pitchFamily="2" charset="0"/>
+                </a:rPr>
+                <a:t>Intelligent AI-Based Travel &amp; Tourism Planner</a:t>
+              </a:r>
+            </a:p>
+          </p:txBody>
+        </p:sp>
+        <p:pic>
+          <p:nvPicPr>
+            <p:cNvPr id="6" name="Graphic 5"/>
+            <p:cNvPicPr>
+              <a:picLocks noChangeAspect="1"/>
+            </p:cNvPicPr>
+            <p:nvPr/>
+          </p:nvPicPr>
+          <p:blipFill>
+            <a:blip r:embed="rId4">
+              <a:extLst>
+                <a:ext uri="{96DAC541-7B7A-43D3-8B79-37D633B846F1}">
+                  <asvg:svgBlip xmlns:asvg="http://schemas.microsoft.com/office/drawing/2016/SVG/main" r:embed="rId5"/>
+                </a:ext>
+              </a:extLst>
+            </a:blip>
+            <a:stretch>
+              <a:fillRect/>
+            </a:stretch>
+          </p:blipFill>
+          <p:spPr>
+            <a:xfrm>
+              <a:off x="618333" y="6026099"/>
+              <a:ext cx="353218" cy="388987"/>
+            </a:xfrm>
+            <a:prstGeom prst="rect">
+              <a:avLst/>
+            </a:prstGeom>
+          </p:spPr>
+        </p:pic>
+        <p:cxnSp>
+          <p:nvCxnSpPr>
+            <p:cNvPr id="10" name="Straight Connector 9"/>
+            <p:cNvCxnSpPr/>
+            <p:nvPr/>
+          </p:nvCxnSpPr>
+          <p:spPr>
+            <a:xfrm>
+              <a:off x="1123157" y="6026099"/>
+              <a:ext cx="0" cy="388987"/>
+            </a:xfrm>
+            <a:prstGeom prst="line">
+              <a:avLst/>
+            </a:prstGeom>
+          </p:spPr>
+          <p:style>
+            <a:lnRef idx="3">
+              <a:schemeClr val="dk1"/>
+            </a:lnRef>
+            <a:fillRef idx="0">
+              <a:schemeClr val="dk1"/>
+            </a:fillRef>
+            <a:effectRef idx="2">
+              <a:schemeClr val="dk1"/>
+            </a:effectRef>
+            <a:fontRef idx="minor">
+              <a:schemeClr val="tx1"/>
+            </a:fontRef>
+          </p:style>
+        </p:cxnSp>
+      </p:grpSp>
+    </p:spTree>
+  </p:cSld>
+  <p:clrMapOvr>
+    <a:masterClrMapping/>
+  </p:clrMapOvr>
+  <p:transition spd="slow">
+    <p:push dir="u"/>
+  </p:transition>
+</p:sld>
+</file>
+
+<file path=ppt/slides/slide12.xml><?xml version="1.0" encoding="utf-8"?>
+<p:sld xmlns:a="http://schemas.openxmlformats.org/drawingml/2006/main" xmlns:r="http://schemas.openxmlformats.org/officeDocument/2006/relationships" xmlns:p="http://schemas.openxmlformats.org/presentationml/2006/main">
+  <p:cSld>
+    <p:spTree>
+      <p:nvGrpSpPr>
+        <p:cNvPr id="1" name=""/>
+        <p:cNvGrpSpPr/>
+        <p:nvPr/>
+      </p:nvGrpSpPr>
+      <p:grpSpPr>
+        <a:xfrm>
+          <a:off x="0" y="0"/>
+          <a:ext cx="0" cy="0"/>
+          <a:chOff x="0" y="0"/>
+          <a:chExt cx="0" cy="0"/>
+        </a:xfrm>
+      </p:grpSpPr>
+      <p:sp>
+        <p:nvSpPr>
+          <p:cNvPr id="2" name="Title 1"/>
           <p:cNvSpPr>
             <a:spLocks noGrp="1"/>
           </p:cNvSpPr>
@@ -5314,13 +5473,7 @@
       </p:sp>
       <p:sp>
         <p:nvSpPr>
-          <p:cNvPr id="3" name="Content Placeholder 2">
-            <a:extLst>
-              <a:ext uri="{FF2B5EF4-FFF2-40B4-BE49-F238E27FC236}">
-                <a16:creationId xmlns:a16="http://schemas.microsoft.com/office/drawing/2014/main" id="{4C7A5670-39A9-04DA-8F90-5028DF7C31A5}"/>
-              </a:ext>
-            </a:extLst>
-          </p:cNvPr>
+          <p:cNvPr id="3" name="Content Placeholder 2"/>
           <p:cNvSpPr>
             <a:spLocks noGrp="1"/>
           </p:cNvSpPr>
@@ -5395,13 +5548,7 @@
       </p:sp>
       <p:pic>
         <p:nvPicPr>
-          <p:cNvPr id="2050" name="Picture 2" descr="What is MongoDB? NoSQL database explained in an easy way.">
-            <a:extLst>
-              <a:ext uri="{FF2B5EF4-FFF2-40B4-BE49-F238E27FC236}">
-                <a16:creationId xmlns:a16="http://schemas.microsoft.com/office/drawing/2014/main" id="{B7A480FD-0A7F-D43C-848D-E2D8D0E25FE4}"/>
-              </a:ext>
-            </a:extLst>
-          </p:cNvPr>
+          <p:cNvPr id="2050" name="Picture 2" descr="What is MongoDB? NoSQL database explained in an easy way."/>
           <p:cNvPicPr>
             <a:picLocks noChangeAspect="1" noChangeArrowheads="1"/>
           </p:cNvPicPr>
@@ -5440,12 +5587,117 @@
           </a:extLst>
         </p:spPr>
       </p:pic>
+      <p:grpSp>
+        <p:nvGrpSpPr>
+          <p:cNvPr id="4" name="Group 3"/>
+          <p:cNvGrpSpPr/>
+          <p:nvPr/>
+        </p:nvGrpSpPr>
+        <p:grpSpPr>
+          <a:xfrm>
+            <a:off x="232872" y="6271130"/>
+            <a:ext cx="5351499" cy="609290"/>
+            <a:chOff x="618333" y="6026099"/>
+            <a:chExt cx="4886323" cy="609290"/>
+          </a:xfrm>
+        </p:grpSpPr>
+        <p:sp>
+          <p:nvSpPr>
+            <p:cNvPr id="5" name="TextBox 4"/>
+            <p:cNvSpPr txBox="1"/>
+            <p:nvPr/>
+          </p:nvSpPr>
+          <p:spPr>
+            <a:xfrm>
+              <a:off x="1123157" y="6050614"/>
+              <a:ext cx="4381499" cy="584775"/>
+            </a:xfrm>
+            <a:prstGeom prst="rect">
+              <a:avLst/>
+            </a:prstGeom>
+            <a:noFill/>
+          </p:spPr>
+          <p:txBody>
+            <a:bodyPr wrap="square" rtlCol="0">
+              <a:spAutoFit/>
+            </a:bodyPr>
+            <a:lstStyle/>
+            <a:p>
+              <a:r>
+                <a:rPr lang="en-US" sz="1600" dirty="0">
+                  <a:solidFill>
+                    <a:srgbClr val="1B134C"/>
+                  </a:solidFill>
+                  <a:latin typeface="Poppins" panose="00000500000000000000" pitchFamily="2" charset="0"/>
+                  <a:cs typeface="Poppins" panose="00000500000000000000" pitchFamily="2" charset="0"/>
+                </a:rPr>
+                <a:t>Intelligent AI-Based Travel &amp; Tourism Planner</a:t>
+              </a:r>
+            </a:p>
+          </p:txBody>
+        </p:sp>
+        <p:pic>
+          <p:nvPicPr>
+            <p:cNvPr id="6" name="Graphic 5"/>
+            <p:cNvPicPr>
+              <a:picLocks noChangeAspect="1"/>
+            </p:cNvPicPr>
+            <p:nvPr/>
+          </p:nvPicPr>
+          <p:blipFill>
+            <a:blip r:embed="rId3">
+              <a:extLst>
+                <a:ext uri="{96DAC541-7B7A-43D3-8B79-37D633B846F1}">
+                  <asvg:svgBlip xmlns:asvg="http://schemas.microsoft.com/office/drawing/2016/SVG/main" r:embed="rId4"/>
+                </a:ext>
+              </a:extLst>
+            </a:blip>
+            <a:stretch>
+              <a:fillRect/>
+            </a:stretch>
+          </p:blipFill>
+          <p:spPr>
+            <a:xfrm>
+              <a:off x="618333" y="6026099"/>
+              <a:ext cx="353218" cy="388987"/>
+            </a:xfrm>
+            <a:prstGeom prst="rect">
+              <a:avLst/>
+            </a:prstGeom>
+          </p:spPr>
+        </p:pic>
+        <p:cxnSp>
+          <p:nvCxnSpPr>
+            <p:cNvPr id="7" name="Straight Connector 6"/>
+            <p:cNvCxnSpPr/>
+            <p:nvPr/>
+          </p:nvCxnSpPr>
+          <p:spPr>
+            <a:xfrm>
+              <a:off x="1123157" y="6026099"/>
+              <a:ext cx="0" cy="388987"/>
+            </a:xfrm>
+            <a:prstGeom prst="line">
+              <a:avLst/>
+            </a:prstGeom>
+          </p:spPr>
+          <p:style>
+            <a:lnRef idx="3">
+              <a:schemeClr val="dk1"/>
+            </a:lnRef>
+            <a:fillRef idx="0">
+              <a:schemeClr val="dk1"/>
+            </a:fillRef>
+            <a:effectRef idx="2">
+              <a:schemeClr val="dk1"/>
+            </a:effectRef>
+            <a:fontRef idx="minor">
+              <a:schemeClr val="tx1"/>
+            </a:fontRef>
+          </p:style>
+        </p:cxnSp>
+      </p:grpSp>
     </p:spTree>
-    <p:extLst>
-      <p:ext uri="{BB962C8B-B14F-4D97-AF65-F5344CB8AC3E}">
-        <p14:creationId xmlns:p14="http://schemas.microsoft.com/office/powerpoint/2010/main" val="1888458327"/>
-      </p:ext>
-    </p:extLst>
   </p:cSld>
   <p:clrMapOvr>
     <a:masterClrMapping/>
@@ -5539,18 +5791,12 @@
 </p:sld>
 </file>
 
-<file path=ppt/slides/slide11.xml><?xml version="1.0" encoding="utf-8"?>
+<file path=ppt/slides/slide13.xml><?xml version="1.0" encoding="utf-8"?>
 <p:sld xmlns:a="http://schemas.openxmlformats.org/drawingml/2006/main" xmlns:r="http://schemas.openxmlformats.org/officeDocument/2006/relationships" xmlns:p="http://schemas.openxmlformats.org/presentationml/2006/main">
   <p:cSld>
     <p:spTree>
       <p:nvGrpSpPr>
-        <p:cNvPr id="1" name="">
-          <a:extLst>
-            <a:ext uri="{FF2B5EF4-FFF2-40B4-BE49-F238E27FC236}">
-              <a16:creationId xmlns:a16="http://schemas.microsoft.com/office/drawing/2014/main" id="{346C5D6E-75BE-3BF8-DDFF-AEFFFAB726E9}"/>
-            </a:ext>
-          </a:extLst>
-        </p:cNvPr>
+        <p:cNvPr id="1" name=""/>
         <p:cNvGrpSpPr/>
         <p:nvPr/>
       </p:nvGrpSpPr>
@@ -5564,13 +5810,7 @@
       </p:grpSpPr>
       <p:sp>
         <p:nvSpPr>
-          <p:cNvPr id="5" name="Rectangle 4">
-            <a:extLst>
-              <a:ext uri="{FF2B5EF4-FFF2-40B4-BE49-F238E27FC236}">
-                <a16:creationId xmlns:a16="http://schemas.microsoft.com/office/drawing/2014/main" id="{D57251C9-50E1-D6E7-1A31-0100DAF93BD5}"/>
-              </a:ext>
-            </a:extLst>
-          </p:cNvPr>
+          <p:cNvPr id="5" name="Rectangle 4"/>
           <p:cNvSpPr/>
           <p:nvPr/>
         </p:nvSpPr>
@@ -5616,13 +5856,7 @@
       </p:sp>
       <p:grpSp>
         <p:nvGrpSpPr>
-          <p:cNvPr id="19" name="Group 18">
-            <a:extLst>
-              <a:ext uri="{FF2B5EF4-FFF2-40B4-BE49-F238E27FC236}">
-                <a16:creationId xmlns:a16="http://schemas.microsoft.com/office/drawing/2014/main" id="{5337761C-828E-FF7C-E1DA-E59A8E2AF68F}"/>
-              </a:ext>
-            </a:extLst>
-          </p:cNvPr>
+          <p:cNvPr id="19" name="Group 18"/>
           <p:cNvGrpSpPr/>
           <p:nvPr/>
         </p:nvGrpSpPr>
@@ -5636,13 +5870,7 @@
         </p:grpSpPr>
         <p:sp>
           <p:nvSpPr>
-            <p:cNvPr id="6" name="TextBox 5">
-              <a:extLst>
-                <a:ext uri="{FF2B5EF4-FFF2-40B4-BE49-F238E27FC236}">
-                  <a16:creationId xmlns:a16="http://schemas.microsoft.com/office/drawing/2014/main" id="{7B643686-7E6A-4CFC-EB4B-F0BC1CE50BFB}"/>
-                </a:ext>
-              </a:extLst>
-            </p:cNvPr>
+            <p:cNvPr id="6" name="TextBox 5"/>
             <p:cNvSpPr txBox="1"/>
             <p:nvPr/>
           </p:nvSpPr>
@@ -5678,13 +5906,7 @@
         </p:sp>
         <p:pic>
           <p:nvPicPr>
-            <p:cNvPr id="8" name="Graphic 7">
-              <a:extLst>
-                <a:ext uri="{FF2B5EF4-FFF2-40B4-BE49-F238E27FC236}">
-                  <a16:creationId xmlns:a16="http://schemas.microsoft.com/office/drawing/2014/main" id="{DB8019E4-3052-E355-AC05-A6B236742CB6}"/>
-                </a:ext>
-              </a:extLst>
-            </p:cNvPr>
+            <p:cNvPr id="8" name="Graphic 7"/>
             <p:cNvPicPr>
               <a:picLocks noChangeAspect="1"/>
             </p:cNvPicPr>
@@ -5714,13 +5936,7 @@
         </p:pic>
         <p:cxnSp>
           <p:nvCxnSpPr>
-            <p:cNvPr id="10" name="Straight Connector 9">
-              <a:extLst>
-                <a:ext uri="{FF2B5EF4-FFF2-40B4-BE49-F238E27FC236}">
-                  <a16:creationId xmlns:a16="http://schemas.microsoft.com/office/drawing/2014/main" id="{0EA24FC2-CF6A-5B4D-1C5F-4C0CC5ABE0AB}"/>
-                </a:ext>
-              </a:extLst>
-            </p:cNvPr>
+            <p:cNvPr id="10" name="Straight Connector 9"/>
             <p:cNvCxnSpPr/>
             <p:nvPr/>
           </p:nvCxnSpPr>
@@ -5751,13 +5967,7 @@
       </p:grpSp>
       <p:sp>
         <p:nvSpPr>
-          <p:cNvPr id="41" name="Freeform: Shape 40">
-            <a:extLst>
-              <a:ext uri="{FF2B5EF4-FFF2-40B4-BE49-F238E27FC236}">
-                <a16:creationId xmlns:a16="http://schemas.microsoft.com/office/drawing/2014/main" id="{B025B9C4-F752-BA55-ED61-374A73D75A56}"/>
-              </a:ext>
-            </a:extLst>
-          </p:cNvPr>
+          <p:cNvPr id="41" name="Freeform: Shape 40"/>
           <p:cNvSpPr/>
           <p:nvPr/>
         </p:nvSpPr>
@@ -5842,13 +6052,7 @@
       </p:sp>
       <p:sp>
         <p:nvSpPr>
-          <p:cNvPr id="40" name="Freeform: Shape 39">
-            <a:extLst>
-              <a:ext uri="{FF2B5EF4-FFF2-40B4-BE49-F238E27FC236}">
-                <a16:creationId xmlns:a16="http://schemas.microsoft.com/office/drawing/2014/main" id="{C0F69D18-CE50-461C-EEC6-410F6DE31B4A}"/>
-              </a:ext>
-            </a:extLst>
-          </p:cNvPr>
+          <p:cNvPr id="40" name="Freeform: Shape 39"/>
           <p:cNvSpPr/>
           <p:nvPr/>
         </p:nvSpPr>
@@ -5933,13 +6137,7 @@
       </p:sp>
       <p:grpSp>
         <p:nvGrpSpPr>
-          <p:cNvPr id="50" name="Group 49">
-            <a:extLst>
-              <a:ext uri="{FF2B5EF4-FFF2-40B4-BE49-F238E27FC236}">
-                <a16:creationId xmlns:a16="http://schemas.microsoft.com/office/drawing/2014/main" id="{CFE93AAB-0163-5C78-D1FF-50980A9FA6C6}"/>
-              </a:ext>
-            </a:extLst>
-          </p:cNvPr>
+          <p:cNvPr id="50" name="Group 49"/>
           <p:cNvGrpSpPr/>
           <p:nvPr/>
         </p:nvGrpSpPr>
@@ -5960,13 +6158,7 @@
         </p:grpSpPr>
         <p:sp>
           <p:nvSpPr>
-            <p:cNvPr id="49" name="Freeform: Shape 48">
-              <a:extLst>
-                <a:ext uri="{FF2B5EF4-FFF2-40B4-BE49-F238E27FC236}">
-                  <a16:creationId xmlns:a16="http://schemas.microsoft.com/office/drawing/2014/main" id="{B330C967-4D19-8854-47DB-D03D3DD7FC8C}"/>
-                </a:ext>
-              </a:extLst>
-            </p:cNvPr>
+            <p:cNvPr id="49" name="Freeform: Shape 48"/>
             <p:cNvSpPr/>
             <p:nvPr/>
           </p:nvSpPr>
@@ -6096,13 +6288,7 @@
         </p:sp>
         <p:sp>
           <p:nvSpPr>
-            <p:cNvPr id="47" name="Freeform: Shape 46">
-              <a:extLst>
-                <a:ext uri="{FF2B5EF4-FFF2-40B4-BE49-F238E27FC236}">
-                  <a16:creationId xmlns:a16="http://schemas.microsoft.com/office/drawing/2014/main" id="{28B0CF06-1611-0CF2-0977-55819630611E}"/>
-                </a:ext>
-              </a:extLst>
-            </p:cNvPr>
+            <p:cNvPr id="47" name="Freeform: Shape 46"/>
             <p:cNvSpPr/>
             <p:nvPr/>
           </p:nvSpPr>
@@ -6225,13 +6411,7 @@
       </p:grpSp>
       <p:grpSp>
         <p:nvGrpSpPr>
-          <p:cNvPr id="51" name="Group 50">
-            <a:extLst>
-              <a:ext uri="{FF2B5EF4-FFF2-40B4-BE49-F238E27FC236}">
-                <a16:creationId xmlns:a16="http://schemas.microsoft.com/office/drawing/2014/main" id="{9170B5B3-E78A-68DB-29C3-5DDAE0811204}"/>
-              </a:ext>
-            </a:extLst>
-          </p:cNvPr>
+          <p:cNvPr id="51" name="Group 50"/>
           <p:cNvGrpSpPr/>
           <p:nvPr/>
         </p:nvGrpSpPr>
@@ -6252,13 +6432,7 @@
         </p:grpSpPr>
         <p:sp>
           <p:nvSpPr>
-            <p:cNvPr id="52" name="Freeform: Shape 51">
-              <a:extLst>
-                <a:ext uri="{FF2B5EF4-FFF2-40B4-BE49-F238E27FC236}">
-                  <a16:creationId xmlns:a16="http://schemas.microsoft.com/office/drawing/2014/main" id="{5763A57D-B6C7-3F71-5156-01EEBFC9D14E}"/>
-                </a:ext>
-              </a:extLst>
-            </p:cNvPr>
+            <p:cNvPr id="52" name="Freeform: Shape 51"/>
             <p:cNvSpPr/>
             <p:nvPr/>
           </p:nvSpPr>
@@ -6391,13 +6565,7 @@
         </p:sp>
         <p:sp>
           <p:nvSpPr>
-            <p:cNvPr id="53" name="Freeform: Shape 52">
-              <a:extLst>
-                <a:ext uri="{FF2B5EF4-FFF2-40B4-BE49-F238E27FC236}">
-                  <a16:creationId xmlns:a16="http://schemas.microsoft.com/office/drawing/2014/main" id="{44A792B2-F3A3-9F41-9961-8645B034BFE3}"/>
-                </a:ext>
-              </a:extLst>
-            </p:cNvPr>
+            <p:cNvPr id="53" name="Freeform: Shape 52"/>
             <p:cNvSpPr/>
             <p:nvPr/>
           </p:nvSpPr>
@@ -6520,13 +6688,7 @@
       </p:grpSp>
       <p:grpSp>
         <p:nvGrpSpPr>
-          <p:cNvPr id="54" name="Group 53">
-            <a:extLst>
-              <a:ext uri="{FF2B5EF4-FFF2-40B4-BE49-F238E27FC236}">
-                <a16:creationId xmlns:a16="http://schemas.microsoft.com/office/drawing/2014/main" id="{89274B3A-155E-BC4B-7AFA-D7167A86EF15}"/>
-              </a:ext>
-            </a:extLst>
-          </p:cNvPr>
+          <p:cNvPr id="54" name="Group 53"/>
           <p:cNvGrpSpPr/>
           <p:nvPr/>
         </p:nvGrpSpPr>
@@ -6547,13 +6709,7 @@
         </p:grpSpPr>
         <p:sp>
           <p:nvSpPr>
-            <p:cNvPr id="55" name="Freeform: Shape 54">
-              <a:extLst>
-                <a:ext uri="{FF2B5EF4-FFF2-40B4-BE49-F238E27FC236}">
-                  <a16:creationId xmlns:a16="http://schemas.microsoft.com/office/drawing/2014/main" id="{4A111B67-CEBA-663B-DE52-503958A94B0C}"/>
-                </a:ext>
-              </a:extLst>
-            </p:cNvPr>
+            <p:cNvPr id="55" name="Freeform: Shape 54"/>
             <p:cNvSpPr/>
             <p:nvPr/>
           </p:nvSpPr>
@@ -6683,13 +6839,7 @@
         </p:sp>
         <p:sp>
           <p:nvSpPr>
-            <p:cNvPr id="56" name="Freeform: Shape 55">
-              <a:extLst>
-                <a:ext uri="{FF2B5EF4-FFF2-40B4-BE49-F238E27FC236}">
-                  <a16:creationId xmlns:a16="http://schemas.microsoft.com/office/drawing/2014/main" id="{9F847131-1D3F-2F12-606C-CED38765223C}"/>
-                </a:ext>
-              </a:extLst>
-            </p:cNvPr>
+            <p:cNvPr id="56" name="Freeform: Shape 55"/>
             <p:cNvSpPr/>
             <p:nvPr/>
           </p:nvSpPr>
@@ -6812,13 +6962,7 @@
       </p:grpSp>
       <p:grpSp>
         <p:nvGrpSpPr>
-          <p:cNvPr id="57" name="Group 56">
-            <a:extLst>
-              <a:ext uri="{FF2B5EF4-FFF2-40B4-BE49-F238E27FC236}">
-                <a16:creationId xmlns:a16="http://schemas.microsoft.com/office/drawing/2014/main" id="{B8D3825E-5970-7586-D169-878B8B1E9337}"/>
-              </a:ext>
-            </a:extLst>
-          </p:cNvPr>
+          <p:cNvPr id="57" name="Group 56"/>
           <p:cNvGrpSpPr/>
           <p:nvPr/>
         </p:nvGrpSpPr>
@@ -6839,13 +6983,7 @@
         </p:grpSpPr>
         <p:sp>
           <p:nvSpPr>
-            <p:cNvPr id="58" name="Freeform: Shape 57">
-              <a:extLst>
-                <a:ext uri="{FF2B5EF4-FFF2-40B4-BE49-F238E27FC236}">
-                  <a16:creationId xmlns:a16="http://schemas.microsoft.com/office/drawing/2014/main" id="{05F071A6-D31F-30D0-23FE-D95995CEC580}"/>
-                </a:ext>
-              </a:extLst>
-            </p:cNvPr>
+            <p:cNvPr id="58" name="Freeform: Shape 57"/>
             <p:cNvSpPr/>
             <p:nvPr/>
           </p:nvSpPr>
@@ -6977,13 +7115,7 @@
         </p:sp>
         <p:sp>
           <p:nvSpPr>
-            <p:cNvPr id="59" name="Freeform: Shape 58">
-              <a:extLst>
-                <a:ext uri="{FF2B5EF4-FFF2-40B4-BE49-F238E27FC236}">
-                  <a16:creationId xmlns:a16="http://schemas.microsoft.com/office/drawing/2014/main" id="{7A87F852-C757-24CC-AA21-E7BA41C98329}"/>
-                </a:ext>
-              </a:extLst>
-            </p:cNvPr>
+            <p:cNvPr id="59" name="Freeform: Shape 58"/>
             <p:cNvSpPr/>
             <p:nvPr/>
           </p:nvSpPr>
@@ -7103,13 +7235,7 @@
       </p:grpSp>
       <p:grpSp>
         <p:nvGrpSpPr>
-          <p:cNvPr id="60" name="Group 59">
-            <a:extLst>
-              <a:ext uri="{FF2B5EF4-FFF2-40B4-BE49-F238E27FC236}">
-                <a16:creationId xmlns:a16="http://schemas.microsoft.com/office/drawing/2014/main" id="{A29CD33C-9C40-C210-295F-0604F8C284B8}"/>
-              </a:ext>
-            </a:extLst>
-          </p:cNvPr>
+          <p:cNvPr id="60" name="Group 59"/>
           <p:cNvGrpSpPr/>
           <p:nvPr/>
         </p:nvGrpSpPr>
@@ -7130,13 +7256,7 @@
         </p:grpSpPr>
         <p:sp>
           <p:nvSpPr>
-            <p:cNvPr id="61" name="Freeform: Shape 60">
-              <a:extLst>
-                <a:ext uri="{FF2B5EF4-FFF2-40B4-BE49-F238E27FC236}">
-                  <a16:creationId xmlns:a16="http://schemas.microsoft.com/office/drawing/2014/main" id="{F6F1AA71-4177-BBFC-A5A1-877AC3813B10}"/>
-                </a:ext>
-              </a:extLst>
-            </p:cNvPr>
+            <p:cNvPr id="61" name="Freeform: Shape 60"/>
             <p:cNvSpPr/>
             <p:nvPr/>
           </p:nvSpPr>
@@ -7269,13 +7389,7 @@
         </p:sp>
         <p:sp>
           <p:nvSpPr>
-            <p:cNvPr id="62" name="Freeform: Shape 61">
-              <a:extLst>
-                <a:ext uri="{FF2B5EF4-FFF2-40B4-BE49-F238E27FC236}">
-                  <a16:creationId xmlns:a16="http://schemas.microsoft.com/office/drawing/2014/main" id="{B0363FB3-422E-92EB-8940-F50659E63D89}"/>
-                </a:ext>
-              </a:extLst>
-            </p:cNvPr>
+            <p:cNvPr id="62" name="Freeform: Shape 61"/>
             <p:cNvSpPr/>
             <p:nvPr/>
           </p:nvSpPr>
@@ -7400,13 +7514,7 @@
       </p:grpSp>
       <p:sp>
         <p:nvSpPr>
-          <p:cNvPr id="2" name="Rectangle 1">
-            <a:extLst>
-              <a:ext uri="{FF2B5EF4-FFF2-40B4-BE49-F238E27FC236}">
-                <a16:creationId xmlns:a16="http://schemas.microsoft.com/office/drawing/2014/main" id="{DF0E701E-3D6D-38C1-7DFA-654042AB9D10}"/>
-              </a:ext>
-            </a:extLst>
-          </p:cNvPr>
+          <p:cNvPr id="2" name="Rectangle 1"/>
           <p:cNvSpPr/>
           <p:nvPr/>
         </p:nvSpPr>
@@ -7452,13 +7560,7 @@
       </p:sp>
       <p:sp>
         <p:nvSpPr>
-          <p:cNvPr id="3" name="Rectangle 2">
-            <a:extLst>
-              <a:ext uri="{FF2B5EF4-FFF2-40B4-BE49-F238E27FC236}">
-                <a16:creationId xmlns:a16="http://schemas.microsoft.com/office/drawing/2014/main" id="{D8A9E3CD-4890-C761-7EF3-BC07A124DB59}"/>
-              </a:ext>
-            </a:extLst>
-          </p:cNvPr>
+          <p:cNvPr id="3" name="Rectangle 2"/>
           <p:cNvSpPr/>
           <p:nvPr/>
         </p:nvSpPr>
@@ -7504,13 +7606,7 @@
       </p:sp>
       <p:grpSp>
         <p:nvGrpSpPr>
-          <p:cNvPr id="4" name="Group 3">
-            <a:extLst>
-              <a:ext uri="{FF2B5EF4-FFF2-40B4-BE49-F238E27FC236}">
-                <a16:creationId xmlns:a16="http://schemas.microsoft.com/office/drawing/2014/main" id="{4D9EB030-96F4-E76F-BEF1-F353A097F930}"/>
-              </a:ext>
-            </a:extLst>
-          </p:cNvPr>
+          <p:cNvPr id="4" name="Group 3"/>
           <p:cNvGrpSpPr/>
           <p:nvPr/>
         </p:nvGrpSpPr>
@@ -7524,13 +7620,7 @@
         </p:grpSpPr>
         <p:sp>
           <p:nvSpPr>
-            <p:cNvPr id="7" name="TextBox 6">
-              <a:extLst>
-                <a:ext uri="{FF2B5EF4-FFF2-40B4-BE49-F238E27FC236}">
-                  <a16:creationId xmlns:a16="http://schemas.microsoft.com/office/drawing/2014/main" id="{08A3BD9E-E391-A89B-20A1-62234D793C11}"/>
-                </a:ext>
-              </a:extLst>
-            </p:cNvPr>
+            <p:cNvPr id="7" name="TextBox 6"/>
             <p:cNvSpPr txBox="1"/>
             <p:nvPr/>
           </p:nvSpPr>
@@ -7565,13 +7655,7 @@
         </p:sp>
         <p:pic>
           <p:nvPicPr>
-            <p:cNvPr id="9" name="Graphic 8">
-              <a:extLst>
-                <a:ext uri="{FF2B5EF4-FFF2-40B4-BE49-F238E27FC236}">
-                  <a16:creationId xmlns:a16="http://schemas.microsoft.com/office/drawing/2014/main" id="{C0327753-4E27-C8BE-14C2-5A6F5ACF04E3}"/>
-                </a:ext>
-              </a:extLst>
-            </p:cNvPr>
+            <p:cNvPr id="9" name="Graphic 8"/>
             <p:cNvPicPr>
               <a:picLocks noChangeAspect="1"/>
             </p:cNvPicPr>
@@ -7601,13 +7685,7 @@
         </p:pic>
         <p:cxnSp>
           <p:nvCxnSpPr>
-            <p:cNvPr id="11" name="Straight Connector 10">
-              <a:extLst>
-                <a:ext uri="{FF2B5EF4-FFF2-40B4-BE49-F238E27FC236}">
-                  <a16:creationId xmlns:a16="http://schemas.microsoft.com/office/drawing/2014/main" id="{BFF5B82F-7C17-DA7E-3A39-077A0CC5D3F8}"/>
-                </a:ext>
-              </a:extLst>
-            </p:cNvPr>
+            <p:cNvPr id="11" name="Straight Connector 10"/>
             <p:cNvCxnSpPr/>
             <p:nvPr/>
           </p:nvCxnSpPr>
@@ -7638,13 +7716,7 @@
       </p:grpSp>
       <p:sp>
         <p:nvSpPr>
-          <p:cNvPr id="13" name="TextBox 12">
-            <a:extLst>
-              <a:ext uri="{FF2B5EF4-FFF2-40B4-BE49-F238E27FC236}">
-                <a16:creationId xmlns:a16="http://schemas.microsoft.com/office/drawing/2014/main" id="{E33DB1AA-A2DE-4F06-2CE2-0043DF3BA52F}"/>
-              </a:ext>
-            </a:extLst>
-          </p:cNvPr>
+          <p:cNvPr id="13" name="TextBox 12"/>
           <p:cNvSpPr txBox="1"/>
           <p:nvPr/>
         </p:nvSpPr>
@@ -7710,13 +7782,7 @@
       </p:sp>
       <p:sp>
         <p:nvSpPr>
-          <p:cNvPr id="15" name="TextBox 14">
-            <a:extLst>
-              <a:ext uri="{FF2B5EF4-FFF2-40B4-BE49-F238E27FC236}">
-                <a16:creationId xmlns:a16="http://schemas.microsoft.com/office/drawing/2014/main" id="{1C2C4FC8-70ED-BACE-8888-01BEF54A7A46}"/>
-              </a:ext>
-            </a:extLst>
-          </p:cNvPr>
+          <p:cNvPr id="15" name="TextBox 14"/>
           <p:cNvSpPr txBox="1"/>
           <p:nvPr/>
         </p:nvSpPr>
@@ -7751,19 +7817,13 @@
       </p:sp>
       <p:sp>
         <p:nvSpPr>
-          <p:cNvPr id="12" name="TextBox 11">
-            <a:extLst>
-              <a:ext uri="{FF2B5EF4-FFF2-40B4-BE49-F238E27FC236}">
-                <a16:creationId xmlns:a16="http://schemas.microsoft.com/office/drawing/2014/main" id="{0E95A215-E21F-9162-FB59-18F8EF0E7A1F}"/>
-              </a:ext>
-            </a:extLst>
-          </p:cNvPr>
+          <p:cNvPr id="12" name="TextBox 11"/>
           <p:cNvSpPr txBox="1"/>
           <p:nvPr/>
         </p:nvSpPr>
         <p:spPr>
-          <a:xfrm rot="1540776">
-            <a:off x="1439079" y="1354127"/>
+          <a:xfrm rot="300000">
+            <a:off x="905679" y="2325042"/>
             <a:ext cx="892629" cy="461665"/>
           </a:xfrm>
           <a:prstGeom prst="rect">
@@ -7787,19 +7847,13 @@
       </p:sp>
       <p:sp>
         <p:nvSpPr>
-          <p:cNvPr id="14" name="TextBox 13">
-            <a:extLst>
-              <a:ext uri="{FF2B5EF4-FFF2-40B4-BE49-F238E27FC236}">
-                <a16:creationId xmlns:a16="http://schemas.microsoft.com/office/drawing/2014/main" id="{66AE3CCC-3F38-C458-5060-27C0194C4E5D}"/>
-              </a:ext>
-            </a:extLst>
-          </p:cNvPr>
+          <p:cNvPr id="14" name="TextBox 13"/>
           <p:cNvSpPr txBox="1"/>
           <p:nvPr/>
         </p:nvSpPr>
         <p:spPr>
-          <a:xfrm rot="1167068">
-            <a:off x="3491165" y="1955953"/>
+          <a:xfrm rot="21202275">
+            <a:off x="3309970" y="3032028"/>
             <a:ext cx="1185902" cy="461665"/>
           </a:xfrm>
           <a:prstGeom prst="rect">
@@ -7813,6 +7867,7 @@
           </a:bodyPr>
           <a:lstStyle/>
           <a:p>
+            <a:pPr algn="ctr"/>
             <a:r>
               <a:rPr lang="en-IN" sz="2400" b="1" dirty="0" err="1"/>
               <a:t>FastAPI</a:t>
@@ -7826,19 +7881,13 @@
       </p:sp>
       <p:sp>
         <p:nvSpPr>
-          <p:cNvPr id="16" name="TextBox 15">
-            <a:extLst>
-              <a:ext uri="{FF2B5EF4-FFF2-40B4-BE49-F238E27FC236}">
-                <a16:creationId xmlns:a16="http://schemas.microsoft.com/office/drawing/2014/main" id="{3DB4340B-EFBA-6A68-11FC-A300CE5AB63C}"/>
-              </a:ext>
-            </a:extLst>
-          </p:cNvPr>
+          <p:cNvPr id="16" name="TextBox 15"/>
           <p:cNvSpPr txBox="1"/>
           <p:nvPr/>
         </p:nvSpPr>
         <p:spPr>
-          <a:xfrm rot="21313600">
-            <a:off x="5665580" y="2131045"/>
+          <a:xfrm rot="19919811">
+            <a:off x="5885918" y="3111682"/>
             <a:ext cx="1716077" cy="461665"/>
           </a:xfrm>
           <a:prstGeom prst="rect">
@@ -7852,6 +7901,7 @@
           </a:bodyPr>
           <a:lstStyle/>
           <a:p>
+            <a:pPr algn="ctr"/>
             <a:r>
               <a:rPr lang="en-IN" sz="2400" b="1" dirty="0"/>
               <a:t>Database</a:t>
@@ -7866,19 +7916,13 @@
       </p:sp>
       <p:sp>
         <p:nvSpPr>
-          <p:cNvPr id="17" name="TextBox 16">
-            <a:extLst>
-              <a:ext uri="{FF2B5EF4-FFF2-40B4-BE49-F238E27FC236}">
-                <a16:creationId xmlns:a16="http://schemas.microsoft.com/office/drawing/2014/main" id="{B09BF3EE-E351-207A-F983-43148C2EEEE5}"/>
-              </a:ext>
-            </a:extLst>
-          </p:cNvPr>
+          <p:cNvPr id="17" name="TextBox 16"/>
           <p:cNvSpPr txBox="1"/>
           <p:nvPr/>
         </p:nvSpPr>
         <p:spPr>
-          <a:xfrm rot="20750450">
-            <a:off x="8110072" y="1497265"/>
+          <a:xfrm rot="19009392">
+            <a:off x="8194770" y="2593895"/>
             <a:ext cx="2579531" cy="461665"/>
           </a:xfrm>
           <a:prstGeom prst="rect">
@@ -7892,6 +7936,7 @@
           </a:bodyPr>
           <a:lstStyle/>
           <a:p>
+            <a:pPr algn="ctr"/>
             <a:r>
               <a:rPr lang="en-IN" sz="2400" b="1" dirty="0"/>
               <a:t>AI Generator</a:t>
@@ -7901,19 +7946,13 @@
       </p:sp>
       <p:sp>
         <p:nvSpPr>
-          <p:cNvPr id="18" name="TextBox 17">
-            <a:extLst>
-              <a:ext uri="{FF2B5EF4-FFF2-40B4-BE49-F238E27FC236}">
-                <a16:creationId xmlns:a16="http://schemas.microsoft.com/office/drawing/2014/main" id="{BA2918A4-FB08-AA8A-D20A-693E64815F14}"/>
-              </a:ext>
-            </a:extLst>
-          </p:cNvPr>
+          <p:cNvPr id="18" name="TextBox 17"/>
           <p:cNvSpPr txBox="1"/>
           <p:nvPr/>
         </p:nvSpPr>
         <p:spPr>
-          <a:xfrm rot="19915750">
-            <a:off x="10361810" y="715669"/>
+          <a:xfrm rot="18475750">
+            <a:off x="10919975" y="1698014"/>
             <a:ext cx="1456912" cy="461665"/>
           </a:xfrm>
           <a:prstGeom prst="rect">
@@ -7936,11 +7975,6 @@
         </p:txBody>
       </p:sp>
     </p:spTree>
-    <p:extLst>
-      <p:ext uri="{BB962C8B-B14F-4D97-AF65-F5344CB8AC3E}">
-        <p14:creationId xmlns:p14="http://schemas.microsoft.com/office/powerpoint/2010/main" val="3018656531"/>
-      </p:ext>
-    </p:extLst>
   </p:cSld>
   <p:clrMapOvr>
     <a:masterClrMapping/>
@@ -8546,7 +8580,7 @@
 </p:sld>
 </file>
 
-<file path=ppt/slides/slide12.xml><?xml version="1.0" encoding="utf-8"?>
+<file path=ppt/slides/slide14.xml><?xml version="1.0" encoding="utf-8"?>
 <p:sld xmlns:a="http://schemas.openxmlformats.org/drawingml/2006/main" xmlns:r="http://schemas.openxmlformats.org/officeDocument/2006/relationships" xmlns:p="http://schemas.openxmlformats.org/presentationml/2006/main">
   <p:cSld>
     <p:spTree>
@@ -8565,13 +8599,7 @@
       </p:grpSpPr>
       <p:sp>
         <p:nvSpPr>
-          <p:cNvPr id="2" name="Title 1">
-            <a:extLst>
-              <a:ext uri="{FF2B5EF4-FFF2-40B4-BE49-F238E27FC236}">
-                <a16:creationId xmlns:a16="http://schemas.microsoft.com/office/drawing/2014/main" id="{522688AF-9356-5657-1630-F68A715FDC20}"/>
-              </a:ext>
-            </a:extLst>
-          </p:cNvPr>
+          <p:cNvPr id="2" name="Title 1"/>
           <p:cNvSpPr>
             <a:spLocks noGrp="1"/>
           </p:cNvSpPr>
@@ -8599,13 +8627,7 @@
       </p:sp>
       <p:sp>
         <p:nvSpPr>
-          <p:cNvPr id="4" name="Rectangle 1">
-            <a:extLst>
-              <a:ext uri="{FF2B5EF4-FFF2-40B4-BE49-F238E27FC236}">
-                <a16:creationId xmlns:a16="http://schemas.microsoft.com/office/drawing/2014/main" id="{9A0B6F87-61CF-AF2D-F38F-03D2FCCFDD58}"/>
-              </a:ext>
-            </a:extLst>
-          </p:cNvPr>
+          <p:cNvPr id="4" name="Rectangle 1"/>
           <p:cNvSpPr>
             <a:spLocks noGrp="1" noChangeArrowheads="1"/>
           </p:cNvSpPr>
@@ -8657,9 +8679,6 @@
         </p:spPr>
         <p:txBody>
           <a:bodyPr vert="horz" wrap="square" lIns="91440" tIns="45720" rIns="91440" bIns="45720" numCol="1" anchor="ctr" anchorCtr="0" compatLnSpc="1">
-            <a:prstTxWarp prst="textNoShape">
-              <a:avLst/>
-            </a:prstTxWarp>
             <a:spAutoFit/>
           </a:bodyPr>
           <a:lstStyle/>
@@ -8678,7 +8697,6 @@
               <a:buSzTx/>
               <a:buFontTx/>
               <a:buChar char="•"/>
-              <a:tabLst/>
             </a:pPr>
             <a:r>
               <a:rPr kumimoji="0" lang="en-US" altLang="en-US" sz="2400" b="0" i="0" u="none" strike="noStrike" cap="none" normalizeH="0" baseline="0" dirty="0">
@@ -8709,7 +8727,6 @@
               <a:buSzTx/>
               <a:buFontTx/>
               <a:buChar char="•"/>
-              <a:tabLst/>
             </a:pPr>
             <a:r>
               <a:rPr kumimoji="0" lang="en-US" altLang="en-US" sz="2400" b="0" i="0" u="none" strike="noStrike" cap="none" normalizeH="0" baseline="0" dirty="0">
@@ -8740,7 +8757,6 @@
               <a:buSzTx/>
               <a:buFontTx/>
               <a:buChar char="•"/>
-              <a:tabLst/>
             </a:pPr>
             <a:r>
               <a:rPr kumimoji="0" lang="en-US" altLang="en-US" sz="2400" b="0" i="0" u="none" strike="noStrike" cap="none" normalizeH="0" baseline="0" dirty="0">
@@ -8771,7 +8787,6 @@
               <a:buSzTx/>
               <a:buFontTx/>
               <a:buChar char="•"/>
-              <a:tabLst/>
             </a:pPr>
             <a:r>
               <a:rPr kumimoji="0" lang="en-US" altLang="en-US" sz="2400" b="0" i="0" u="none" strike="noStrike" cap="none" normalizeH="0" baseline="0" dirty="0">
@@ -8802,7 +8817,6 @@
               <a:buSzTx/>
               <a:buFontTx/>
               <a:buChar char="•"/>
-              <a:tabLst/>
             </a:pPr>
             <a:r>
               <a:rPr kumimoji="0" lang="en-US" altLang="en-US" sz="2400" b="0" i="0" u="none" strike="noStrike" cap="none" normalizeH="0" baseline="0" dirty="0">
@@ -8822,13 +8836,7 @@
       </p:sp>
       <p:pic>
         <p:nvPicPr>
-          <p:cNvPr id="1027" name="Picture 3" descr="AI In Travel | How Artificial Intelligence Is Reforming Travel Industry 2025">
-            <a:extLst>
-              <a:ext uri="{FF2B5EF4-FFF2-40B4-BE49-F238E27FC236}">
-                <a16:creationId xmlns:a16="http://schemas.microsoft.com/office/drawing/2014/main" id="{AACFB852-FBB8-3687-F65D-591B84AD4726}"/>
-              </a:ext>
-            </a:extLst>
-          </p:cNvPr>
+          <p:cNvPr id="1027" name="Picture 3" descr="AI In Travel | How Artificial Intelligence Is Reforming Travel Industry 2025"/>
           <p:cNvPicPr>
             <a:picLocks noChangeAspect="1" noChangeArrowheads="1"/>
           </p:cNvPicPr>
@@ -8876,12 +8884,117 @@
           </a:extLst>
         </p:spPr>
       </p:pic>
+      <p:grpSp>
+        <p:nvGrpSpPr>
+          <p:cNvPr id="3" name="Group 2"/>
+          <p:cNvGrpSpPr/>
+          <p:nvPr/>
+        </p:nvGrpSpPr>
+        <p:grpSpPr>
+          <a:xfrm>
+            <a:off x="232872" y="6271130"/>
+            <a:ext cx="5351499" cy="609290"/>
+            <a:chOff x="618333" y="6026099"/>
+            <a:chExt cx="4886323" cy="609290"/>
+          </a:xfrm>
+        </p:grpSpPr>
+        <p:sp>
+          <p:nvSpPr>
+            <p:cNvPr id="5" name="TextBox 4"/>
+            <p:cNvSpPr txBox="1"/>
+            <p:nvPr/>
+          </p:nvSpPr>
+          <p:spPr>
+            <a:xfrm>
+              <a:off x="1123157" y="6050614"/>
+              <a:ext cx="4381499" cy="584775"/>
+            </a:xfrm>
+            <a:prstGeom prst="rect">
+              <a:avLst/>
+            </a:prstGeom>
+            <a:noFill/>
+          </p:spPr>
+          <p:txBody>
+            <a:bodyPr wrap="square" rtlCol="0">
+              <a:spAutoFit/>
+            </a:bodyPr>
+            <a:lstStyle/>
+            <a:p>
+              <a:r>
+                <a:rPr lang="en-US" sz="1600" dirty="0">
+                  <a:solidFill>
+                    <a:srgbClr val="1B134C"/>
+                  </a:solidFill>
+                  <a:latin typeface="Poppins" panose="00000500000000000000" pitchFamily="2" charset="0"/>
+                  <a:cs typeface="Poppins" panose="00000500000000000000" pitchFamily="2" charset="0"/>
+                </a:rPr>
+                <a:t>Intelligent AI-Based Travel &amp; Tourism Planner</a:t>
+              </a:r>
+            </a:p>
+          </p:txBody>
+        </p:sp>
+        <p:pic>
+          <p:nvPicPr>
+            <p:cNvPr id="6" name="Graphic 5"/>
+            <p:cNvPicPr>
+              <a:picLocks noChangeAspect="1"/>
+            </p:cNvPicPr>
+            <p:nvPr/>
+          </p:nvPicPr>
+          <p:blipFill>
+            <a:blip r:embed="rId3">
+              <a:extLst>
+                <a:ext uri="{96DAC541-7B7A-43D3-8B79-37D633B846F1}">
+                  <asvg:svgBlip xmlns:asvg="http://schemas.microsoft.com/office/drawing/2016/SVG/main" r:embed="rId4"/>
+                </a:ext>
+              </a:extLst>
+            </a:blip>
+            <a:stretch>
+              <a:fillRect/>
+            </a:stretch>
+          </p:blipFill>
+          <p:spPr>
+            <a:xfrm>
+              <a:off x="618333" y="6026099"/>
+              <a:ext cx="353218" cy="388987"/>
+            </a:xfrm>
+            <a:prstGeom prst="rect">
+              <a:avLst/>
+            </a:prstGeom>
+          </p:spPr>
+        </p:pic>
+        <p:cxnSp>
+          <p:nvCxnSpPr>
+            <p:cNvPr id="7" name="Straight Connector 6"/>
+            <p:cNvCxnSpPr/>
+            <p:nvPr/>
+          </p:nvCxnSpPr>
+          <p:spPr>
+            <a:xfrm>
+              <a:off x="1123157" y="6026099"/>
+              <a:ext cx="0" cy="388987"/>
+            </a:xfrm>
+            <a:prstGeom prst="line">
+              <a:avLst/>
+            </a:prstGeom>
+          </p:spPr>
+          <p:style>
+            <a:lnRef idx="3">
+              <a:schemeClr val="dk1"/>
+            </a:lnRef>
+            <a:fillRef idx="0">
+              <a:schemeClr val="dk1"/>
+            </a:fillRef>
+            <a:effectRef idx="2">
+              <a:schemeClr val="dk1"/>
+            </a:effectRef>
+            <a:fontRef idx="minor">
+              <a:schemeClr val="tx1"/>
+            </a:fontRef>
+          </p:style>
+        </p:cxnSp>
+      </p:grpSp>
     </p:spTree>
-    <p:extLst>
-      <p:ext uri="{BB962C8B-B14F-4D97-AF65-F5344CB8AC3E}">
-        <p14:creationId xmlns:p14="http://schemas.microsoft.com/office/powerpoint/2010/main" val="2891210225"/>
-      </p:ext>
-    </p:extLst>
   </p:cSld>
   <p:clrMapOvr>
     <a:masterClrMapping/>
@@ -9021,7 +9134,7 @@
 </p:sld>
 </file>
 
-<file path=ppt/slides/slide13.xml><?xml version="1.0" encoding="utf-8"?>
+<file path=ppt/slides/slide15.xml><?xml version="1.0" encoding="utf-8"?>
 <p:sld xmlns:a="http://schemas.openxmlformats.org/drawingml/2006/main" xmlns:r="http://schemas.openxmlformats.org/officeDocument/2006/relationships" xmlns:p="http://schemas.openxmlformats.org/presentationml/2006/main">
   <p:cSld>
     <p:spTree>
@@ -9040,13 +9153,7 @@
       </p:grpSpPr>
       <p:sp>
         <p:nvSpPr>
-          <p:cNvPr id="4" name="TextBox 3">
-            <a:extLst>
-              <a:ext uri="{FF2B5EF4-FFF2-40B4-BE49-F238E27FC236}">
-                <a16:creationId xmlns:a16="http://schemas.microsoft.com/office/drawing/2014/main" id="{F1688259-6D80-C4E7-7800-399FF0886C91}"/>
-              </a:ext>
-            </a:extLst>
-          </p:cNvPr>
+          <p:cNvPr id="4" name="TextBox 3"/>
           <p:cNvSpPr txBox="1"/>
           <p:nvPr/>
         </p:nvSpPr>
@@ -9086,13 +9193,7 @@
       </p:sp>
       <p:sp>
         <p:nvSpPr>
-          <p:cNvPr id="5" name="Rectangle 4">
-            <a:extLst>
-              <a:ext uri="{FF2B5EF4-FFF2-40B4-BE49-F238E27FC236}">
-                <a16:creationId xmlns:a16="http://schemas.microsoft.com/office/drawing/2014/main" id="{E6E088B2-7839-7182-1F4C-0A026525B9D2}"/>
-              </a:ext>
-            </a:extLst>
-          </p:cNvPr>
+          <p:cNvPr id="5" name="Rectangle 4"/>
           <p:cNvSpPr/>
           <p:nvPr/>
         </p:nvSpPr>
@@ -9138,13 +9239,7 @@
       </p:sp>
       <p:sp>
         <p:nvSpPr>
-          <p:cNvPr id="6" name="Rectangle 5">
-            <a:extLst>
-              <a:ext uri="{FF2B5EF4-FFF2-40B4-BE49-F238E27FC236}">
-                <a16:creationId xmlns:a16="http://schemas.microsoft.com/office/drawing/2014/main" id="{9D8B4B88-3803-7AB5-CEFC-EE256A8F840C}"/>
-              </a:ext>
-            </a:extLst>
-          </p:cNvPr>
+          <p:cNvPr id="6" name="Rectangle 5"/>
           <p:cNvSpPr/>
           <p:nvPr/>
         </p:nvSpPr>
@@ -9189,22 +9284,17 @@
         </p:txBody>
       </p:sp>
     </p:spTree>
-    <p:extLst>
-      <p:ext uri="{BB962C8B-B14F-4D97-AF65-F5344CB8AC3E}">
-        <p14:creationId xmlns:p14="http://schemas.microsoft.com/office/powerpoint/2010/main" val="2999482184"/>
-      </p:ext>
-    </p:extLst>
   </p:cSld>
   <p:clrMapOvr>
     <a:masterClrMapping/>
   </p:clrMapOvr>
-  <mc:AlternateContent xmlns:mc="http://schemas.openxmlformats.org/markup-compatibility/2006">
-    <mc:Choice xmlns:p14="http://schemas.microsoft.com/office/powerpoint/2010/main" Requires="p14">
+  <mc:AlternateContent xmlns:mc="http://schemas.openxmlformats.org/markup-compatibility/2006" xmlns:p14="http://schemas.microsoft.com/office/powerpoint/2010/main">
+    <mc:Choice Requires="p14">
       <p:transition spd="slow" p14:dur="1600">
         <p:blinds dir="vert"/>
       </p:transition>
     </mc:Choice>
-    <mc:Fallback>
+    <mc:Fallback xmlns="">
       <p:transition spd="slow">
         <p:blinds dir="vert"/>
       </p:transition>
@@ -9232,13 +9322,7 @@
       </p:grpSpPr>
       <p:sp>
         <p:nvSpPr>
-          <p:cNvPr id="2" name="Title 1">
-            <a:extLst>
-              <a:ext uri="{FF2B5EF4-FFF2-40B4-BE49-F238E27FC236}">
-                <a16:creationId xmlns:a16="http://schemas.microsoft.com/office/drawing/2014/main" id="{B980F0F6-8883-69EE-5065-C0FCB7A1EBC0}"/>
-              </a:ext>
-            </a:extLst>
-          </p:cNvPr>
+          <p:cNvPr id="2" name="Title 1"/>
           <p:cNvSpPr>
             <a:spLocks noGrp="1"/>
           </p:cNvSpPr>
@@ -9254,8 +9338,8 @@
             <a:pPr algn="ctr"/>
             <a:r>
               <a:rPr lang="en-US" b="1" dirty="0">
-                <a:ea typeface="Calibri Light"/>
-                <a:cs typeface="Calibri Light"/>
+                <a:ea typeface="Calibri Light" panose="020F0302020204030204"/>
+                <a:cs typeface="Calibri Light" panose="020F0302020204030204"/>
               </a:rPr>
               <a:t>Abstract</a:t>
             </a:r>
@@ -9264,13 +9348,7 @@
       </p:sp>
       <p:sp>
         <p:nvSpPr>
-          <p:cNvPr id="3" name="Content Placeholder 2">
-            <a:extLst>
-              <a:ext uri="{FF2B5EF4-FFF2-40B4-BE49-F238E27FC236}">
-                <a16:creationId xmlns:a16="http://schemas.microsoft.com/office/drawing/2014/main" id="{B841ECB5-3247-C946-5FC7-A3DADEB2B09D}"/>
-              </a:ext>
-            </a:extLst>
-          </p:cNvPr>
+          <p:cNvPr id="3" name="Content Placeholder 2"/>
           <p:cNvSpPr>
             <a:spLocks noGrp="1"/>
           </p:cNvSpPr>
@@ -9306,13 +9384,7 @@
       </p:sp>
       <p:grpSp>
         <p:nvGrpSpPr>
-          <p:cNvPr id="4" name="Group 3">
-            <a:extLst>
-              <a:ext uri="{FF2B5EF4-FFF2-40B4-BE49-F238E27FC236}">
-                <a16:creationId xmlns:a16="http://schemas.microsoft.com/office/drawing/2014/main" id="{C363EB93-95F1-96AB-E43F-9F8E3EE3C6B1}"/>
-              </a:ext>
-            </a:extLst>
-          </p:cNvPr>
+          <p:cNvPr id="4" name="Group 3"/>
           <p:cNvGrpSpPr/>
           <p:nvPr/>
         </p:nvGrpSpPr>
@@ -9326,13 +9398,7 @@
         </p:grpSpPr>
         <p:sp>
           <p:nvSpPr>
-            <p:cNvPr id="5" name="TextBox 4">
-              <a:extLst>
-                <a:ext uri="{FF2B5EF4-FFF2-40B4-BE49-F238E27FC236}">
-                  <a16:creationId xmlns:a16="http://schemas.microsoft.com/office/drawing/2014/main" id="{8A06FC11-3747-517A-912D-354B7A237B3E}"/>
-                </a:ext>
-              </a:extLst>
-            </p:cNvPr>
+            <p:cNvPr id="5" name="TextBox 4"/>
             <p:cNvSpPr txBox="1"/>
             <p:nvPr/>
           </p:nvSpPr>
@@ -9367,13 +9433,7 @@
         </p:sp>
         <p:pic>
           <p:nvPicPr>
-            <p:cNvPr id="6" name="Graphic 5">
-              <a:extLst>
-                <a:ext uri="{FF2B5EF4-FFF2-40B4-BE49-F238E27FC236}">
-                  <a16:creationId xmlns:a16="http://schemas.microsoft.com/office/drawing/2014/main" id="{8A190ABA-78E8-614E-49E8-0ABDC287DC14}"/>
-                </a:ext>
-              </a:extLst>
-            </p:cNvPr>
+            <p:cNvPr id="6" name="Graphic 5"/>
             <p:cNvPicPr>
               <a:picLocks noChangeAspect="1"/>
             </p:cNvPicPr>
@@ -9403,13 +9463,7 @@
         </p:pic>
         <p:cxnSp>
           <p:nvCxnSpPr>
-            <p:cNvPr id="7" name="Straight Connector 6">
-              <a:extLst>
-                <a:ext uri="{FF2B5EF4-FFF2-40B4-BE49-F238E27FC236}">
-                  <a16:creationId xmlns:a16="http://schemas.microsoft.com/office/drawing/2014/main" id="{EDB755D5-9398-0A5D-CDA4-B0B2289B6141}"/>
-                </a:ext>
-              </a:extLst>
-            </p:cNvPr>
+            <p:cNvPr id="7" name="Straight Connector 6"/>
             <p:cNvCxnSpPr/>
             <p:nvPr/>
           </p:nvCxnSpPr>
@@ -9440,13 +9494,7 @@
       </p:grpSp>
       <p:sp>
         <p:nvSpPr>
-          <p:cNvPr id="8" name="Flowchart: Connector 7">
-            <a:extLst>
-              <a:ext uri="{FF2B5EF4-FFF2-40B4-BE49-F238E27FC236}">
-                <a16:creationId xmlns:a16="http://schemas.microsoft.com/office/drawing/2014/main" id="{D57470C1-8613-1A45-9728-DBAE0D8ABCB2}"/>
-              </a:ext>
-            </a:extLst>
-          </p:cNvPr>
+          <p:cNvPr id="8" name="Flowchart: Connector 7"/>
           <p:cNvSpPr/>
           <p:nvPr/>
         </p:nvSpPr>
@@ -9492,13 +9540,7 @@
       </p:sp>
       <p:sp>
         <p:nvSpPr>
-          <p:cNvPr id="9" name="Flowchart: Connector 8">
-            <a:extLst>
-              <a:ext uri="{FF2B5EF4-FFF2-40B4-BE49-F238E27FC236}">
-                <a16:creationId xmlns:a16="http://schemas.microsoft.com/office/drawing/2014/main" id="{C6E37CDA-39D9-6275-4960-EF801BC183B4}"/>
-              </a:ext>
-            </a:extLst>
-          </p:cNvPr>
+          <p:cNvPr id="9" name="Flowchart: Connector 8"/>
           <p:cNvSpPr/>
           <p:nvPr/>
         </p:nvSpPr>
@@ -9544,13 +9586,7 @@
       </p:sp>
       <p:sp>
         <p:nvSpPr>
-          <p:cNvPr id="10" name="Flowchart: Connector 9">
-            <a:extLst>
-              <a:ext uri="{FF2B5EF4-FFF2-40B4-BE49-F238E27FC236}">
-                <a16:creationId xmlns:a16="http://schemas.microsoft.com/office/drawing/2014/main" id="{DBD3BD71-CBD1-74E3-F8A5-59C5B7363872}"/>
-              </a:ext>
-            </a:extLst>
-          </p:cNvPr>
+          <p:cNvPr id="10" name="Flowchart: Connector 9"/>
           <p:cNvSpPr/>
           <p:nvPr/>
         </p:nvSpPr>
@@ -9596,13 +9632,7 @@
       </p:sp>
       <p:sp>
         <p:nvSpPr>
-          <p:cNvPr id="11" name="Flowchart: Connector 10">
-            <a:extLst>
-              <a:ext uri="{FF2B5EF4-FFF2-40B4-BE49-F238E27FC236}">
-                <a16:creationId xmlns:a16="http://schemas.microsoft.com/office/drawing/2014/main" id="{7D55A065-5D8F-699B-CAD5-956600A06FD1}"/>
-              </a:ext>
-            </a:extLst>
-          </p:cNvPr>
+          <p:cNvPr id="11" name="Flowchart: Connector 10"/>
           <p:cNvSpPr/>
           <p:nvPr/>
         </p:nvSpPr>
@@ -9741,11 +9771,6 @@
         </p:txBody>
       </p:sp>
     </p:spTree>
-    <p:extLst>
-      <p:ext uri="{BB962C8B-B14F-4D97-AF65-F5344CB8AC3E}">
-        <p14:creationId xmlns:p14="http://schemas.microsoft.com/office/powerpoint/2010/main" val="2640661969"/>
-      </p:ext>
-    </p:extLst>
   </p:cSld>
   <p:clrMapOvr>
     <a:masterClrMapping/>
@@ -9761,13 +9786,7 @@
   <p:cSld>
     <p:spTree>
       <p:nvGrpSpPr>
-        <p:cNvPr id="1" name="">
-          <a:extLst>
-            <a:ext uri="{FF2B5EF4-FFF2-40B4-BE49-F238E27FC236}">
-              <a16:creationId xmlns:a16="http://schemas.microsoft.com/office/drawing/2014/main" id="{B21535CA-D080-8322-DD53-B1D89AB8BD17}"/>
-            </a:ext>
-          </a:extLst>
-        </p:cNvPr>
+        <p:cNvPr id="1" name=""/>
         <p:cNvGrpSpPr/>
         <p:nvPr/>
       </p:nvGrpSpPr>
@@ -9781,13 +9800,7 @@
       </p:grpSpPr>
       <p:sp>
         <p:nvSpPr>
-          <p:cNvPr id="2" name="Title 1">
-            <a:extLst>
-              <a:ext uri="{FF2B5EF4-FFF2-40B4-BE49-F238E27FC236}">
-                <a16:creationId xmlns:a16="http://schemas.microsoft.com/office/drawing/2014/main" id="{1945641E-5B00-E08F-3574-C3F7DABD96C5}"/>
-              </a:ext>
-            </a:extLst>
-          </p:cNvPr>
+          <p:cNvPr id="2" name="Title 1"/>
           <p:cNvSpPr>
             <a:spLocks noGrp="1"/>
           </p:cNvSpPr>
@@ -9815,13 +9828,7 @@
       </p:sp>
       <p:sp>
         <p:nvSpPr>
-          <p:cNvPr id="3" name="Content Placeholder 2">
-            <a:extLst>
-              <a:ext uri="{FF2B5EF4-FFF2-40B4-BE49-F238E27FC236}">
-                <a16:creationId xmlns:a16="http://schemas.microsoft.com/office/drawing/2014/main" id="{38F6722D-6BBC-51BB-37F6-0BBA26F3C9DB}"/>
-              </a:ext>
-            </a:extLst>
-          </p:cNvPr>
+          <p:cNvPr id="3" name="Content Placeholder 2"/>
           <p:cNvSpPr>
             <a:spLocks noGrp="1"/>
           </p:cNvSpPr>
@@ -9854,13 +9861,7 @@
       </p:sp>
       <p:grpSp>
         <p:nvGrpSpPr>
-          <p:cNvPr id="4" name="Group 3">
-            <a:extLst>
-              <a:ext uri="{FF2B5EF4-FFF2-40B4-BE49-F238E27FC236}">
-                <a16:creationId xmlns:a16="http://schemas.microsoft.com/office/drawing/2014/main" id="{9FDEFDAB-FA5E-4373-2D7C-0C31D5E39087}"/>
-              </a:ext>
-            </a:extLst>
-          </p:cNvPr>
+          <p:cNvPr id="4" name="Group 3"/>
           <p:cNvGrpSpPr/>
           <p:nvPr/>
         </p:nvGrpSpPr>
@@ -9874,13 +9875,7 @@
         </p:grpSpPr>
         <p:sp>
           <p:nvSpPr>
-            <p:cNvPr id="5" name="TextBox 4">
-              <a:extLst>
-                <a:ext uri="{FF2B5EF4-FFF2-40B4-BE49-F238E27FC236}">
-                  <a16:creationId xmlns:a16="http://schemas.microsoft.com/office/drawing/2014/main" id="{C5397A39-5643-70AD-66A0-93B170F25E25}"/>
-                </a:ext>
-              </a:extLst>
-            </p:cNvPr>
+            <p:cNvPr id="5" name="TextBox 4"/>
             <p:cNvSpPr txBox="1"/>
             <p:nvPr/>
           </p:nvSpPr>
@@ -9915,13 +9910,7 @@
         </p:sp>
         <p:pic>
           <p:nvPicPr>
-            <p:cNvPr id="6" name="Graphic 5">
-              <a:extLst>
-                <a:ext uri="{FF2B5EF4-FFF2-40B4-BE49-F238E27FC236}">
-                  <a16:creationId xmlns:a16="http://schemas.microsoft.com/office/drawing/2014/main" id="{AC18C345-5455-8748-126A-A1EDD8A5590E}"/>
-                </a:ext>
-              </a:extLst>
-            </p:cNvPr>
+            <p:cNvPr id="6" name="Graphic 5"/>
             <p:cNvPicPr>
               <a:picLocks noChangeAspect="1"/>
             </p:cNvPicPr>
@@ -9951,13 +9940,7 @@
         </p:pic>
         <p:cxnSp>
           <p:nvCxnSpPr>
-            <p:cNvPr id="7" name="Straight Connector 6">
-              <a:extLst>
-                <a:ext uri="{FF2B5EF4-FFF2-40B4-BE49-F238E27FC236}">
-                  <a16:creationId xmlns:a16="http://schemas.microsoft.com/office/drawing/2014/main" id="{E3DDCCB3-CF1F-7B8D-1308-55216D5C9293}"/>
-                </a:ext>
-              </a:extLst>
-            </p:cNvPr>
+            <p:cNvPr id="7" name="Straight Connector 6"/>
             <p:cNvCxnSpPr/>
             <p:nvPr/>
           </p:nvCxnSpPr>
@@ -9988,13 +9971,7 @@
       </p:grpSp>
       <p:sp>
         <p:nvSpPr>
-          <p:cNvPr id="8" name="Flowchart: Connector 7">
-            <a:extLst>
-              <a:ext uri="{FF2B5EF4-FFF2-40B4-BE49-F238E27FC236}">
-                <a16:creationId xmlns:a16="http://schemas.microsoft.com/office/drawing/2014/main" id="{E1C0C415-C675-99ED-D788-A856E63CB67A}"/>
-              </a:ext>
-            </a:extLst>
-          </p:cNvPr>
+          <p:cNvPr id="8" name="Flowchart: Connector 7"/>
           <p:cNvSpPr/>
           <p:nvPr/>
         </p:nvSpPr>
@@ -10040,13 +10017,7 @@
       </p:sp>
       <p:sp>
         <p:nvSpPr>
-          <p:cNvPr id="9" name="Flowchart: Connector 8">
-            <a:extLst>
-              <a:ext uri="{FF2B5EF4-FFF2-40B4-BE49-F238E27FC236}">
-                <a16:creationId xmlns:a16="http://schemas.microsoft.com/office/drawing/2014/main" id="{A69ABA05-7211-25D1-878F-E8A63EB08FD8}"/>
-              </a:ext>
-            </a:extLst>
-          </p:cNvPr>
+          <p:cNvPr id="9" name="Flowchart: Connector 8"/>
           <p:cNvSpPr/>
           <p:nvPr/>
         </p:nvSpPr>
@@ -10092,13 +10063,7 @@
       </p:sp>
       <p:sp>
         <p:nvSpPr>
-          <p:cNvPr id="10" name="Flowchart: Connector 9">
-            <a:extLst>
-              <a:ext uri="{FF2B5EF4-FFF2-40B4-BE49-F238E27FC236}">
-                <a16:creationId xmlns:a16="http://schemas.microsoft.com/office/drawing/2014/main" id="{1203F55F-1C78-D52E-BD12-223E8858CD81}"/>
-              </a:ext>
-            </a:extLst>
-          </p:cNvPr>
+          <p:cNvPr id="10" name="Flowchart: Connector 9"/>
           <p:cNvSpPr/>
           <p:nvPr/>
         </p:nvSpPr>
@@ -10144,13 +10109,7 @@
       </p:sp>
       <p:sp>
         <p:nvSpPr>
-          <p:cNvPr id="11" name="Flowchart: Connector 10">
-            <a:extLst>
-              <a:ext uri="{FF2B5EF4-FFF2-40B4-BE49-F238E27FC236}">
-                <a16:creationId xmlns:a16="http://schemas.microsoft.com/office/drawing/2014/main" id="{F45D1E15-18DB-AFA3-5964-23E78454A524}"/>
-              </a:ext>
-            </a:extLst>
-          </p:cNvPr>
+          <p:cNvPr id="11" name="Flowchart: Connector 10"/>
           <p:cNvSpPr/>
           <p:nvPr/>
         </p:nvSpPr>
@@ -10290,13 +10249,7 @@
       </p:sp>
       <p:pic>
         <p:nvPicPr>
-          <p:cNvPr id="3074" name="Picture 2" descr="Time is money - Free business and finance icons">
-            <a:extLst>
-              <a:ext uri="{FF2B5EF4-FFF2-40B4-BE49-F238E27FC236}">
-                <a16:creationId xmlns:a16="http://schemas.microsoft.com/office/drawing/2014/main" id="{61816417-537D-A3EF-C39A-9CB43BF7A05F}"/>
-              </a:ext>
-            </a:extLst>
-          </p:cNvPr>
+          <p:cNvPr id="3074" name="Picture 2" descr="Time is money - Free business and finance icons"/>
           <p:cNvPicPr>
             <a:picLocks noChangeAspect="1" noChangeArrowheads="1"/>
           </p:cNvPicPr>
@@ -10336,11 +10289,6 @@
         </p:spPr>
       </p:pic>
     </p:spTree>
-    <p:extLst>
-      <p:ext uri="{BB962C8B-B14F-4D97-AF65-F5344CB8AC3E}">
-        <p14:creationId xmlns:p14="http://schemas.microsoft.com/office/powerpoint/2010/main" val="2512971562"/>
-      </p:ext>
-    </p:extLst>
   </p:cSld>
   <p:clrMapOvr>
     <a:masterClrMapping/>
@@ -10370,13 +10318,7 @@
       </p:grpSpPr>
       <p:sp>
         <p:nvSpPr>
-          <p:cNvPr id="17" name="Rectangle 16">
-            <a:extLst>
-              <a:ext uri="{FF2B5EF4-FFF2-40B4-BE49-F238E27FC236}">
-                <a16:creationId xmlns:a16="http://schemas.microsoft.com/office/drawing/2014/main" id="{4055C5D4-DBDF-33EC-4587-DDFBCF32D089}"/>
-              </a:ext>
-            </a:extLst>
-          </p:cNvPr>
+          <p:cNvPr id="17" name="Rectangle 16"/>
           <p:cNvSpPr/>
           <p:nvPr/>
         </p:nvSpPr>
@@ -10422,13 +10364,7 @@
       </p:sp>
       <p:sp>
         <p:nvSpPr>
-          <p:cNvPr id="16" name="Rectangle 15">
-            <a:extLst>
-              <a:ext uri="{FF2B5EF4-FFF2-40B4-BE49-F238E27FC236}">
-                <a16:creationId xmlns:a16="http://schemas.microsoft.com/office/drawing/2014/main" id="{7995D5C1-CD53-1E56-E137-1E3DA2F697E6}"/>
-              </a:ext>
-            </a:extLst>
-          </p:cNvPr>
+          <p:cNvPr id="16" name="Rectangle 15"/>
           <p:cNvSpPr/>
           <p:nvPr/>
         </p:nvSpPr>
@@ -10477,21 +10413,15 @@
               <a:t>Our AI system offers personalized, cost-effective, and dynamic travel planning unlike existing apps.</a:t>
             </a:r>
             <a:endParaRPr lang="en-US" sz="3200" dirty="0">
-              <a:ea typeface="Calibri"/>
-              <a:cs typeface="Calibri"/>
+              <a:ea typeface="Calibri" panose="020F0502020204030204"/>
+              <a:cs typeface="Calibri" panose="020F0502020204030204"/>
             </a:endParaRPr>
           </a:p>
         </p:txBody>
       </p:sp>
       <p:grpSp>
         <p:nvGrpSpPr>
-          <p:cNvPr id="19" name="Group 18">
-            <a:extLst>
-              <a:ext uri="{FF2B5EF4-FFF2-40B4-BE49-F238E27FC236}">
-                <a16:creationId xmlns:a16="http://schemas.microsoft.com/office/drawing/2014/main" id="{B47C530F-4ED7-72C4-DFBA-E6FD67E21A17}"/>
-              </a:ext>
-            </a:extLst>
-          </p:cNvPr>
+          <p:cNvPr id="19" name="Group 18"/>
           <p:cNvGrpSpPr/>
           <p:nvPr/>
         </p:nvGrpSpPr>
@@ -10505,13 +10435,7 @@
         </p:grpSpPr>
         <p:sp>
           <p:nvSpPr>
-            <p:cNvPr id="6" name="TextBox 5">
-              <a:extLst>
-                <a:ext uri="{FF2B5EF4-FFF2-40B4-BE49-F238E27FC236}">
-                  <a16:creationId xmlns:a16="http://schemas.microsoft.com/office/drawing/2014/main" id="{B525DA37-D2EF-5A47-E272-8EB9966562F5}"/>
-                </a:ext>
-              </a:extLst>
-            </p:cNvPr>
+            <p:cNvPr id="6" name="TextBox 5"/>
             <p:cNvSpPr txBox="1"/>
             <p:nvPr/>
           </p:nvSpPr>
@@ -10546,13 +10470,7 @@
         </p:sp>
         <p:pic>
           <p:nvPicPr>
-            <p:cNvPr id="8" name="Graphic 7">
-              <a:extLst>
-                <a:ext uri="{FF2B5EF4-FFF2-40B4-BE49-F238E27FC236}">
-                  <a16:creationId xmlns:a16="http://schemas.microsoft.com/office/drawing/2014/main" id="{DE79119C-F5D0-516F-2119-6EC753D6B60C}"/>
-                </a:ext>
-              </a:extLst>
-            </p:cNvPr>
+            <p:cNvPr id="8" name="Graphic 7"/>
             <p:cNvPicPr>
               <a:picLocks noChangeAspect="1"/>
             </p:cNvPicPr>
@@ -10582,13 +10500,7 @@
         </p:pic>
         <p:cxnSp>
           <p:nvCxnSpPr>
-            <p:cNvPr id="10" name="Straight Connector 9">
-              <a:extLst>
-                <a:ext uri="{FF2B5EF4-FFF2-40B4-BE49-F238E27FC236}">
-                  <a16:creationId xmlns:a16="http://schemas.microsoft.com/office/drawing/2014/main" id="{1CA5A2F2-FE45-7F32-05D2-A11066819A95}"/>
-                </a:ext>
-              </a:extLst>
-            </p:cNvPr>
+            <p:cNvPr id="10" name="Straight Connector 9"/>
             <p:cNvCxnSpPr/>
             <p:nvPr/>
           </p:nvCxnSpPr>
@@ -10619,13 +10531,7 @@
       </p:grpSp>
       <p:sp>
         <p:nvSpPr>
-          <p:cNvPr id="18" name="Rectangle 17">
-            <a:extLst>
-              <a:ext uri="{FF2B5EF4-FFF2-40B4-BE49-F238E27FC236}">
-                <a16:creationId xmlns:a16="http://schemas.microsoft.com/office/drawing/2014/main" id="{8AEFBDE8-B5E7-821B-23CA-6944C624FA10}"/>
-              </a:ext>
-            </a:extLst>
-          </p:cNvPr>
+          <p:cNvPr id="18" name="Rectangle 17"/>
           <p:cNvSpPr/>
           <p:nvPr/>
         </p:nvSpPr>
@@ -10671,13 +10577,7 @@
       </p:sp>
       <p:sp>
         <p:nvSpPr>
-          <p:cNvPr id="3" name="TextBox 2">
-            <a:extLst>
-              <a:ext uri="{FF2B5EF4-FFF2-40B4-BE49-F238E27FC236}">
-                <a16:creationId xmlns:a16="http://schemas.microsoft.com/office/drawing/2014/main" id="{59316632-1E64-B3CE-AB35-1F57A7980281}"/>
-              </a:ext>
-            </a:extLst>
-          </p:cNvPr>
+          <p:cNvPr id="3" name="TextBox 2"/>
           <p:cNvSpPr txBox="1"/>
           <p:nvPr/>
         </p:nvSpPr>
@@ -10706,23 +10606,11 @@
       </p:sp>
       <p:graphicFrame>
         <p:nvGraphicFramePr>
-          <p:cNvPr id="4" name="Table 3">
-            <a:extLst>
-              <a:ext uri="{FF2B5EF4-FFF2-40B4-BE49-F238E27FC236}">
-                <a16:creationId xmlns:a16="http://schemas.microsoft.com/office/drawing/2014/main" id="{A3F36CAE-0816-1C0F-F184-1FB697D57C8E}"/>
-              </a:ext>
-            </a:extLst>
-          </p:cNvPr>
+          <p:cNvPr id="4" name="Table 3"/>
           <p:cNvGraphicFramePr>
             <a:graphicFrameLocks noGrp="1"/>
           </p:cNvGraphicFramePr>
-          <p:nvPr>
-            <p:extLst>
-              <p:ext uri="{D42A27DB-BD31-4B8C-83A1-F6EECF244321}">
-                <p14:modId xmlns:p14="http://schemas.microsoft.com/office/powerpoint/2010/main" val="3767342090"/>
-              </p:ext>
-            </p:extLst>
-          </p:nvPr>
+          <p:nvPr/>
         </p:nvGraphicFramePr>
         <p:xfrm>
           <a:off x="809624" y="1407795"/>
@@ -10736,14 +10624,14 @@
                 <a:gridCol w="3037096">
                   <a:extLst>
                     <a:ext uri="{9D8B030D-6E8A-4147-A177-3AD203B41FA5}">
-                      <a16:colId xmlns:a16="http://schemas.microsoft.com/office/drawing/2014/main" val="3677005661"/>
+                      <a16:colId xmlns:a16="http://schemas.microsoft.com/office/drawing/2014/main" val="20000"/>
                     </a:ext>
                   </a:extLst>
                 </a:gridCol>
                 <a:gridCol w="3250765">
                   <a:extLst>
                     <a:ext uri="{9D8B030D-6E8A-4147-A177-3AD203B41FA5}">
-                      <a16:colId xmlns:a16="http://schemas.microsoft.com/office/drawing/2014/main" val="2769187268"/>
+                      <a16:colId xmlns:a16="http://schemas.microsoft.com/office/drawing/2014/main" val="20001"/>
                     </a:ext>
                   </a:extLst>
                 </a:gridCol>
@@ -10813,7 +10701,7 @@
                 </a:tc>
                 <a:extLst>
                   <a:ext uri="{0D108BD9-81ED-4DB2-BD59-A6C34878D82A}">
-                    <a16:rowId xmlns:a16="http://schemas.microsoft.com/office/drawing/2014/main" val="2169484180"/>
+                    <a16:rowId xmlns:a16="http://schemas.microsoft.com/office/drawing/2014/main" val="10000"/>
                   </a:ext>
                 </a:extLst>
               </a:tr>
@@ -10880,7 +10768,7 @@
                 </a:tc>
                 <a:extLst>
                   <a:ext uri="{0D108BD9-81ED-4DB2-BD59-A6C34878D82A}">
-                    <a16:rowId xmlns:a16="http://schemas.microsoft.com/office/drawing/2014/main" val="2832564062"/>
+                    <a16:rowId xmlns:a16="http://schemas.microsoft.com/office/drawing/2014/main" val="10001"/>
                   </a:ext>
                 </a:extLst>
               </a:tr>
@@ -10947,7 +10835,7 @@
                 </a:tc>
                 <a:extLst>
                   <a:ext uri="{0D108BD9-81ED-4DB2-BD59-A6C34878D82A}">
-                    <a16:rowId xmlns:a16="http://schemas.microsoft.com/office/drawing/2014/main" val="774638985"/>
+                    <a16:rowId xmlns:a16="http://schemas.microsoft.com/office/drawing/2014/main" val="10002"/>
                   </a:ext>
                 </a:extLst>
               </a:tr>
@@ -11014,7 +10902,7 @@
                 </a:tc>
                 <a:extLst>
                   <a:ext uri="{0D108BD9-81ED-4DB2-BD59-A6C34878D82A}">
-                    <a16:rowId xmlns:a16="http://schemas.microsoft.com/office/drawing/2014/main" val="654498866"/>
+                    <a16:rowId xmlns:a16="http://schemas.microsoft.com/office/drawing/2014/main" val="10003"/>
                   </a:ext>
                 </a:extLst>
               </a:tr>
@@ -11081,7 +10969,7 @@
                 </a:tc>
                 <a:extLst>
                   <a:ext uri="{0D108BD9-81ED-4DB2-BD59-A6C34878D82A}">
-                    <a16:rowId xmlns:a16="http://schemas.microsoft.com/office/drawing/2014/main" val="455614443"/>
+                    <a16:rowId xmlns:a16="http://schemas.microsoft.com/office/drawing/2014/main" val="10004"/>
                   </a:ext>
                 </a:extLst>
               </a:tr>
@@ -11148,7 +11036,7 @@
                 </a:tc>
                 <a:extLst>
                   <a:ext uri="{0D108BD9-81ED-4DB2-BD59-A6C34878D82A}">
-                    <a16:rowId xmlns:a16="http://schemas.microsoft.com/office/drawing/2014/main" val="3155023854"/>
+                    <a16:rowId xmlns:a16="http://schemas.microsoft.com/office/drawing/2014/main" val="10005"/>
                   </a:ext>
                 </a:extLst>
               </a:tr>
@@ -11157,11 +11045,6 @@
         </a:graphic>
       </p:graphicFrame>
     </p:spTree>
-    <p:extLst>
-      <p:ext uri="{BB962C8B-B14F-4D97-AF65-F5344CB8AC3E}">
-        <p14:creationId xmlns:p14="http://schemas.microsoft.com/office/powerpoint/2010/main" val="3368749316"/>
-      </p:ext>
-    </p:extLst>
   </p:cSld>
   <p:clrMapOvr>
     <a:masterClrMapping/>
@@ -11177,13 +11060,7 @@
   <p:cSld>
     <p:spTree>
       <p:nvGrpSpPr>
-        <p:cNvPr id="1" name="">
-          <a:extLst>
-            <a:ext uri="{FF2B5EF4-FFF2-40B4-BE49-F238E27FC236}">
-              <a16:creationId xmlns:a16="http://schemas.microsoft.com/office/drawing/2014/main" id="{2BB088F8-073A-5FCF-7308-2EC60CDF3639}"/>
-            </a:ext>
-          </a:extLst>
-        </p:cNvPr>
+        <p:cNvPr id="1" name=""/>
         <p:cNvGrpSpPr/>
         <p:nvPr/>
       </p:nvGrpSpPr>
@@ -11197,13 +11074,7 @@
       </p:grpSpPr>
       <p:sp>
         <p:nvSpPr>
-          <p:cNvPr id="10" name="Rectangle 9">
-            <a:extLst>
-              <a:ext uri="{FF2B5EF4-FFF2-40B4-BE49-F238E27FC236}">
-                <a16:creationId xmlns:a16="http://schemas.microsoft.com/office/drawing/2014/main" id="{C7DA5EEB-CE11-BB00-B36B-FA135219FC20}"/>
-              </a:ext>
-            </a:extLst>
-          </p:cNvPr>
+          <p:cNvPr id="10" name="Rectangle 9"/>
           <p:cNvSpPr/>
           <p:nvPr/>
         </p:nvSpPr>
@@ -11258,13 +11129,7 @@
       </p:sp>
       <p:sp>
         <p:nvSpPr>
-          <p:cNvPr id="6" name="Rectangle 5">
-            <a:extLst>
-              <a:ext uri="{FF2B5EF4-FFF2-40B4-BE49-F238E27FC236}">
-                <a16:creationId xmlns:a16="http://schemas.microsoft.com/office/drawing/2014/main" id="{054C0A1B-AD10-EA61-F694-B86EA26ACD13}"/>
-              </a:ext>
-            </a:extLst>
-          </p:cNvPr>
+          <p:cNvPr id="6" name="Rectangle 5"/>
           <p:cNvSpPr/>
           <p:nvPr/>
         </p:nvSpPr>
@@ -11323,13 +11188,7 @@
       </p:sp>
       <p:sp>
         <p:nvSpPr>
-          <p:cNvPr id="8" name="TextBox 7">
-            <a:extLst>
-              <a:ext uri="{FF2B5EF4-FFF2-40B4-BE49-F238E27FC236}">
-                <a16:creationId xmlns:a16="http://schemas.microsoft.com/office/drawing/2014/main" id="{7BCCEC3B-C0D3-843C-32F3-72780EA21026}"/>
-              </a:ext>
-            </a:extLst>
-          </p:cNvPr>
+          <p:cNvPr id="8" name="TextBox 7"/>
           <p:cNvSpPr txBox="1"/>
           <p:nvPr/>
         </p:nvSpPr>
@@ -11359,9 +11218,9 @@
                 <a:solidFill>
                   <a:srgbClr val="000000"/>
                 </a:solidFill>
-                <a:latin typeface="Calibri"/>
-                <a:ea typeface="Calibri"/>
-                <a:cs typeface="Calibri"/>
+                <a:latin typeface="Calibri" panose="020F0502020204030204"/>
+                <a:ea typeface="Calibri" panose="020F0502020204030204"/>
+                <a:cs typeface="Calibri" panose="020F0502020204030204"/>
               </a:rPr>
               <a:t>Architecture</a:t>
             </a:r>
@@ -11371,13 +11230,7 @@
       </p:sp>
       <p:grpSp>
         <p:nvGrpSpPr>
-          <p:cNvPr id="13" name="Group 12">
-            <a:extLst>
-              <a:ext uri="{FF2B5EF4-FFF2-40B4-BE49-F238E27FC236}">
-                <a16:creationId xmlns:a16="http://schemas.microsoft.com/office/drawing/2014/main" id="{A13A0819-0D3C-02E0-6DBB-4E9689E40008}"/>
-              </a:ext>
-            </a:extLst>
-          </p:cNvPr>
+          <p:cNvPr id="13" name="Group 12"/>
           <p:cNvGrpSpPr/>
           <p:nvPr/>
         </p:nvGrpSpPr>
@@ -11391,13 +11244,7 @@
         </p:grpSpPr>
         <p:sp>
           <p:nvSpPr>
-            <p:cNvPr id="14" name="TextBox 13">
-              <a:extLst>
-                <a:ext uri="{FF2B5EF4-FFF2-40B4-BE49-F238E27FC236}">
-                  <a16:creationId xmlns:a16="http://schemas.microsoft.com/office/drawing/2014/main" id="{C27F195B-8CF8-2175-9BC5-9CE49FA48C1C}"/>
-                </a:ext>
-              </a:extLst>
-            </p:cNvPr>
+            <p:cNvPr id="14" name="TextBox 13"/>
             <p:cNvSpPr txBox="1"/>
             <p:nvPr/>
           </p:nvSpPr>
@@ -11432,13 +11279,7 @@
         </p:sp>
         <p:pic>
           <p:nvPicPr>
-            <p:cNvPr id="15" name="Graphic 14">
-              <a:extLst>
-                <a:ext uri="{FF2B5EF4-FFF2-40B4-BE49-F238E27FC236}">
-                  <a16:creationId xmlns:a16="http://schemas.microsoft.com/office/drawing/2014/main" id="{3FE5C1F2-A290-1FBE-0BC2-EC5F0E887A2A}"/>
-                </a:ext>
-              </a:extLst>
-            </p:cNvPr>
+            <p:cNvPr id="15" name="Graphic 14"/>
             <p:cNvPicPr>
               <a:picLocks noChangeAspect="1"/>
             </p:cNvPicPr>
@@ -11468,13 +11309,7 @@
         </p:pic>
         <p:cxnSp>
           <p:nvCxnSpPr>
-            <p:cNvPr id="16" name="Straight Connector 15">
-              <a:extLst>
-                <a:ext uri="{FF2B5EF4-FFF2-40B4-BE49-F238E27FC236}">
-                  <a16:creationId xmlns:a16="http://schemas.microsoft.com/office/drawing/2014/main" id="{F33F2914-AE79-DECF-8393-B159B3697381}"/>
-                </a:ext>
-              </a:extLst>
-            </p:cNvPr>
+            <p:cNvPr id="16" name="Straight Connector 15"/>
             <p:cNvCxnSpPr/>
             <p:nvPr/>
           </p:nvCxnSpPr>
@@ -11505,13 +11340,7 @@
       </p:grpSp>
       <p:sp>
         <p:nvSpPr>
-          <p:cNvPr id="2" name="TextBox 1">
-            <a:extLst>
-              <a:ext uri="{FF2B5EF4-FFF2-40B4-BE49-F238E27FC236}">
-                <a16:creationId xmlns:a16="http://schemas.microsoft.com/office/drawing/2014/main" id="{50283D58-1E2A-3563-27FE-6C4DD9860B24}"/>
-              </a:ext>
-            </a:extLst>
-          </p:cNvPr>
+          <p:cNvPr id="2" name="TextBox 1"/>
           <p:cNvSpPr txBox="1"/>
           <p:nvPr/>
         </p:nvSpPr>
@@ -11642,16 +11471,7 @@
       </p:sp>
       <p:pic>
         <p:nvPicPr>
-          <p:cNvPr id="5" name="Picture 4">
-            <a:extLst>
-              <a:ext uri="{FF2B5EF4-FFF2-40B4-BE49-F238E27FC236}">
-                <a16:creationId xmlns:a16="http://schemas.microsoft.com/office/drawing/2014/main" id="{3D6B3D08-F22C-C780-532A-27893456D122}"/>
-              </a:ext>
-              <a:ext uri="{C183D7F6-B498-43B3-948B-1728B52AA6E4}">
-                <adec:decorative xmlns:adec="http://schemas.microsoft.com/office/drawing/2017/decorative" val="1"/>
-              </a:ext>
-            </a:extLst>
-          </p:cNvPr>
+          <p:cNvPr id="5" name="Picture 4"/>
           <p:cNvPicPr>
             <a:picLocks noChangeAspect="1"/>
           </p:cNvPicPr>
@@ -11688,13 +11508,7 @@
       </p:pic>
       <p:pic>
         <p:nvPicPr>
-          <p:cNvPr id="2050" name="Picture 2" descr="Digital future artificial intelligence for travel &amp; tourism">
-            <a:extLst>
-              <a:ext uri="{FF2B5EF4-FFF2-40B4-BE49-F238E27FC236}">
-                <a16:creationId xmlns:a16="http://schemas.microsoft.com/office/drawing/2014/main" id="{D76218D5-B462-EB5B-E8C8-ACDE9DEA5A9C}"/>
-              </a:ext>
-            </a:extLst>
-          </p:cNvPr>
+          <p:cNvPr id="2050" name="Picture 2" descr="Digital future artificial intelligence for travel &amp; tourism"/>
           <p:cNvPicPr>
             <a:picLocks noChangeAspect="1" noChangeArrowheads="1"/>
           </p:cNvPicPr>
@@ -11734,11 +11548,6 @@
         </p:spPr>
       </p:pic>
     </p:spTree>
-    <p:extLst>
-      <p:ext uri="{BB962C8B-B14F-4D97-AF65-F5344CB8AC3E}">
-        <p14:creationId xmlns:p14="http://schemas.microsoft.com/office/powerpoint/2010/main" val="2853014144"/>
-      </p:ext>
-    </p:extLst>
   </p:cSld>
   <p:clrMapOvr>
     <a:masterClrMapping/>
@@ -11768,13 +11577,7 @@
       </p:grpSpPr>
       <p:sp>
         <p:nvSpPr>
-          <p:cNvPr id="2" name="Title 1">
-            <a:extLst>
-              <a:ext uri="{FF2B5EF4-FFF2-40B4-BE49-F238E27FC236}">
-                <a16:creationId xmlns:a16="http://schemas.microsoft.com/office/drawing/2014/main" id="{84C48EAF-B10B-D3CB-8866-DEB365957FBD}"/>
-              </a:ext>
-            </a:extLst>
-          </p:cNvPr>
+          <p:cNvPr id="2" name="Title 1"/>
           <p:cNvSpPr>
             <a:spLocks noGrp="1"/>
           </p:cNvSpPr>
@@ -11808,23 +11611,12 @@
       </p:sp>
       <p:graphicFrame>
         <p:nvGraphicFramePr>
-          <p:cNvPr id="10" name="Content Placeholder 9">
-            <a:extLst>
-              <a:ext uri="{FF2B5EF4-FFF2-40B4-BE49-F238E27FC236}">
-                <a16:creationId xmlns:a16="http://schemas.microsoft.com/office/drawing/2014/main" id="{C73A3F6B-239D-D74F-1FFF-C6AA0D87E155}"/>
-              </a:ext>
-            </a:extLst>
-          </p:cNvPr>
+          <p:cNvPr id="10" name="Content Placeholder 9"/>
           <p:cNvGraphicFramePr>
             <a:graphicFrameLocks noGrp="1"/>
           </p:cNvGraphicFramePr>
           <p:nvPr>
             <p:ph idx="1"/>
-            <p:extLst>
-              <p:ext uri="{D42A27DB-BD31-4B8C-83A1-F6EECF244321}">
-                <p14:modId xmlns:p14="http://schemas.microsoft.com/office/powerpoint/2010/main" val="1288758002"/>
-              </p:ext>
-            </p:extLst>
           </p:nvPr>
         </p:nvGraphicFramePr>
         <p:xfrm>
@@ -11841,21 +11633,21 @@
                 <a:gridCol w="3083940">
                   <a:extLst>
                     <a:ext uri="{9D8B030D-6E8A-4147-A177-3AD203B41FA5}">
-                      <a16:colId xmlns:a16="http://schemas.microsoft.com/office/drawing/2014/main" val="1390744624"/>
+                      <a16:colId xmlns:a16="http://schemas.microsoft.com/office/drawing/2014/main" val="20000"/>
                     </a:ext>
                   </a:extLst>
                 </a:gridCol>
                 <a:gridCol w="3083940">
                   <a:extLst>
                     <a:ext uri="{9D8B030D-6E8A-4147-A177-3AD203B41FA5}">
-                      <a16:colId xmlns:a16="http://schemas.microsoft.com/office/drawing/2014/main" val="1725238201"/>
+                      <a16:colId xmlns:a16="http://schemas.microsoft.com/office/drawing/2014/main" val="20001"/>
                     </a:ext>
                   </a:extLst>
                 </a:gridCol>
                 <a:gridCol w="3084976">
                   <a:extLst>
                     <a:ext uri="{9D8B030D-6E8A-4147-A177-3AD203B41FA5}">
-                      <a16:colId xmlns:a16="http://schemas.microsoft.com/office/drawing/2014/main" val="2185620701"/>
+                      <a16:colId xmlns:a16="http://schemas.microsoft.com/office/drawing/2014/main" val="20002"/>
                     </a:ext>
                   </a:extLst>
                 </a:gridCol>
@@ -11953,7 +11745,7 @@
                 </a:tc>
                 <a:extLst>
                   <a:ext uri="{0D108BD9-81ED-4DB2-BD59-A6C34878D82A}">
-                    <a16:rowId xmlns:a16="http://schemas.microsoft.com/office/drawing/2014/main" val="1789638979"/>
+                    <a16:rowId xmlns:a16="http://schemas.microsoft.com/office/drawing/2014/main" val="10000"/>
                   </a:ext>
                 </a:extLst>
               </a:tr>
@@ -12050,7 +11842,7 @@
                 </a:tc>
                 <a:extLst>
                   <a:ext uri="{0D108BD9-81ED-4DB2-BD59-A6C34878D82A}">
-                    <a16:rowId xmlns:a16="http://schemas.microsoft.com/office/drawing/2014/main" val="3165520870"/>
+                    <a16:rowId xmlns:a16="http://schemas.microsoft.com/office/drawing/2014/main" val="10001"/>
                   </a:ext>
                 </a:extLst>
               </a:tr>
@@ -12147,7 +11939,7 @@
                 </a:tc>
                 <a:extLst>
                   <a:ext uri="{0D108BD9-81ED-4DB2-BD59-A6C34878D82A}">
-                    <a16:rowId xmlns:a16="http://schemas.microsoft.com/office/drawing/2014/main" val="3798403333"/>
+                    <a16:rowId xmlns:a16="http://schemas.microsoft.com/office/drawing/2014/main" val="10002"/>
                   </a:ext>
                 </a:extLst>
               </a:tr>
@@ -12244,7 +12036,7 @@
                 </a:tc>
                 <a:extLst>
                   <a:ext uri="{0D108BD9-81ED-4DB2-BD59-A6C34878D82A}">
-                    <a16:rowId xmlns:a16="http://schemas.microsoft.com/office/drawing/2014/main" val="1873841327"/>
+                    <a16:rowId xmlns:a16="http://schemas.microsoft.com/office/drawing/2014/main" val="10003"/>
                   </a:ext>
                 </a:extLst>
               </a:tr>
@@ -12341,7 +12133,7 @@
                 </a:tc>
                 <a:extLst>
                   <a:ext uri="{0D108BD9-81ED-4DB2-BD59-A6C34878D82A}">
-                    <a16:rowId xmlns:a16="http://schemas.microsoft.com/office/drawing/2014/main" val="697492830"/>
+                    <a16:rowId xmlns:a16="http://schemas.microsoft.com/office/drawing/2014/main" val="10004"/>
                   </a:ext>
                 </a:extLst>
               </a:tr>
@@ -12438,7 +12230,7 @@
                 </a:tc>
                 <a:extLst>
                   <a:ext uri="{0D108BD9-81ED-4DB2-BD59-A6C34878D82A}">
-                    <a16:rowId xmlns:a16="http://schemas.microsoft.com/office/drawing/2014/main" val="1405411397"/>
+                    <a16:rowId xmlns:a16="http://schemas.microsoft.com/office/drawing/2014/main" val="10005"/>
                   </a:ext>
                 </a:extLst>
               </a:tr>
@@ -12448,13 +12240,7 @@
       </p:graphicFrame>
       <p:sp>
         <p:nvSpPr>
-          <p:cNvPr id="4" name="Flowchart: Connector 3">
-            <a:extLst>
-              <a:ext uri="{FF2B5EF4-FFF2-40B4-BE49-F238E27FC236}">
-                <a16:creationId xmlns:a16="http://schemas.microsoft.com/office/drawing/2014/main" id="{F02CEC96-917F-F5DB-6181-A916C712983E}"/>
-              </a:ext>
-            </a:extLst>
-          </p:cNvPr>
+          <p:cNvPr id="4" name="Flowchart: Connector 3"/>
           <p:cNvSpPr/>
           <p:nvPr/>
         </p:nvSpPr>
@@ -12500,13 +12286,7 @@
       </p:sp>
       <p:sp>
         <p:nvSpPr>
-          <p:cNvPr id="5" name="Flowchart: Connector 4">
-            <a:extLst>
-              <a:ext uri="{FF2B5EF4-FFF2-40B4-BE49-F238E27FC236}">
-                <a16:creationId xmlns:a16="http://schemas.microsoft.com/office/drawing/2014/main" id="{74CEEE52-5885-5956-66A1-3438CD49DCE9}"/>
-              </a:ext>
-            </a:extLst>
-          </p:cNvPr>
+          <p:cNvPr id="5" name="Flowchart: Connector 4"/>
           <p:cNvSpPr/>
           <p:nvPr/>
         </p:nvSpPr>
@@ -12552,13 +12332,7 @@
       </p:sp>
       <p:grpSp>
         <p:nvGrpSpPr>
-          <p:cNvPr id="15" name="Group 14">
-            <a:extLst>
-              <a:ext uri="{FF2B5EF4-FFF2-40B4-BE49-F238E27FC236}">
-                <a16:creationId xmlns:a16="http://schemas.microsoft.com/office/drawing/2014/main" id="{454C348A-9148-34AF-2105-D3F121073431}"/>
-              </a:ext>
-            </a:extLst>
-          </p:cNvPr>
+          <p:cNvPr id="15" name="Group 14"/>
           <p:cNvGrpSpPr/>
           <p:nvPr/>
         </p:nvGrpSpPr>
@@ -12572,13 +12346,7 @@
         </p:grpSpPr>
         <p:sp>
           <p:nvSpPr>
-            <p:cNvPr id="16" name="TextBox 15">
-              <a:extLst>
-                <a:ext uri="{FF2B5EF4-FFF2-40B4-BE49-F238E27FC236}">
-                  <a16:creationId xmlns:a16="http://schemas.microsoft.com/office/drawing/2014/main" id="{5524A1A9-9EA3-46F1-6417-9E7900E3A706}"/>
-                </a:ext>
-              </a:extLst>
-            </p:cNvPr>
+            <p:cNvPr id="16" name="TextBox 15"/>
             <p:cNvSpPr txBox="1"/>
             <p:nvPr/>
           </p:nvSpPr>
@@ -12613,13 +12381,7 @@
         </p:sp>
         <p:pic>
           <p:nvPicPr>
-            <p:cNvPr id="17" name="Graphic 16">
-              <a:extLst>
-                <a:ext uri="{FF2B5EF4-FFF2-40B4-BE49-F238E27FC236}">
-                  <a16:creationId xmlns:a16="http://schemas.microsoft.com/office/drawing/2014/main" id="{0415DFB4-2B9C-8DEB-A07C-7DC3FDF58A71}"/>
-                </a:ext>
-              </a:extLst>
-            </p:cNvPr>
+            <p:cNvPr id="17" name="Graphic 16"/>
             <p:cNvPicPr>
               <a:picLocks noChangeAspect="1"/>
             </p:cNvPicPr>
@@ -12649,13 +12411,7 @@
         </p:pic>
         <p:cxnSp>
           <p:nvCxnSpPr>
-            <p:cNvPr id="18" name="Straight Connector 17">
-              <a:extLst>
-                <a:ext uri="{FF2B5EF4-FFF2-40B4-BE49-F238E27FC236}">
-                  <a16:creationId xmlns:a16="http://schemas.microsoft.com/office/drawing/2014/main" id="{195B1BB2-6152-6503-8330-06F847EFF45D}"/>
-                </a:ext>
-              </a:extLst>
-            </p:cNvPr>
+            <p:cNvPr id="18" name="Straight Connector 17"/>
             <p:cNvCxnSpPr/>
             <p:nvPr/>
           </p:nvCxnSpPr>
@@ -12685,11 +12441,6 @@
         </p:cxnSp>
       </p:grpSp>
     </p:spTree>
-    <p:extLst>
-      <p:ext uri="{BB962C8B-B14F-4D97-AF65-F5344CB8AC3E}">
-        <p14:creationId xmlns:p14="http://schemas.microsoft.com/office/powerpoint/2010/main" val="1648760023"/>
-      </p:ext>
-    </p:extLst>
   </p:cSld>
   <p:clrMapOvr>
     <a:masterClrMapping/>
@@ -12719,13 +12470,7 @@
       </p:grpSpPr>
       <p:sp>
         <p:nvSpPr>
-          <p:cNvPr id="2" name="Title 1">
-            <a:extLst>
-              <a:ext uri="{FF2B5EF4-FFF2-40B4-BE49-F238E27FC236}">
-                <a16:creationId xmlns:a16="http://schemas.microsoft.com/office/drawing/2014/main" id="{5310622B-C361-6BC6-BBA9-9CB13333976E}"/>
-              </a:ext>
-            </a:extLst>
-          </p:cNvPr>
+          <p:cNvPr id="2" name="Title 1"/>
           <p:cNvSpPr>
             <a:spLocks noGrp="1"/>
           </p:cNvSpPr>
@@ -12753,23 +12498,12 @@
       </p:sp>
       <p:graphicFrame>
         <p:nvGraphicFramePr>
-          <p:cNvPr id="13" name="Content Placeholder 12">
-            <a:extLst>
-              <a:ext uri="{FF2B5EF4-FFF2-40B4-BE49-F238E27FC236}">
-                <a16:creationId xmlns:a16="http://schemas.microsoft.com/office/drawing/2014/main" id="{84EA5D61-FDBD-B0F1-02CE-FEA10971D1DB}"/>
-              </a:ext>
-            </a:extLst>
-          </p:cNvPr>
+          <p:cNvPr id="13" name="Content Placeholder 12"/>
           <p:cNvGraphicFramePr>
             <a:graphicFrameLocks noGrp="1"/>
           </p:cNvGraphicFramePr>
           <p:nvPr>
             <p:ph idx="1"/>
-            <p:extLst>
-              <p:ext uri="{D42A27DB-BD31-4B8C-83A1-F6EECF244321}">
-                <p14:modId xmlns:p14="http://schemas.microsoft.com/office/powerpoint/2010/main" val="4119796177"/>
-              </p:ext>
-            </p:extLst>
           </p:nvPr>
         </p:nvGraphicFramePr>
         <p:xfrm>
@@ -12786,21 +12520,21 @@
                 <a:gridCol w="3098472">
                   <a:extLst>
                     <a:ext uri="{9D8B030D-6E8A-4147-A177-3AD203B41FA5}">
-                      <a16:colId xmlns:a16="http://schemas.microsoft.com/office/drawing/2014/main" val="3446254611"/>
+                      <a16:colId xmlns:a16="http://schemas.microsoft.com/office/drawing/2014/main" val="20000"/>
                     </a:ext>
                   </a:extLst>
                 </a:gridCol>
                 <a:gridCol w="3098472">
                   <a:extLst>
                     <a:ext uri="{9D8B030D-6E8A-4147-A177-3AD203B41FA5}">
-                      <a16:colId xmlns:a16="http://schemas.microsoft.com/office/drawing/2014/main" val="4042224731"/>
+                      <a16:colId xmlns:a16="http://schemas.microsoft.com/office/drawing/2014/main" val="20001"/>
                     </a:ext>
                   </a:extLst>
                 </a:gridCol>
                 <a:gridCol w="3504762">
                   <a:extLst>
                     <a:ext uri="{9D8B030D-6E8A-4147-A177-3AD203B41FA5}">
-                      <a16:colId xmlns:a16="http://schemas.microsoft.com/office/drawing/2014/main" val="1094385661"/>
+                      <a16:colId xmlns:a16="http://schemas.microsoft.com/office/drawing/2014/main" val="20002"/>
                     </a:ext>
                   </a:extLst>
                 </a:gridCol>
@@ -12878,7 +12612,7 @@
                 </a:tc>
                 <a:extLst>
                   <a:ext uri="{0D108BD9-81ED-4DB2-BD59-A6C34878D82A}">
-                    <a16:rowId xmlns:a16="http://schemas.microsoft.com/office/drawing/2014/main" val="1454020994"/>
+                    <a16:rowId xmlns:a16="http://schemas.microsoft.com/office/drawing/2014/main" val="10000"/>
                   </a:ext>
                 </a:extLst>
               </a:tr>
@@ -12948,7 +12682,7 @@
                 </a:tc>
                 <a:extLst>
                   <a:ext uri="{0D108BD9-81ED-4DB2-BD59-A6C34878D82A}">
-                    <a16:rowId xmlns:a16="http://schemas.microsoft.com/office/drawing/2014/main" val="1821685490"/>
+                    <a16:rowId xmlns:a16="http://schemas.microsoft.com/office/drawing/2014/main" val="10001"/>
                   </a:ext>
                 </a:extLst>
               </a:tr>
@@ -13045,7 +12779,7 @@
                 </a:tc>
                 <a:extLst>
                   <a:ext uri="{0D108BD9-81ED-4DB2-BD59-A6C34878D82A}">
-                    <a16:rowId xmlns:a16="http://schemas.microsoft.com/office/drawing/2014/main" val="1153858159"/>
+                    <a16:rowId xmlns:a16="http://schemas.microsoft.com/office/drawing/2014/main" val="10002"/>
                   </a:ext>
                 </a:extLst>
               </a:tr>
@@ -13142,7 +12876,7 @@
                 </a:tc>
                 <a:extLst>
                   <a:ext uri="{0D108BD9-81ED-4DB2-BD59-A6C34878D82A}">
-                    <a16:rowId xmlns:a16="http://schemas.microsoft.com/office/drawing/2014/main" val="2315372441"/>
+                    <a16:rowId xmlns:a16="http://schemas.microsoft.com/office/drawing/2014/main" val="10003"/>
                   </a:ext>
                 </a:extLst>
               </a:tr>
@@ -13239,7 +12973,7 @@
                 </a:tc>
                 <a:extLst>
                   <a:ext uri="{0D108BD9-81ED-4DB2-BD59-A6C34878D82A}">
-                    <a16:rowId xmlns:a16="http://schemas.microsoft.com/office/drawing/2014/main" val="3459691240"/>
+                    <a16:rowId xmlns:a16="http://schemas.microsoft.com/office/drawing/2014/main" val="10004"/>
                   </a:ext>
                 </a:extLst>
               </a:tr>
@@ -13336,7 +13070,7 @@
                 </a:tc>
                 <a:extLst>
                   <a:ext uri="{0D108BD9-81ED-4DB2-BD59-A6C34878D82A}">
-                    <a16:rowId xmlns:a16="http://schemas.microsoft.com/office/drawing/2014/main" val="3491921512"/>
+                    <a16:rowId xmlns:a16="http://schemas.microsoft.com/office/drawing/2014/main" val="10005"/>
                   </a:ext>
                 </a:extLst>
               </a:tr>
@@ -13433,7 +13167,7 @@
                 </a:tc>
                 <a:extLst>
                   <a:ext uri="{0D108BD9-81ED-4DB2-BD59-A6C34878D82A}">
-                    <a16:rowId xmlns:a16="http://schemas.microsoft.com/office/drawing/2014/main" val="3039440122"/>
+                    <a16:rowId xmlns:a16="http://schemas.microsoft.com/office/drawing/2014/main" val="10006"/>
                   </a:ext>
                 </a:extLst>
               </a:tr>
@@ -13530,7 +13264,7 @@
                 </a:tc>
                 <a:extLst>
                   <a:ext uri="{0D108BD9-81ED-4DB2-BD59-A6C34878D82A}">
-                    <a16:rowId xmlns:a16="http://schemas.microsoft.com/office/drawing/2014/main" val="2400645505"/>
+                    <a16:rowId xmlns:a16="http://schemas.microsoft.com/office/drawing/2014/main" val="10007"/>
                   </a:ext>
                 </a:extLst>
               </a:tr>
@@ -13540,13 +13274,7 @@
       </p:graphicFrame>
       <p:grpSp>
         <p:nvGrpSpPr>
-          <p:cNvPr id="4" name="Group 3">
-            <a:extLst>
-              <a:ext uri="{FF2B5EF4-FFF2-40B4-BE49-F238E27FC236}">
-                <a16:creationId xmlns:a16="http://schemas.microsoft.com/office/drawing/2014/main" id="{CB0AA06F-6C54-6971-B5AE-1727DC0183B6}"/>
-              </a:ext>
-            </a:extLst>
-          </p:cNvPr>
+          <p:cNvPr id="4" name="Group 3"/>
           <p:cNvGrpSpPr/>
           <p:nvPr/>
         </p:nvGrpSpPr>
@@ -13560,13 +13288,7 @@
         </p:grpSpPr>
         <p:sp>
           <p:nvSpPr>
-            <p:cNvPr id="5" name="TextBox 4">
-              <a:extLst>
-                <a:ext uri="{FF2B5EF4-FFF2-40B4-BE49-F238E27FC236}">
-                  <a16:creationId xmlns:a16="http://schemas.microsoft.com/office/drawing/2014/main" id="{E85C4D3C-49C5-A6F7-E081-960C801F7665}"/>
-                </a:ext>
-              </a:extLst>
-            </p:cNvPr>
+            <p:cNvPr id="5" name="TextBox 4"/>
             <p:cNvSpPr txBox="1"/>
             <p:nvPr/>
           </p:nvSpPr>
@@ -13601,13 +13323,7 @@
         </p:sp>
         <p:pic>
           <p:nvPicPr>
-            <p:cNvPr id="6" name="Graphic 5">
-              <a:extLst>
-                <a:ext uri="{FF2B5EF4-FFF2-40B4-BE49-F238E27FC236}">
-                  <a16:creationId xmlns:a16="http://schemas.microsoft.com/office/drawing/2014/main" id="{43024A23-B966-99F0-2932-F8041F7DA81D}"/>
-                </a:ext>
-              </a:extLst>
-            </p:cNvPr>
+            <p:cNvPr id="6" name="Graphic 5"/>
             <p:cNvPicPr>
               <a:picLocks noChangeAspect="1"/>
             </p:cNvPicPr>
@@ -13637,13 +13353,7 @@
         </p:pic>
         <p:cxnSp>
           <p:nvCxnSpPr>
-            <p:cNvPr id="7" name="Straight Connector 6">
-              <a:extLst>
-                <a:ext uri="{FF2B5EF4-FFF2-40B4-BE49-F238E27FC236}">
-                  <a16:creationId xmlns:a16="http://schemas.microsoft.com/office/drawing/2014/main" id="{1B1A33C0-487C-9565-F78C-5640D9A50B14}"/>
-                </a:ext>
-              </a:extLst>
-            </p:cNvPr>
+            <p:cNvPr id="7" name="Straight Connector 6"/>
             <p:cNvCxnSpPr/>
             <p:nvPr/>
           </p:nvCxnSpPr>
@@ -13674,13 +13384,7 @@
       </p:grpSp>
       <p:sp>
         <p:nvSpPr>
-          <p:cNvPr id="8" name="Flowchart: Connector 7">
-            <a:extLst>
-              <a:ext uri="{FF2B5EF4-FFF2-40B4-BE49-F238E27FC236}">
-                <a16:creationId xmlns:a16="http://schemas.microsoft.com/office/drawing/2014/main" id="{BB093629-D47A-7CB9-6C09-21BA28FC3426}"/>
-              </a:ext>
-            </a:extLst>
-          </p:cNvPr>
+          <p:cNvPr id="8" name="Flowchart: Connector 7"/>
           <p:cNvSpPr/>
           <p:nvPr/>
         </p:nvSpPr>
@@ -13726,13 +13430,7 @@
       </p:sp>
       <p:sp>
         <p:nvSpPr>
-          <p:cNvPr id="10" name="Flowchart: Connector 9">
-            <a:extLst>
-              <a:ext uri="{FF2B5EF4-FFF2-40B4-BE49-F238E27FC236}">
-                <a16:creationId xmlns:a16="http://schemas.microsoft.com/office/drawing/2014/main" id="{558BFB37-5A63-C8D0-421D-BBBD1A0413D3}"/>
-              </a:ext>
-            </a:extLst>
-          </p:cNvPr>
+          <p:cNvPr id="10" name="Flowchart: Connector 9"/>
           <p:cNvSpPr/>
           <p:nvPr/>
         </p:nvSpPr>
@@ -13778,13 +13476,7 @@
       </p:sp>
       <p:sp>
         <p:nvSpPr>
-          <p:cNvPr id="11" name="Flowchart: Connector 10">
-            <a:extLst>
-              <a:ext uri="{FF2B5EF4-FFF2-40B4-BE49-F238E27FC236}">
-                <a16:creationId xmlns:a16="http://schemas.microsoft.com/office/drawing/2014/main" id="{5E2D424A-23D2-21A0-A20A-3103B805FD45}"/>
-              </a:ext>
-            </a:extLst>
-          </p:cNvPr>
+          <p:cNvPr id="11" name="Flowchart: Connector 10"/>
           <p:cNvSpPr/>
           <p:nvPr/>
         </p:nvSpPr>
@@ -13923,11 +13615,6 @@
         </p:txBody>
       </p:sp>
     </p:spTree>
-    <p:extLst>
-      <p:ext uri="{BB962C8B-B14F-4D97-AF65-F5344CB8AC3E}">
-        <p14:creationId xmlns:p14="http://schemas.microsoft.com/office/powerpoint/2010/main" val="1009010750"/>
-      </p:ext>
-    </p:extLst>
   </p:cSld>
   <p:clrMapOvr>
     <a:masterClrMapping/>
@@ -13943,13 +13630,7 @@
   <p:cSld>
     <p:spTree>
       <p:nvGrpSpPr>
-        <p:cNvPr id="1" name="">
-          <a:extLst>
-            <a:ext uri="{FF2B5EF4-FFF2-40B4-BE49-F238E27FC236}">
-              <a16:creationId xmlns:a16="http://schemas.microsoft.com/office/drawing/2014/main" id="{8F3DD817-0C9A-83B2-07E2-52685EA0CA23}"/>
-            </a:ext>
-          </a:extLst>
-        </p:cNvPr>
+        <p:cNvPr id="1" name=""/>
         <p:cNvGrpSpPr/>
         <p:nvPr/>
       </p:nvGrpSpPr>
@@ -13963,13 +13644,7 @@
       </p:grpSpPr>
       <p:grpSp>
         <p:nvGrpSpPr>
-          <p:cNvPr id="20" name="Group 19">
-            <a:extLst>
-              <a:ext uri="{FF2B5EF4-FFF2-40B4-BE49-F238E27FC236}">
-                <a16:creationId xmlns:a16="http://schemas.microsoft.com/office/drawing/2014/main" id="{7E2D6C21-5F23-FE6A-46C8-637BD7293947}"/>
-              </a:ext>
-            </a:extLst>
-          </p:cNvPr>
+          <p:cNvPr id="20" name="Group 19"/>
           <p:cNvGrpSpPr/>
           <p:nvPr/>
         </p:nvGrpSpPr>
@@ -13983,13 +13658,7 @@
         </p:grpSpPr>
         <p:sp>
           <p:nvSpPr>
-            <p:cNvPr id="4" name="Rectangle 3">
-              <a:extLst>
-                <a:ext uri="{FF2B5EF4-FFF2-40B4-BE49-F238E27FC236}">
-                  <a16:creationId xmlns:a16="http://schemas.microsoft.com/office/drawing/2014/main" id="{850668FB-C0DE-2873-C921-894C7C9EF43B}"/>
-                </a:ext>
-              </a:extLst>
-            </p:cNvPr>
+            <p:cNvPr id="4" name="Rectangle 3"/>
             <p:cNvSpPr/>
             <p:nvPr/>
           </p:nvSpPr>
@@ -14035,13 +13704,7 @@
         </p:sp>
         <p:sp>
           <p:nvSpPr>
-            <p:cNvPr id="10" name="Rectangle 9">
-              <a:extLst>
-                <a:ext uri="{FF2B5EF4-FFF2-40B4-BE49-F238E27FC236}">
-                  <a16:creationId xmlns:a16="http://schemas.microsoft.com/office/drawing/2014/main" id="{B8004D42-ABE9-D347-A138-5607C5AFBED4}"/>
-                </a:ext>
-              </a:extLst>
-            </p:cNvPr>
+            <p:cNvPr id="10" name="Rectangle 9"/>
             <p:cNvSpPr/>
             <p:nvPr/>
           </p:nvSpPr>
@@ -14088,13 +13751,7 @@
       </p:grpSp>
       <p:sp>
         <p:nvSpPr>
-          <p:cNvPr id="21" name="TextBox 20">
-            <a:extLst>
-              <a:ext uri="{FF2B5EF4-FFF2-40B4-BE49-F238E27FC236}">
-                <a16:creationId xmlns:a16="http://schemas.microsoft.com/office/drawing/2014/main" id="{1A1A238D-BB1A-1DF7-5EAD-942C093B5C08}"/>
-              </a:ext>
-            </a:extLst>
-          </p:cNvPr>
+          <p:cNvPr id="21" name="TextBox 20"/>
           <p:cNvSpPr txBox="1"/>
           <p:nvPr/>
         </p:nvSpPr>
@@ -14140,13 +13797,7 @@
       </p:sp>
       <p:sp>
         <p:nvSpPr>
-          <p:cNvPr id="24" name="TextBox 23">
-            <a:extLst>
-              <a:ext uri="{FF2B5EF4-FFF2-40B4-BE49-F238E27FC236}">
-                <a16:creationId xmlns:a16="http://schemas.microsoft.com/office/drawing/2014/main" id="{424DC5ED-E3E1-5D2F-5A65-894D55EE8B60}"/>
-              </a:ext>
-            </a:extLst>
-          </p:cNvPr>
+          <p:cNvPr id="24" name="TextBox 23"/>
           <p:cNvSpPr txBox="1"/>
           <p:nvPr/>
         </p:nvSpPr>
@@ -14190,13 +13841,7 @@
       </p:sp>
       <p:sp>
         <p:nvSpPr>
-          <p:cNvPr id="27" name="TextBox 26">
-            <a:extLst>
-              <a:ext uri="{FF2B5EF4-FFF2-40B4-BE49-F238E27FC236}">
-                <a16:creationId xmlns:a16="http://schemas.microsoft.com/office/drawing/2014/main" id="{1AAE1F59-2710-4E73-B70C-819413314C80}"/>
-              </a:ext>
-            </a:extLst>
-          </p:cNvPr>
+          <p:cNvPr id="27" name="TextBox 26"/>
           <p:cNvSpPr txBox="1"/>
           <p:nvPr/>
         </p:nvSpPr>
@@ -14236,13 +13881,7 @@
       </p:sp>
       <p:sp>
         <p:nvSpPr>
-          <p:cNvPr id="2" name="TextBox 1">
-            <a:extLst>
-              <a:ext uri="{FF2B5EF4-FFF2-40B4-BE49-F238E27FC236}">
-                <a16:creationId xmlns:a16="http://schemas.microsoft.com/office/drawing/2014/main" id="{ED2F462E-D943-42F6-B9AB-4EEBC1E44D51}"/>
-              </a:ext>
-            </a:extLst>
-          </p:cNvPr>
+          <p:cNvPr id="2" name="TextBox 1"/>
           <p:cNvSpPr txBox="1"/>
           <p:nvPr/>
         </p:nvSpPr>
@@ -14271,13 +13910,7 @@
       </p:sp>
       <p:grpSp>
         <p:nvGrpSpPr>
-          <p:cNvPr id="17" name="Group 16">
-            <a:extLst>
-              <a:ext uri="{FF2B5EF4-FFF2-40B4-BE49-F238E27FC236}">
-                <a16:creationId xmlns:a16="http://schemas.microsoft.com/office/drawing/2014/main" id="{DAC823BB-6B2F-B4F6-47E3-4FFDCDFAED88}"/>
-              </a:ext>
-            </a:extLst>
-          </p:cNvPr>
+          <p:cNvPr id="17" name="Group 16"/>
           <p:cNvGrpSpPr/>
           <p:nvPr/>
         </p:nvGrpSpPr>
@@ -14291,13 +13924,7 @@
         </p:grpSpPr>
         <p:sp>
           <p:nvSpPr>
-            <p:cNvPr id="18" name="TextBox 17">
-              <a:extLst>
-                <a:ext uri="{FF2B5EF4-FFF2-40B4-BE49-F238E27FC236}">
-                  <a16:creationId xmlns:a16="http://schemas.microsoft.com/office/drawing/2014/main" id="{316A94CE-24C3-FA4D-37A2-349BF4F0D6D2}"/>
-                </a:ext>
-              </a:extLst>
-            </p:cNvPr>
+            <p:cNvPr id="18" name="TextBox 17"/>
             <p:cNvSpPr txBox="1"/>
             <p:nvPr/>
           </p:nvSpPr>
@@ -14332,13 +13959,7 @@
         </p:sp>
         <p:pic>
           <p:nvPicPr>
-            <p:cNvPr id="19" name="Graphic 18">
-              <a:extLst>
-                <a:ext uri="{FF2B5EF4-FFF2-40B4-BE49-F238E27FC236}">
-                  <a16:creationId xmlns:a16="http://schemas.microsoft.com/office/drawing/2014/main" id="{753CF436-093F-67CD-A9E7-D8D374E10E97}"/>
-                </a:ext>
-              </a:extLst>
-            </p:cNvPr>
+            <p:cNvPr id="19" name="Graphic 18"/>
             <p:cNvPicPr>
               <a:picLocks noChangeAspect="1"/>
             </p:cNvPicPr>
@@ -14368,13 +13989,7 @@
         </p:pic>
         <p:cxnSp>
           <p:nvCxnSpPr>
-            <p:cNvPr id="22" name="Straight Connector 21">
-              <a:extLst>
-                <a:ext uri="{FF2B5EF4-FFF2-40B4-BE49-F238E27FC236}">
-                  <a16:creationId xmlns:a16="http://schemas.microsoft.com/office/drawing/2014/main" id="{E8E9420E-5C17-032D-AB00-A0171B6EFDCE}"/>
-                </a:ext>
-              </a:extLst>
-            </p:cNvPr>
+            <p:cNvPr id="22" name="Straight Connector 21"/>
             <p:cNvCxnSpPr/>
             <p:nvPr/>
           </p:nvCxnSpPr>
@@ -14404,11 +14019,6 @@
         </p:cxnSp>
       </p:grpSp>
     </p:spTree>
-    <p:extLst>
-      <p:ext uri="{BB962C8B-B14F-4D97-AF65-F5344CB8AC3E}">
-        <p14:creationId xmlns:p14="http://schemas.microsoft.com/office/powerpoint/2010/main" val="688460911"/>
-      </p:ext>
-    </p:extLst>
   </p:cSld>
   <p:clrMapOvr>
     <a:masterClrMapping/>
@@ -14441,7 +14051,7 @@
           <p:cNvPr id="2" name="Title 1">
             <a:extLst>
               <a:ext uri="{FF2B5EF4-FFF2-40B4-BE49-F238E27FC236}">
-                <a16:creationId xmlns:a16="http://schemas.microsoft.com/office/drawing/2014/main" id="{69B65925-97BA-7ADC-D3CF-0EF71362CC99}"/>
+                <a16:creationId xmlns:a16="http://schemas.microsoft.com/office/drawing/2014/main" id="{6DBC6C21-2C8E-C068-D844-4034835155D4}"/>
               </a:ext>
             </a:extLst>
           </p:cNvPr>
@@ -14454,211 +14064,1118 @@
         </p:nvSpPr>
         <p:spPr>
           <a:xfrm>
-            <a:off x="718457" y="0"/>
-            <a:ext cx="10515600" cy="1121229"/>
+            <a:off x="838200" y="160078"/>
+            <a:ext cx="10515600" cy="615777"/>
           </a:xfrm>
         </p:spPr>
         <p:txBody>
-          <a:bodyPr/>
+          <a:bodyPr>
+            <a:noAutofit/>
+          </a:bodyPr>
           <a:lstStyle/>
           <a:p>
             <a:pPr algn="ctr"/>
             <a:r>
-              <a:rPr lang="en-US" b="1" dirty="0"/>
-              <a:t>Postman API for Output</a:t>
+              <a:rPr lang="en-IN" b="1" dirty="0"/>
+              <a:t>END POINTS</a:t>
             </a:r>
-            <a:endParaRPr lang="en-IN" b="1" dirty="0"/>
           </a:p>
         </p:txBody>
       </p:sp>
-      <p:pic>
-        <p:nvPicPr>
+      <p:graphicFrame>
+        <p:nvGraphicFramePr>
           <p:cNvPr id="5" name="Content Placeholder 4">
             <a:extLst>
               <a:ext uri="{FF2B5EF4-FFF2-40B4-BE49-F238E27FC236}">
-                <a16:creationId xmlns:a16="http://schemas.microsoft.com/office/drawing/2014/main" id="{7F9A5614-7D60-CAEF-4B21-70253FA4F005}"/>
+                <a16:creationId xmlns:a16="http://schemas.microsoft.com/office/drawing/2014/main" id="{F57CCF66-A148-4A1E-0C70-A0AC0DC1CC20}"/>
               </a:ext>
             </a:extLst>
           </p:cNvPr>
-          <p:cNvPicPr>
-            <a:picLocks noGrp="1" noChangeAspect="1"/>
-          </p:cNvPicPr>
+          <p:cNvGraphicFramePr>
+            <a:graphicFrameLocks noGrp="1"/>
+          </p:cNvGraphicFramePr>
           <p:nvPr>
             <p:ph idx="1"/>
+            <p:extLst>
+              <p:ext uri="{D42A27DB-BD31-4B8C-83A1-F6EECF244321}">
+                <p14:modId xmlns:p14="http://schemas.microsoft.com/office/powerpoint/2010/main" val="1047992781"/>
+              </p:ext>
+            </p:extLst>
           </p:nvPr>
-        </p:nvPicPr>
-        <p:blipFill>
-          <a:blip r:embed="rId2">
-            <a:extLst>
-              <a:ext uri="{28A0092B-C50C-407E-A947-70E740481C1C}">
-                <a14:useLocalDpi xmlns:a14="http://schemas.microsoft.com/office/drawing/2010/main" val="0"/>
-              </a:ext>
-            </a:extLst>
-          </a:blip>
-          <a:stretch>
-            <a:fillRect/>
-          </a:stretch>
-        </p:blipFill>
-        <p:spPr>
-          <a:xfrm>
-            <a:off x="718457" y="1367745"/>
-            <a:ext cx="5377543" cy="4351337"/>
-          </a:xfrm>
-        </p:spPr>
-      </p:pic>
-      <p:pic>
-        <p:nvPicPr>
-          <p:cNvPr id="7" name="Picture 6">
-            <a:extLst>
-              <a:ext uri="{FF2B5EF4-FFF2-40B4-BE49-F238E27FC236}">
-                <a16:creationId xmlns:a16="http://schemas.microsoft.com/office/drawing/2014/main" id="{16D73BAC-F9EF-D807-5502-048B4E99F2C1}"/>
-              </a:ext>
-            </a:extLst>
-          </p:cNvPr>
-          <p:cNvPicPr>
-            <a:picLocks noChangeAspect="1"/>
-          </p:cNvPicPr>
-          <p:nvPr/>
-        </p:nvPicPr>
-        <p:blipFill>
-          <a:blip r:embed="rId3">
-            <a:extLst>
-              <a:ext uri="{28A0092B-C50C-407E-A947-70E740481C1C}">
-                <a14:useLocalDpi xmlns:a14="http://schemas.microsoft.com/office/drawing/2010/main" val="0"/>
-              </a:ext>
-            </a:extLst>
-          </a:blip>
-          <a:stretch>
-            <a:fillRect/>
-          </a:stretch>
-        </p:blipFill>
-        <p:spPr>
-          <a:xfrm>
-            <a:off x="6181640" y="1405551"/>
-            <a:ext cx="5052417" cy="4313531"/>
-          </a:xfrm>
-          <a:prstGeom prst="rect">
-            <a:avLst/>
-          </a:prstGeom>
-        </p:spPr>
-      </p:pic>
-      <p:sp>
-        <p:nvSpPr>
-          <p:cNvPr id="8" name="Rectangle 7">
-            <a:extLst>
-              <a:ext uri="{FF2B5EF4-FFF2-40B4-BE49-F238E27FC236}">
-                <a16:creationId xmlns:a16="http://schemas.microsoft.com/office/drawing/2014/main" id="{C590E896-98A3-DCDF-98E9-C246AD886770}"/>
-              </a:ext>
-            </a:extLst>
-          </p:cNvPr>
-          <p:cNvSpPr/>
-          <p:nvPr/>
-        </p:nvSpPr>
-        <p:spPr>
-          <a:xfrm>
-            <a:off x="175532" y="4895169"/>
-            <a:ext cx="542925" cy="1647826"/>
-          </a:xfrm>
-          <a:prstGeom prst="rect">
-            <a:avLst/>
-          </a:prstGeom>
-          <a:solidFill>
-            <a:srgbClr val="23AAAD"/>
-          </a:solidFill>
-          <a:ln>
-            <a:noFill/>
-          </a:ln>
-        </p:spPr>
-        <p:style>
-          <a:lnRef idx="2">
-            <a:schemeClr val="accent1">
-              <a:shade val="15000"/>
-            </a:schemeClr>
-          </a:lnRef>
-          <a:fillRef idx="1">
-            <a:schemeClr val="accent1"/>
-          </a:fillRef>
-          <a:effectRef idx="0">
-            <a:schemeClr val="accent1"/>
-          </a:effectRef>
-          <a:fontRef idx="minor">
-            <a:schemeClr val="lt1"/>
-          </a:fontRef>
-        </p:style>
-        <p:txBody>
-          <a:bodyPr rtlCol="0" anchor="ctr"/>
-          <a:lstStyle/>
-          <a:p>
-            <a:pPr algn="ctr"/>
-            <a:endParaRPr lang="en-US"/>
-          </a:p>
-        </p:txBody>
-      </p:sp>
-      <p:sp>
-        <p:nvSpPr>
-          <p:cNvPr id="9" name="Rectangle 8">
-            <a:extLst>
-              <a:ext uri="{FF2B5EF4-FFF2-40B4-BE49-F238E27FC236}">
-                <a16:creationId xmlns:a16="http://schemas.microsoft.com/office/drawing/2014/main" id="{FEDB43D6-1C99-741E-0D0C-27E046AADF93}"/>
-              </a:ext>
-            </a:extLst>
-          </p:cNvPr>
-          <p:cNvSpPr/>
-          <p:nvPr/>
-        </p:nvSpPr>
-        <p:spPr>
-          <a:xfrm>
-            <a:off x="11234057" y="291840"/>
-            <a:ext cx="548368" cy="1943100"/>
-          </a:xfrm>
-          <a:prstGeom prst="rect">
-            <a:avLst/>
-          </a:prstGeom>
-          <a:solidFill>
-            <a:srgbClr val="F39E34"/>
-          </a:solidFill>
-          <a:ln>
-            <a:noFill/>
-          </a:ln>
-        </p:spPr>
-        <p:style>
-          <a:lnRef idx="2">
-            <a:schemeClr val="accent1">
-              <a:shade val="15000"/>
-            </a:schemeClr>
-          </a:lnRef>
-          <a:fillRef idx="1">
-            <a:schemeClr val="accent1"/>
-          </a:fillRef>
-          <a:effectRef idx="0">
-            <a:schemeClr val="accent1"/>
-          </a:effectRef>
-          <a:fontRef idx="minor">
-            <a:schemeClr val="lt1"/>
-          </a:fontRef>
-        </p:style>
-        <p:txBody>
-          <a:bodyPr rtlCol="0" anchor="ctr"/>
-          <a:lstStyle/>
-          <a:p>
-            <a:pPr algn="ctr"/>
-            <a:endParaRPr lang="en-US"/>
-          </a:p>
-        </p:txBody>
-      </p:sp>
+        </p:nvGraphicFramePr>
+        <p:xfrm>
+          <a:off x="947652" y="886690"/>
+          <a:ext cx="10651374" cy="5519648"/>
+        </p:xfrm>
+        <a:graphic>
+          <a:graphicData uri="http://schemas.openxmlformats.org/drawingml/2006/table">
+            <a:tbl>
+              <a:tblPr/>
+              <a:tblGrid>
+                <a:gridCol w="3550458">
+                  <a:extLst>
+                    <a:ext uri="{9D8B030D-6E8A-4147-A177-3AD203B41FA5}">
+                      <a16:colId xmlns:a16="http://schemas.microsoft.com/office/drawing/2014/main" val="33623323"/>
+                    </a:ext>
+                  </a:extLst>
+                </a:gridCol>
+                <a:gridCol w="3550458">
+                  <a:extLst>
+                    <a:ext uri="{9D8B030D-6E8A-4147-A177-3AD203B41FA5}">
+                      <a16:colId xmlns:a16="http://schemas.microsoft.com/office/drawing/2014/main" val="1693928908"/>
+                    </a:ext>
+                  </a:extLst>
+                </a:gridCol>
+                <a:gridCol w="3550458">
+                  <a:extLst>
+                    <a:ext uri="{9D8B030D-6E8A-4147-A177-3AD203B41FA5}">
+                      <a16:colId xmlns:a16="http://schemas.microsoft.com/office/drawing/2014/main" val="1078034027"/>
+                    </a:ext>
+                  </a:extLst>
+                </a:gridCol>
+              </a:tblGrid>
+              <a:tr h="344148">
+                <a:tc>
+                  <a:txBody>
+                    <a:bodyPr/>
+                    <a:lstStyle/>
+                    <a:p>
+                      <a:pPr>
+                        <a:buNone/>
+                      </a:pPr>
+                      <a:r>
+                        <a:rPr lang="en-IN" sz="1600" b="1" dirty="0"/>
+                        <a:t>Method</a:t>
+                      </a:r>
+                    </a:p>
+                  </a:txBody>
+                  <a:tcPr marL="79201" marR="79201" marT="39601" marB="39601" anchor="ctr">
+                    <a:lnL>
+                      <a:noFill/>
+                    </a:lnL>
+                    <a:lnR>
+                      <a:noFill/>
+                    </a:lnR>
+                    <a:lnT>
+                      <a:noFill/>
+                    </a:lnT>
+                    <a:lnB>
+                      <a:noFill/>
+                    </a:lnB>
+                    <a:noFill/>
+                  </a:tcPr>
+                </a:tc>
+                <a:tc>
+                  <a:txBody>
+                    <a:bodyPr/>
+                    <a:lstStyle/>
+                    <a:p>
+                      <a:pPr>
+                        <a:buNone/>
+                      </a:pPr>
+                      <a:r>
+                        <a:rPr lang="en-IN" sz="1600" b="1" dirty="0"/>
+                        <a:t>Endpoint</a:t>
+                      </a:r>
+                    </a:p>
+                  </a:txBody>
+                  <a:tcPr marL="79201" marR="79201" marT="39601" marB="39601" anchor="ctr">
+                    <a:lnL>
+                      <a:noFill/>
+                    </a:lnL>
+                    <a:lnR>
+                      <a:noFill/>
+                    </a:lnR>
+                    <a:lnT>
+                      <a:noFill/>
+                    </a:lnT>
+                    <a:lnB>
+                      <a:noFill/>
+                    </a:lnB>
+                    <a:noFill/>
+                  </a:tcPr>
+                </a:tc>
+                <a:tc>
+                  <a:txBody>
+                    <a:bodyPr/>
+                    <a:lstStyle/>
+                    <a:p>
+                      <a:pPr>
+                        <a:buNone/>
+                      </a:pPr>
+                      <a:r>
+                        <a:rPr lang="en-IN" sz="1600" b="1" dirty="0"/>
+                        <a:t>Purpose</a:t>
+                      </a:r>
+                    </a:p>
+                  </a:txBody>
+                  <a:tcPr marL="79201" marR="79201" marT="39601" marB="39601" anchor="ctr">
+                    <a:lnL>
+                      <a:noFill/>
+                    </a:lnL>
+                    <a:lnR>
+                      <a:noFill/>
+                    </a:lnR>
+                    <a:lnT>
+                      <a:noFill/>
+                    </a:lnT>
+                    <a:lnB>
+                      <a:noFill/>
+                    </a:lnB>
+                    <a:noFill/>
+                  </a:tcPr>
+                </a:tc>
+                <a:extLst>
+                  <a:ext uri="{0D108BD9-81ED-4DB2-BD59-A6C34878D82A}">
+                    <a16:rowId xmlns:a16="http://schemas.microsoft.com/office/drawing/2014/main" val="1853335303"/>
+                  </a:ext>
+                </a:extLst>
+              </a:tr>
+              <a:tr h="603919">
+                <a:tc>
+                  <a:txBody>
+                    <a:bodyPr/>
+                    <a:lstStyle/>
+                    <a:p>
+                      <a:pPr>
+                        <a:buNone/>
+                      </a:pPr>
+                      <a:r>
+                        <a:rPr lang="en-IN" sz="1600" b="1" dirty="0"/>
+                        <a:t>GET</a:t>
+                      </a:r>
+                      <a:endParaRPr lang="en-IN" sz="1600" dirty="0"/>
+                    </a:p>
+                  </a:txBody>
+                  <a:tcPr marL="79201" marR="79201" marT="39601" marB="39601" anchor="ctr">
+                    <a:lnL>
+                      <a:noFill/>
+                    </a:lnL>
+                    <a:lnR>
+                      <a:noFill/>
+                    </a:lnR>
+                    <a:lnT>
+                      <a:noFill/>
+                    </a:lnT>
+                    <a:lnB>
+                      <a:noFill/>
+                    </a:lnB>
+                    <a:noFill/>
+                  </a:tcPr>
+                </a:tc>
+                <a:tc>
+                  <a:txBody>
+                    <a:bodyPr/>
+                    <a:lstStyle/>
+                    <a:p>
+                      <a:pPr>
+                        <a:buNone/>
+                      </a:pPr>
+                      <a:r>
+                        <a:rPr lang="en-IN" sz="1600">
+                          <a:latin typeface="Courier New" panose="02070309020205020404" pitchFamily="49" charset="0"/>
+                        </a:rPr>
+                        <a:t>/api/v1/locations</a:t>
+                      </a:r>
+                      <a:endParaRPr lang="en-IN" sz="1600"/>
+                    </a:p>
+                  </a:txBody>
+                  <a:tcPr marL="79201" marR="79201" marT="39601" marB="39601" anchor="ctr">
+                    <a:lnL>
+                      <a:noFill/>
+                    </a:lnL>
+                    <a:lnR>
+                      <a:noFill/>
+                    </a:lnR>
+                    <a:lnT>
+                      <a:noFill/>
+                    </a:lnT>
+                    <a:lnB>
+                      <a:noFill/>
+                    </a:lnB>
+                    <a:noFill/>
+                  </a:tcPr>
+                </a:tc>
+                <a:tc>
+                  <a:txBody>
+                    <a:bodyPr/>
+                    <a:lstStyle/>
+                    <a:p>
+                      <a:pPr>
+                        <a:buNone/>
+                      </a:pPr>
+                      <a:r>
+                        <a:rPr lang="en-GB" sz="1600"/>
+                        <a:t>Get available locations (cities, states, countries).</a:t>
+                      </a:r>
+                    </a:p>
+                  </a:txBody>
+                  <a:tcPr marL="79201" marR="79201" marT="39601" marB="39601" anchor="ctr">
+                    <a:lnL>
+                      <a:noFill/>
+                    </a:lnL>
+                    <a:lnR>
+                      <a:noFill/>
+                    </a:lnR>
+                    <a:lnT>
+                      <a:noFill/>
+                    </a:lnT>
+                    <a:lnB>
+                      <a:noFill/>
+                    </a:lnB>
+                    <a:noFill/>
+                  </a:tcPr>
+                </a:tc>
+                <a:extLst>
+                  <a:ext uri="{0D108BD9-81ED-4DB2-BD59-A6C34878D82A}">
+                    <a16:rowId xmlns:a16="http://schemas.microsoft.com/office/drawing/2014/main" val="3926198582"/>
+                  </a:ext>
+                </a:extLst>
+              </a:tr>
+              <a:tr h="603919">
+                <a:tc>
+                  <a:txBody>
+                    <a:bodyPr/>
+                    <a:lstStyle/>
+                    <a:p>
+                      <a:pPr>
+                        <a:buNone/>
+                      </a:pPr>
+                      <a:r>
+                        <a:rPr lang="en-IN" sz="1600" b="1"/>
+                        <a:t>POST</a:t>
+                      </a:r>
+                      <a:endParaRPr lang="en-IN" sz="1600"/>
+                    </a:p>
+                  </a:txBody>
+                  <a:tcPr marL="79201" marR="79201" marT="39601" marB="39601" anchor="ctr">
+                    <a:lnL>
+                      <a:noFill/>
+                    </a:lnL>
+                    <a:lnR>
+                      <a:noFill/>
+                    </a:lnR>
+                    <a:lnT>
+                      <a:noFill/>
+                    </a:lnT>
+                    <a:lnB>
+                      <a:noFill/>
+                    </a:lnB>
+                    <a:noFill/>
+                  </a:tcPr>
+                </a:tc>
+                <a:tc>
+                  <a:txBody>
+                    <a:bodyPr/>
+                    <a:lstStyle/>
+                    <a:p>
+                      <a:pPr>
+                        <a:buNone/>
+                      </a:pPr>
+                      <a:r>
+                        <a:rPr lang="en-IN" sz="1600">
+                          <a:latin typeface="Courier New" panose="02070309020205020404" pitchFamily="49" charset="0"/>
+                        </a:rPr>
+                        <a:t>/api/v1/plan</a:t>
+                      </a:r>
+                      <a:endParaRPr lang="en-IN" sz="1600"/>
+                    </a:p>
+                  </a:txBody>
+                  <a:tcPr marL="79201" marR="79201" marT="39601" marB="39601" anchor="ctr">
+                    <a:lnL>
+                      <a:noFill/>
+                    </a:lnL>
+                    <a:lnR>
+                      <a:noFill/>
+                    </a:lnR>
+                    <a:lnT>
+                      <a:noFill/>
+                    </a:lnT>
+                    <a:lnB>
+                      <a:noFill/>
+                    </a:lnB>
+                    <a:noFill/>
+                  </a:tcPr>
+                </a:tc>
+                <a:tc>
+                  <a:txBody>
+                    <a:bodyPr/>
+                    <a:lstStyle/>
+                    <a:p>
+                      <a:pPr>
+                        <a:buNone/>
+                      </a:pPr>
+                      <a:r>
+                        <a:rPr lang="en-GB" sz="1600"/>
+                        <a:t>Create a new travel plan (AI-generated itinerary).</a:t>
+                      </a:r>
+                    </a:p>
+                  </a:txBody>
+                  <a:tcPr marL="79201" marR="79201" marT="39601" marB="39601" anchor="ctr">
+                    <a:lnL>
+                      <a:noFill/>
+                    </a:lnL>
+                    <a:lnR>
+                      <a:noFill/>
+                    </a:lnR>
+                    <a:lnT>
+                      <a:noFill/>
+                    </a:lnT>
+                    <a:lnB>
+                      <a:noFill/>
+                    </a:lnB>
+                    <a:noFill/>
+                  </a:tcPr>
+                </a:tc>
+                <a:extLst>
+                  <a:ext uri="{0D108BD9-81ED-4DB2-BD59-A6C34878D82A}">
+                    <a16:rowId xmlns:a16="http://schemas.microsoft.com/office/drawing/2014/main" val="3515551513"/>
+                  </a:ext>
+                </a:extLst>
+              </a:tr>
+              <a:tr h="603919">
+                <a:tc>
+                  <a:txBody>
+                    <a:bodyPr/>
+                    <a:lstStyle/>
+                    <a:p>
+                      <a:pPr>
+                        <a:buNone/>
+                      </a:pPr>
+                      <a:r>
+                        <a:rPr lang="en-IN" sz="1600" b="1"/>
+                        <a:t>GET</a:t>
+                      </a:r>
+                      <a:endParaRPr lang="en-IN" sz="1600"/>
+                    </a:p>
+                  </a:txBody>
+                  <a:tcPr marL="79201" marR="79201" marT="39601" marB="39601" anchor="ctr">
+                    <a:lnL>
+                      <a:noFill/>
+                    </a:lnL>
+                    <a:lnR>
+                      <a:noFill/>
+                    </a:lnR>
+                    <a:lnT>
+                      <a:noFill/>
+                    </a:lnT>
+                    <a:lnB>
+                      <a:noFill/>
+                    </a:lnB>
+                    <a:noFill/>
+                  </a:tcPr>
+                </a:tc>
+                <a:tc>
+                  <a:txBody>
+                    <a:bodyPr/>
+                    <a:lstStyle/>
+                    <a:p>
+                      <a:pPr>
+                        <a:buNone/>
+                      </a:pPr>
+                      <a:r>
+                        <a:rPr lang="en-IN" sz="1600">
+                          <a:latin typeface="Courier New" panose="02070309020205020404" pitchFamily="49" charset="0"/>
+                        </a:rPr>
+                        <a:t>/api/v1/plan/{user_id}</a:t>
+                      </a:r>
+                      <a:endParaRPr lang="en-IN" sz="1600"/>
+                    </a:p>
+                  </a:txBody>
+                  <a:tcPr marL="79201" marR="79201" marT="39601" marB="39601" anchor="ctr">
+                    <a:lnL>
+                      <a:noFill/>
+                    </a:lnL>
+                    <a:lnR>
+                      <a:noFill/>
+                    </a:lnR>
+                    <a:lnT>
+                      <a:noFill/>
+                    </a:lnT>
+                    <a:lnB>
+                      <a:noFill/>
+                    </a:lnB>
+                    <a:noFill/>
+                  </a:tcPr>
+                </a:tc>
+                <a:tc>
+                  <a:txBody>
+                    <a:bodyPr/>
+                    <a:lstStyle/>
+                    <a:p>
+                      <a:pPr>
+                        <a:buNone/>
+                      </a:pPr>
+                      <a:r>
+                        <a:rPr lang="en-GB" sz="1600"/>
+                        <a:t>Retrieve an existing travel plan by </a:t>
+                      </a:r>
+                      <a:r>
+                        <a:rPr lang="en-GB" sz="1600">
+                          <a:latin typeface="Courier New" panose="02070309020205020404" pitchFamily="49" charset="0"/>
+                        </a:rPr>
+                        <a:t>user_id</a:t>
+                      </a:r>
+                      <a:r>
+                        <a:rPr lang="en-GB" sz="1600"/>
+                        <a:t>.</a:t>
+                      </a:r>
+                    </a:p>
+                  </a:txBody>
+                  <a:tcPr marL="79201" marR="79201" marT="39601" marB="39601" anchor="ctr">
+                    <a:lnL>
+                      <a:noFill/>
+                    </a:lnL>
+                    <a:lnR>
+                      <a:noFill/>
+                    </a:lnR>
+                    <a:lnT>
+                      <a:noFill/>
+                    </a:lnT>
+                    <a:lnB>
+                      <a:noFill/>
+                    </a:lnB>
+                    <a:noFill/>
+                  </a:tcPr>
+                </a:tc>
+                <a:extLst>
+                  <a:ext uri="{0D108BD9-81ED-4DB2-BD59-A6C34878D82A}">
+                    <a16:rowId xmlns:a16="http://schemas.microsoft.com/office/drawing/2014/main" val="482179788"/>
+                  </a:ext>
+                </a:extLst>
+              </a:tr>
+              <a:tr h="603919">
+                <a:tc>
+                  <a:txBody>
+                    <a:bodyPr/>
+                    <a:lstStyle/>
+                    <a:p>
+                      <a:pPr>
+                        <a:buNone/>
+                      </a:pPr>
+                      <a:r>
+                        <a:rPr lang="en-IN" sz="1600" b="1"/>
+                        <a:t>POST</a:t>
+                      </a:r>
+                      <a:endParaRPr lang="en-IN" sz="1600"/>
+                    </a:p>
+                  </a:txBody>
+                  <a:tcPr marL="79201" marR="79201" marT="39601" marB="39601" anchor="ctr">
+                    <a:lnL>
+                      <a:noFill/>
+                    </a:lnL>
+                    <a:lnR>
+                      <a:noFill/>
+                    </a:lnR>
+                    <a:lnT>
+                      <a:noFill/>
+                    </a:lnT>
+                    <a:lnB>
+                      <a:noFill/>
+                    </a:lnB>
+                    <a:noFill/>
+                  </a:tcPr>
+                </a:tc>
+                <a:tc>
+                  <a:txBody>
+                    <a:bodyPr/>
+                    <a:lstStyle/>
+                    <a:p>
+                      <a:pPr>
+                        <a:buNone/>
+                      </a:pPr>
+                      <a:r>
+                        <a:rPr lang="en-IN" sz="1600" dirty="0">
+                          <a:latin typeface="Courier New" panose="02070309020205020404" pitchFamily="49" charset="0"/>
+                        </a:rPr>
+                        <a:t>/</a:t>
+                      </a:r>
+                      <a:r>
+                        <a:rPr lang="en-IN" sz="1600" dirty="0" err="1">
+                          <a:latin typeface="Courier New" panose="02070309020205020404" pitchFamily="49" charset="0"/>
+                        </a:rPr>
+                        <a:t>api</a:t>
+                      </a:r>
+                      <a:r>
+                        <a:rPr lang="en-IN" sz="1600" dirty="0">
+                          <a:latin typeface="Courier New" panose="02070309020205020404" pitchFamily="49" charset="0"/>
+                        </a:rPr>
+                        <a:t>/v1/suggestions</a:t>
+                      </a:r>
+                      <a:endParaRPr lang="en-IN" sz="1600" dirty="0"/>
+                    </a:p>
+                  </a:txBody>
+                  <a:tcPr marL="79201" marR="79201" marT="39601" marB="39601" anchor="ctr">
+                    <a:lnL>
+                      <a:noFill/>
+                    </a:lnL>
+                    <a:lnR>
+                      <a:noFill/>
+                    </a:lnR>
+                    <a:lnT>
+                      <a:noFill/>
+                    </a:lnT>
+                    <a:lnB>
+                      <a:noFill/>
+                    </a:lnB>
+                    <a:noFill/>
+                  </a:tcPr>
+                </a:tc>
+                <a:tc>
+                  <a:txBody>
+                    <a:bodyPr/>
+                    <a:lstStyle/>
+                    <a:p>
+                      <a:pPr>
+                        <a:buNone/>
+                      </a:pPr>
+                      <a:r>
+                        <a:rPr lang="en-GB" sz="1600"/>
+                        <a:t>Get tourist spots and hotel suggestions (low + high budget).</a:t>
+                      </a:r>
+                    </a:p>
+                  </a:txBody>
+                  <a:tcPr marL="79201" marR="79201" marT="39601" marB="39601" anchor="ctr">
+                    <a:lnL>
+                      <a:noFill/>
+                    </a:lnL>
+                    <a:lnR>
+                      <a:noFill/>
+                    </a:lnR>
+                    <a:lnT>
+                      <a:noFill/>
+                    </a:lnT>
+                    <a:lnB>
+                      <a:noFill/>
+                    </a:lnB>
+                    <a:noFill/>
+                  </a:tcPr>
+                </a:tc>
+                <a:extLst>
+                  <a:ext uri="{0D108BD9-81ED-4DB2-BD59-A6C34878D82A}">
+                    <a16:rowId xmlns:a16="http://schemas.microsoft.com/office/drawing/2014/main" val="553621048"/>
+                  </a:ext>
+                </a:extLst>
+              </a:tr>
+              <a:tr h="344148">
+                <a:tc>
+                  <a:txBody>
+                    <a:bodyPr/>
+                    <a:lstStyle/>
+                    <a:p>
+                      <a:pPr>
+                        <a:buNone/>
+                      </a:pPr>
+                      <a:r>
+                        <a:rPr lang="en-IN" sz="1600" b="1"/>
+                        <a:t>GET</a:t>
+                      </a:r>
+                      <a:endParaRPr lang="en-IN" sz="1600"/>
+                    </a:p>
+                  </a:txBody>
+                  <a:tcPr marL="79201" marR="79201" marT="39601" marB="39601" anchor="ctr">
+                    <a:lnL>
+                      <a:noFill/>
+                    </a:lnL>
+                    <a:lnR>
+                      <a:noFill/>
+                    </a:lnR>
+                    <a:lnT>
+                      <a:noFill/>
+                    </a:lnT>
+                    <a:lnB>
+                      <a:noFill/>
+                    </a:lnB>
+                    <a:noFill/>
+                  </a:tcPr>
+                </a:tc>
+                <a:tc>
+                  <a:txBody>
+                    <a:bodyPr/>
+                    <a:lstStyle/>
+                    <a:p>
+                      <a:pPr>
+                        <a:buNone/>
+                      </a:pPr>
+                      <a:r>
+                        <a:rPr lang="en-IN" sz="1600">
+                          <a:latin typeface="Courier New" panose="02070309020205020404" pitchFamily="49" charset="0"/>
+                        </a:rPr>
+                        <a:t>/api/v1/search</a:t>
+                      </a:r>
+                      <a:endParaRPr lang="en-IN" sz="1600"/>
+                    </a:p>
+                  </a:txBody>
+                  <a:tcPr marL="79201" marR="79201" marT="39601" marB="39601" anchor="ctr">
+                    <a:lnL>
+                      <a:noFill/>
+                    </a:lnL>
+                    <a:lnR>
+                      <a:noFill/>
+                    </a:lnR>
+                    <a:lnT>
+                      <a:noFill/>
+                    </a:lnT>
+                    <a:lnB>
+                      <a:noFill/>
+                    </a:lnB>
+                    <a:noFill/>
+                  </a:tcPr>
+                </a:tc>
+                <a:tc>
+                  <a:txBody>
+                    <a:bodyPr/>
+                    <a:lstStyle/>
+                    <a:p>
+                      <a:pPr>
+                        <a:buNone/>
+                      </a:pPr>
+                      <a:r>
+                        <a:rPr lang="en-GB" sz="1600"/>
+                        <a:t>Search travel plans by destination.</a:t>
+                      </a:r>
+                    </a:p>
+                  </a:txBody>
+                  <a:tcPr marL="79201" marR="79201" marT="39601" marB="39601" anchor="ctr">
+                    <a:lnL>
+                      <a:noFill/>
+                    </a:lnL>
+                    <a:lnR>
+                      <a:noFill/>
+                    </a:lnR>
+                    <a:lnT>
+                      <a:noFill/>
+                    </a:lnT>
+                    <a:lnB>
+                      <a:noFill/>
+                    </a:lnB>
+                    <a:noFill/>
+                  </a:tcPr>
+                </a:tc>
+                <a:extLst>
+                  <a:ext uri="{0D108BD9-81ED-4DB2-BD59-A6C34878D82A}">
+                    <a16:rowId xmlns:a16="http://schemas.microsoft.com/office/drawing/2014/main" val="2344021241"/>
+                  </a:ext>
+                </a:extLst>
+              </a:tr>
+              <a:tr h="603919">
+                <a:tc>
+                  <a:txBody>
+                    <a:bodyPr/>
+                    <a:lstStyle/>
+                    <a:p>
+                      <a:pPr>
+                        <a:buNone/>
+                      </a:pPr>
+                      <a:r>
+                        <a:rPr lang="en-IN" sz="1600" b="1"/>
+                        <a:t>POST</a:t>
+                      </a:r>
+                      <a:endParaRPr lang="en-IN" sz="1600"/>
+                    </a:p>
+                  </a:txBody>
+                  <a:tcPr marL="79201" marR="79201" marT="39601" marB="39601" anchor="ctr">
+                    <a:lnL>
+                      <a:noFill/>
+                    </a:lnL>
+                    <a:lnR>
+                      <a:noFill/>
+                    </a:lnR>
+                    <a:lnT>
+                      <a:noFill/>
+                    </a:lnT>
+                    <a:lnB>
+                      <a:noFill/>
+                    </a:lnB>
+                    <a:noFill/>
+                  </a:tcPr>
+                </a:tc>
+                <a:tc>
+                  <a:txBody>
+                    <a:bodyPr/>
+                    <a:lstStyle/>
+                    <a:p>
+                      <a:pPr>
+                        <a:buNone/>
+                      </a:pPr>
+                      <a:r>
+                        <a:rPr lang="en-IN" sz="1600">
+                          <a:latin typeface="Courier New" panose="02070309020205020404" pitchFamily="49" charset="0"/>
+                        </a:rPr>
+                        <a:t>/api/v1/feedback</a:t>
+                      </a:r>
+                      <a:endParaRPr lang="en-IN" sz="1600"/>
+                    </a:p>
+                  </a:txBody>
+                  <a:tcPr marL="79201" marR="79201" marT="39601" marB="39601" anchor="ctr">
+                    <a:lnL>
+                      <a:noFill/>
+                    </a:lnL>
+                    <a:lnR>
+                      <a:noFill/>
+                    </a:lnR>
+                    <a:lnT>
+                      <a:noFill/>
+                    </a:lnT>
+                    <a:lnB>
+                      <a:noFill/>
+                    </a:lnB>
+                    <a:noFill/>
+                  </a:tcPr>
+                </a:tc>
+                <a:tc>
+                  <a:txBody>
+                    <a:bodyPr/>
+                    <a:lstStyle/>
+                    <a:p>
+                      <a:pPr>
+                        <a:buNone/>
+                      </a:pPr>
+                      <a:r>
+                        <a:rPr lang="en-GB" sz="1600"/>
+                        <a:t>Submit feedback (rating + comments) for a plan.</a:t>
+                      </a:r>
+                    </a:p>
+                  </a:txBody>
+                  <a:tcPr marL="79201" marR="79201" marT="39601" marB="39601" anchor="ctr">
+                    <a:lnL>
+                      <a:noFill/>
+                    </a:lnL>
+                    <a:lnR>
+                      <a:noFill/>
+                    </a:lnR>
+                    <a:lnT>
+                      <a:noFill/>
+                    </a:lnT>
+                    <a:lnB>
+                      <a:noFill/>
+                    </a:lnB>
+                    <a:noFill/>
+                  </a:tcPr>
+                </a:tc>
+                <a:extLst>
+                  <a:ext uri="{0D108BD9-81ED-4DB2-BD59-A6C34878D82A}">
+                    <a16:rowId xmlns:a16="http://schemas.microsoft.com/office/drawing/2014/main" val="3304745807"/>
+                  </a:ext>
+                </a:extLst>
+              </a:tr>
+              <a:tr h="603919">
+                <a:tc>
+                  <a:txBody>
+                    <a:bodyPr/>
+                    <a:lstStyle/>
+                    <a:p>
+                      <a:pPr>
+                        <a:buNone/>
+                      </a:pPr>
+                      <a:r>
+                        <a:rPr lang="en-IN" sz="1600" b="1"/>
+                        <a:t>POST</a:t>
+                      </a:r>
+                      <a:endParaRPr lang="en-IN" sz="1600"/>
+                    </a:p>
+                  </a:txBody>
+                  <a:tcPr marL="79201" marR="79201" marT="39601" marB="39601" anchor="ctr">
+                    <a:lnL>
+                      <a:noFill/>
+                    </a:lnL>
+                    <a:lnR>
+                      <a:noFill/>
+                    </a:lnR>
+                    <a:lnT>
+                      <a:noFill/>
+                    </a:lnT>
+                    <a:lnB>
+                      <a:noFill/>
+                    </a:lnB>
+                    <a:noFill/>
+                  </a:tcPr>
+                </a:tc>
+                <a:tc>
+                  <a:txBody>
+                    <a:bodyPr/>
+                    <a:lstStyle/>
+                    <a:p>
+                      <a:pPr>
+                        <a:buNone/>
+                      </a:pPr>
+                      <a:r>
+                        <a:rPr lang="en-IN" sz="1600">
+                          <a:latin typeface="Courier New" panose="02070309020205020404" pitchFamily="49" charset="0"/>
+                        </a:rPr>
+                        <a:t>/api/v1/group_trip</a:t>
+                      </a:r>
+                      <a:endParaRPr lang="en-IN" sz="1600"/>
+                    </a:p>
+                  </a:txBody>
+                  <a:tcPr marL="79201" marR="79201" marT="39601" marB="39601" anchor="ctr">
+                    <a:lnL>
+                      <a:noFill/>
+                    </a:lnL>
+                    <a:lnR>
+                      <a:noFill/>
+                    </a:lnR>
+                    <a:lnT>
+                      <a:noFill/>
+                    </a:lnT>
+                    <a:lnB>
+                      <a:noFill/>
+                    </a:lnB>
+                    <a:noFill/>
+                  </a:tcPr>
+                </a:tc>
+                <a:tc>
+                  <a:txBody>
+                    <a:bodyPr/>
+                    <a:lstStyle/>
+                    <a:p>
+                      <a:pPr>
+                        <a:buNone/>
+                      </a:pPr>
+                      <a:r>
+                        <a:rPr lang="en-GB" sz="1600"/>
+                        <a:t>Register group trip details (travelers info).</a:t>
+                      </a:r>
+                    </a:p>
+                  </a:txBody>
+                  <a:tcPr marL="79201" marR="79201" marT="39601" marB="39601" anchor="ctr">
+                    <a:lnL>
+                      <a:noFill/>
+                    </a:lnL>
+                    <a:lnR>
+                      <a:noFill/>
+                    </a:lnR>
+                    <a:lnT>
+                      <a:noFill/>
+                    </a:lnT>
+                    <a:lnB>
+                      <a:noFill/>
+                    </a:lnB>
+                    <a:noFill/>
+                  </a:tcPr>
+                </a:tc>
+                <a:extLst>
+                  <a:ext uri="{0D108BD9-81ED-4DB2-BD59-A6C34878D82A}">
+                    <a16:rowId xmlns:a16="http://schemas.microsoft.com/office/drawing/2014/main" val="4200836706"/>
+                  </a:ext>
+                </a:extLst>
+              </a:tr>
+              <a:tr h="603919">
+                <a:tc>
+                  <a:txBody>
+                    <a:bodyPr/>
+                    <a:lstStyle/>
+                    <a:p>
+                      <a:pPr>
+                        <a:buNone/>
+                      </a:pPr>
+                      <a:r>
+                        <a:rPr lang="en-IN" sz="1600" b="1"/>
+                        <a:t>POST</a:t>
+                      </a:r>
+                      <a:endParaRPr lang="en-IN" sz="1600"/>
+                    </a:p>
+                  </a:txBody>
+                  <a:tcPr marL="79201" marR="79201" marT="39601" marB="39601" anchor="ctr">
+                    <a:lnL>
+                      <a:noFill/>
+                    </a:lnL>
+                    <a:lnR>
+                      <a:noFill/>
+                    </a:lnR>
+                    <a:lnT>
+                      <a:noFill/>
+                    </a:lnT>
+                    <a:lnB>
+                      <a:noFill/>
+                    </a:lnB>
+                    <a:noFill/>
+                  </a:tcPr>
+                </a:tc>
+                <a:tc>
+                  <a:txBody>
+                    <a:bodyPr/>
+                    <a:lstStyle/>
+                    <a:p>
+                      <a:pPr>
+                        <a:buNone/>
+                      </a:pPr>
+                      <a:r>
+                        <a:rPr lang="en-IN" sz="1600">
+                          <a:latin typeface="Courier New" panose="02070309020205020404" pitchFamily="49" charset="0"/>
+                        </a:rPr>
+                        <a:t>/api/v1/group-trip</a:t>
+                      </a:r>
+                      <a:endParaRPr lang="en-IN" sz="1600"/>
+                    </a:p>
+                  </a:txBody>
+                  <a:tcPr marL="79201" marR="79201" marT="39601" marB="39601" anchor="ctr">
+                    <a:lnL>
+                      <a:noFill/>
+                    </a:lnL>
+                    <a:lnR>
+                      <a:noFill/>
+                    </a:lnR>
+                    <a:lnT>
+                      <a:noFill/>
+                    </a:lnT>
+                    <a:lnB>
+                      <a:noFill/>
+                    </a:lnB>
+                    <a:noFill/>
+                  </a:tcPr>
+                </a:tc>
+                <a:tc>
+                  <a:txBody>
+                    <a:bodyPr/>
+                    <a:lstStyle/>
+                    <a:p>
+                      <a:pPr>
+                        <a:buNone/>
+                      </a:pPr>
+                      <a:r>
+                        <a:rPr lang="en-GB" sz="1600"/>
+                        <a:t>Alternative endpoint for creating group trips.</a:t>
+                      </a:r>
+                    </a:p>
+                  </a:txBody>
+                  <a:tcPr marL="79201" marR="79201" marT="39601" marB="39601" anchor="ctr">
+                    <a:lnL>
+                      <a:noFill/>
+                    </a:lnL>
+                    <a:lnR>
+                      <a:noFill/>
+                    </a:lnR>
+                    <a:lnT>
+                      <a:noFill/>
+                    </a:lnT>
+                    <a:lnB>
+                      <a:noFill/>
+                    </a:lnB>
+                    <a:noFill/>
+                  </a:tcPr>
+                </a:tc>
+                <a:extLst>
+                  <a:ext uri="{0D108BD9-81ED-4DB2-BD59-A6C34878D82A}">
+                    <a16:rowId xmlns:a16="http://schemas.microsoft.com/office/drawing/2014/main" val="1714667528"/>
+                  </a:ext>
+                </a:extLst>
+              </a:tr>
+              <a:tr h="603919">
+                <a:tc>
+                  <a:txBody>
+                    <a:bodyPr/>
+                    <a:lstStyle/>
+                    <a:p>
+                      <a:pPr>
+                        <a:buNone/>
+                      </a:pPr>
+                      <a:r>
+                        <a:rPr lang="en-IN" sz="1600" b="1"/>
+                        <a:t>POST</a:t>
+                      </a:r>
+                      <a:endParaRPr lang="en-IN" sz="1600"/>
+                    </a:p>
+                  </a:txBody>
+                  <a:tcPr marL="79201" marR="79201" marT="39601" marB="39601" anchor="ctr">
+                    <a:lnL>
+                      <a:noFill/>
+                    </a:lnL>
+                    <a:lnR>
+                      <a:noFill/>
+                    </a:lnR>
+                    <a:lnT>
+                      <a:noFill/>
+                    </a:lnT>
+                    <a:lnB>
+                      <a:noFill/>
+                    </a:lnB>
+                    <a:noFill/>
+                  </a:tcPr>
+                </a:tc>
+                <a:tc>
+                  <a:txBody>
+                    <a:bodyPr/>
+                    <a:lstStyle/>
+                    <a:p>
+                      <a:pPr>
+                        <a:buNone/>
+                      </a:pPr>
+                      <a:r>
+                        <a:rPr lang="en-IN" sz="1600">
+                          <a:latin typeface="Courier New" panose="02070309020205020404" pitchFamily="49" charset="0"/>
+                        </a:rPr>
+                        <a:t>/api/v1/book</a:t>
+                      </a:r>
+                      <a:endParaRPr lang="en-IN" sz="1600"/>
+                    </a:p>
+                  </a:txBody>
+                  <a:tcPr marL="79201" marR="79201" marT="39601" marB="39601" anchor="ctr">
+                    <a:lnL>
+                      <a:noFill/>
+                    </a:lnL>
+                    <a:lnR>
+                      <a:noFill/>
+                    </a:lnR>
+                    <a:lnT>
+                      <a:noFill/>
+                    </a:lnT>
+                    <a:lnB>
+                      <a:noFill/>
+                    </a:lnB>
+                    <a:noFill/>
+                  </a:tcPr>
+                </a:tc>
+                <a:tc>
+                  <a:txBody>
+                    <a:bodyPr/>
+                    <a:lstStyle/>
+                    <a:p>
+                      <a:pPr>
+                        <a:buNone/>
+                      </a:pPr>
+                      <a:r>
+                        <a:rPr lang="en-GB" sz="1600" dirty="0"/>
+                        <a:t>Book trip automatically (transport, hotel, restaurant).</a:t>
+                      </a:r>
+                    </a:p>
+                  </a:txBody>
+                  <a:tcPr marL="79201" marR="79201" marT="39601" marB="39601" anchor="ctr">
+                    <a:lnL>
+                      <a:noFill/>
+                    </a:lnL>
+                    <a:lnR>
+                      <a:noFill/>
+                    </a:lnR>
+                    <a:lnT>
+                      <a:noFill/>
+                    </a:lnT>
+                    <a:lnB>
+                      <a:noFill/>
+                    </a:lnB>
+                    <a:noFill/>
+                  </a:tcPr>
+                </a:tc>
+                <a:extLst>
+                  <a:ext uri="{0D108BD9-81ED-4DB2-BD59-A6C34878D82A}">
+                    <a16:rowId xmlns:a16="http://schemas.microsoft.com/office/drawing/2014/main" val="1795250735"/>
+                  </a:ext>
+                </a:extLst>
+              </a:tr>
+            </a:tbl>
+          </a:graphicData>
+        </a:graphic>
+      </p:graphicFrame>
     </p:spTree>
     <p:extLst>
       <p:ext uri="{BB962C8B-B14F-4D97-AF65-F5344CB8AC3E}">
-        <p14:creationId xmlns:p14="http://schemas.microsoft.com/office/powerpoint/2010/main" val="595700187"/>
+        <p14:creationId xmlns:p14="http://schemas.microsoft.com/office/powerpoint/2010/main" val="2344580420"/>
       </p:ext>
     </p:extLst>
   </p:cSld>
   <p:clrMapOvr>
     <a:masterClrMapping/>
   </p:clrMapOvr>
-  <p:transition spd="slow">
-    <p:push dir="u"/>
-  </p:transition>
 </p:sld>
 </file>
 
@@ -14705,7 +15222,7 @@
     </a:clrScheme>
     <a:fontScheme name="Office">
       <a:majorFont>
-        <a:latin typeface="Calibri Light" panose="020F0302020204030204"/>
+        <a:latin typeface="Calibri Light"/>
         <a:ea typeface=""/>
         <a:cs typeface=""/>
         <a:font script="Jpan" typeface="游ゴシック Light"/>
@@ -14738,26 +15255,9 @@
         <a:font script="Viet" typeface="Times New Roman"/>
         <a:font script="Uigh" typeface="Microsoft Uighur"/>
         <a:font script="Geor" typeface="Sylfaen"/>
-        <a:font script="Armn" typeface="Arial"/>
-        <a:font script="Bugi" typeface="Leelawadee UI"/>
-        <a:font script="Bopo" typeface="Microsoft JhengHei"/>
-        <a:font script="Java" typeface="Javanese Text"/>
-        <a:font script="Lisu" typeface="Segoe UI"/>
-        <a:font script="Mymr" typeface="Myanmar Text"/>
-        <a:font script="Nkoo" typeface="Ebrima"/>
-        <a:font script="Olck" typeface="Nirmala UI"/>
-        <a:font script="Osma" typeface="Ebrima"/>
-        <a:font script="Phag" typeface="Phagspa"/>
-        <a:font script="Syrn" typeface="Estrangelo Edessa"/>
-        <a:font script="Syrj" typeface="Estrangelo Edessa"/>
-        <a:font script="Syre" typeface="Estrangelo Edessa"/>
-        <a:font script="Sora" typeface="Nirmala UI"/>
-        <a:font script="Tale" typeface="Microsoft Tai Le"/>
-        <a:font script="Talu" typeface="Microsoft New Tai Lue"/>
-        <a:font script="Tfng" typeface="Ebrima"/>
       </a:majorFont>
       <a:minorFont>
-        <a:latin typeface="Calibri" panose="020F0502020204030204"/>
+        <a:latin typeface="Calibri"/>
         <a:ea typeface=""/>
         <a:cs typeface=""/>
         <a:font script="Jpan" typeface="游ゴシック"/>
@@ -14790,23 +15290,6 @@
         <a:font script="Viet" typeface="Arial"/>
         <a:font script="Uigh" typeface="Microsoft Uighur"/>
         <a:font script="Geor" typeface="Sylfaen"/>
-        <a:font script="Armn" typeface="Arial"/>
-        <a:font script="Bugi" typeface="Leelawadee UI"/>
-        <a:font script="Bopo" typeface="Microsoft JhengHei"/>
-        <a:font script="Java" typeface="Javanese Text"/>
-        <a:font script="Lisu" typeface="Segoe UI"/>
-        <a:font script="Mymr" typeface="Myanmar Text"/>
-        <a:font script="Nkoo" typeface="Ebrima"/>
-        <a:font script="Olck" typeface="Nirmala UI"/>
-        <a:font script="Osma" typeface="Ebrima"/>
-        <a:font script="Phag" typeface="Phagspa"/>
-        <a:font script="Syrn" typeface="Estrangelo Edessa"/>
-        <a:font script="Syrj" typeface="Estrangelo Edessa"/>
-        <a:font script="Syre" typeface="Estrangelo Edessa"/>
-        <a:font script="Sora" typeface="Nirmala UI"/>
-        <a:font script="Tale" typeface="Microsoft Tai Le"/>
-        <a:font script="Talu" typeface="Microsoft New Tai Lue"/>
-        <a:font script="Tfng" typeface="Ebrima"/>
       </a:minorFont>
     </a:fontScheme>
     <a:fmtScheme name="Office">
@@ -15000,7 +15483,7 @@
     </a:clrScheme>
     <a:fontScheme name="Office">
       <a:majorFont>
-        <a:latin typeface="Calibri Light" panose="020F0302020204030204"/>
+        <a:latin typeface="Calibri Light"/>
         <a:ea typeface=""/>
         <a:cs typeface=""/>
         <a:font script="Jpan" typeface="游ゴシック Light"/>
@@ -15033,26 +15516,9 @@
         <a:font script="Viet" typeface="Times New Roman"/>
         <a:font script="Uigh" typeface="Microsoft Uighur"/>
         <a:font script="Geor" typeface="Sylfaen"/>
-        <a:font script="Armn" typeface="Arial"/>
-        <a:font script="Bugi" typeface="Leelawadee UI"/>
-        <a:font script="Bopo" typeface="Microsoft JhengHei"/>
-        <a:font script="Java" typeface="Javanese Text"/>
-        <a:font script="Lisu" typeface="Segoe UI"/>
-        <a:font script="Mymr" typeface="Myanmar Text"/>
-        <a:font script="Nkoo" typeface="Ebrima"/>
-        <a:font script="Olck" typeface="Nirmala UI"/>
-        <a:font script="Osma" typeface="Ebrima"/>
-        <a:font script="Phag" typeface="Phagspa"/>
-        <a:font script="Syrn" typeface="Estrangelo Edessa"/>
-        <a:font script="Syrj" typeface="Estrangelo Edessa"/>
-        <a:font script="Syre" typeface="Estrangelo Edessa"/>
-        <a:font script="Sora" typeface="Nirmala UI"/>
-        <a:font script="Tale" typeface="Microsoft Tai Le"/>
-        <a:font script="Talu" typeface="Microsoft New Tai Lue"/>
-        <a:font script="Tfng" typeface="Ebrima"/>
       </a:majorFont>
       <a:minorFont>
-        <a:latin typeface="Calibri" panose="020F0502020204030204"/>
+        <a:latin typeface="Calibri"/>
         <a:ea typeface=""/>
         <a:cs typeface=""/>
         <a:font script="Jpan" typeface="游ゴシック"/>
@@ -15085,23 +15551,6 @@
         <a:font script="Viet" typeface="Arial"/>
         <a:font script="Uigh" typeface="Microsoft Uighur"/>
         <a:font script="Geor" typeface="Sylfaen"/>
-        <a:font script="Armn" typeface="Arial"/>
-        <a:font script="Bugi" typeface="Leelawadee UI"/>
-        <a:font script="Bopo" typeface="Microsoft JhengHei"/>
-        <a:font script="Java" typeface="Javanese Text"/>
-        <a:font script="Lisu" typeface="Segoe UI"/>
-        <a:font script="Mymr" typeface="Myanmar Text"/>
-        <a:font script="Nkoo" typeface="Ebrima"/>
-        <a:font script="Olck" typeface="Nirmala UI"/>
-        <a:font script="Osma" typeface="Ebrima"/>
-        <a:font script="Phag" typeface="Phagspa"/>
-        <a:font script="Syrn" typeface="Estrangelo Edessa"/>
-        <a:font script="Syrj" typeface="Estrangelo Edessa"/>
-        <a:font script="Syre" typeface="Estrangelo Edessa"/>
-        <a:font script="Sora" typeface="Nirmala UI"/>
-        <a:font script="Tale" typeface="Microsoft Tai Le"/>
-        <a:font script="Talu" typeface="Microsoft New Tai Lue"/>
-        <a:font script="Tfng" typeface="Ebrima"/>
       </a:minorFont>
     </a:fontScheme>
     <a:fmtScheme name="Office">
